--- a/crypto_05_exchanges.pptx
+++ b/crypto_05_exchanges.pptx
@@ -8528,8 +8528,8 @@
         </p:nvSpPr>
         <p:spPr>
           <a:xfrm>
-            <a:off x="88913" y="793703"/>
-            <a:ext cx="3975087" cy="2523768"/>
+            <a:off x="85096" y="523220"/>
+            <a:ext cx="5080793" cy="2677656"/>
           </a:xfrm>
           <a:prstGeom prst="rect">
             <a:avLst/>
@@ -8584,7 +8584,7 @@
             </a:pPr>
             <a:r>
               <a:rPr lang="en-US" sz="1400"/>
-              <a:t>89 Mln users in 100+ countries</a:t>
+              <a:t>90 Mln users in 100+ countries</a:t>
             </a:r>
           </a:p>
           <a:p>
@@ -8623,13 +8623,13 @@
               <a:buChar char="•"/>
             </a:pPr>
             <a:r>
-              <a:rPr lang="en-US" sz="1000">
+              <a:rPr lang="en-US" sz="1400">
                 <a:hlinkClick r:id="rId4"/>
               </a:rPr>
               <a:t>https://github.com/coinbase</a:t>
             </a:r>
             <a:r>
-              <a:rPr lang="en-US" sz="1000"/>
+              <a:rPr lang="en-US" sz="1400"/>
               <a:t> - </a:t>
             </a:r>
           </a:p>
@@ -8639,13 +8639,13 @@
               <a:buChar char="•"/>
             </a:pPr>
             <a:r>
-              <a:rPr lang="en-US" sz="1000">
+              <a:rPr lang="en-US" sz="1400">
                 <a:hlinkClick r:id="rId5"/>
               </a:rPr>
               <a:t>https://github.com/coinbase/coinbase-commerce-python</a:t>
             </a:r>
             <a:r>
-              <a:rPr lang="en-US" sz="1000"/>
+              <a:rPr lang="en-US" sz="1400"/>
               <a:t> - </a:t>
             </a:r>
           </a:p>
@@ -8655,13 +8655,13 @@
               <a:buChar char="•"/>
             </a:pPr>
             <a:r>
-              <a:rPr lang="en-US" sz="1000">
+              <a:rPr lang="en-US" sz="1400">
                 <a:hlinkClick r:id="rId6"/>
               </a:rPr>
               <a:t>https://github.com/coinbase/coinbase-python</a:t>
             </a:r>
             <a:r>
-              <a:rPr lang="en-US" sz="1000"/>
+              <a:rPr lang="en-US" sz="1400"/>
               <a:t> - </a:t>
             </a:r>
           </a:p>
@@ -8671,22 +8671,12 @@
               <a:buChar char="•"/>
             </a:pPr>
             <a:r>
-              <a:rPr lang="en-US" sz="1000">
+              <a:rPr lang="en-US" sz="1400">
                 <a:hlinkClick r:id="rId7"/>
               </a:rPr>
               <a:t>https://github.com/coinbase/coinbase-python/tree/master/coinbase/wallet</a:t>
             </a:r>
-            <a:endParaRPr lang="en-US" sz="1000"/>
-          </a:p>
-          <a:p>
-            <a:pPr marL="380990" indent="-380990">
-              <a:buFont typeface="Arial" panose="020B0604020202020204" pitchFamily="34" charset="0"/>
-              <a:buChar char="•"/>
-            </a:pPr>
-            <a:r>
-              <a:rPr lang="en-US" sz="1000"/>
-              <a:t>...</a:t>
-            </a:r>
+            <a:endParaRPr lang="en-US" sz="1400"/>
           </a:p>
         </p:txBody>
       </p:sp>
@@ -8754,14 +8744,172 @@
         </p:blipFill>
         <p:spPr>
           <a:xfrm>
-            <a:off x="4860758" y="1548915"/>
-            <a:ext cx="6648772" cy="5223620"/>
+            <a:off x="5704624" y="1723116"/>
+            <a:ext cx="6304525" cy="4953162"/>
           </a:xfrm>
           <a:prstGeom prst="rect">
             <a:avLst/>
           </a:prstGeom>
         </p:spPr>
       </p:pic>
+      <p:sp>
+        <p:nvSpPr>
+          <p:cNvPr id="6" name="TextBox 5">
+            <a:extLst>
+              <a:ext uri="{FF2B5EF4-FFF2-40B4-BE49-F238E27FC236}">
+                <a16:creationId xmlns:a16="http://schemas.microsoft.com/office/drawing/2014/main" id="{9B8B3165-446B-274F-78F2-9CF09CB87BD8}"/>
+              </a:ext>
+            </a:extLst>
+          </p:cNvPr>
+          <p:cNvSpPr txBox="1"/>
+          <p:nvPr/>
+        </p:nvSpPr>
+        <p:spPr>
+          <a:xfrm>
+            <a:off x="85096" y="3783178"/>
+            <a:ext cx="5241049" cy="2893100"/>
+          </a:xfrm>
+          <a:prstGeom prst="rect">
+            <a:avLst/>
+          </a:prstGeom>
+          <a:noFill/>
+        </p:spPr>
+        <p:txBody>
+          <a:bodyPr wrap="square" rtlCol="0">
+            <a:spAutoFit/>
+          </a:bodyPr>
+          <a:lstStyle/>
+          <a:p>
+            <a:r>
+              <a:rPr lang="en-US" sz="1400"/>
+              <a:t>The name "</a:t>
+            </a:r>
+            <a:r>
+              <a:rPr lang="en-US" sz="1400" b="1">
+                <a:solidFill>
+                  <a:srgbClr val="FF0000"/>
+                </a:solidFill>
+              </a:rPr>
+              <a:t>coinbase</a:t>
+            </a:r>
+            <a:r>
+              <a:rPr lang="en-US" sz="1400"/>
+              <a:t>" comes from so called "</a:t>
+            </a:r>
+            <a:r>
+              <a:rPr lang="en-US" sz="1400" b="1">
+                <a:solidFill>
+                  <a:srgbClr val="FF0000"/>
+                </a:solidFill>
+              </a:rPr>
+              <a:t>coinbase transactions</a:t>
+            </a:r>
+            <a:r>
+              <a:rPr lang="en-US" sz="1400"/>
+              <a:t>". </a:t>
+            </a:r>
+          </a:p>
+          <a:p>
+            <a:endParaRPr lang="en-US" sz="1400"/>
+          </a:p>
+          <a:p>
+            <a:r>
+              <a:rPr lang="en-US" sz="1400"/>
+              <a:t>The first transaction that took place in Bitcoin was not the result of a payment between two people. It was a special transaction of the genesis block that formatted reward transactions for miners. </a:t>
+            </a:r>
+          </a:p>
+          <a:p>
+            <a:endParaRPr lang="en-US" sz="1400"/>
+          </a:p>
+          <a:p>
+            <a:r>
+              <a:rPr lang="en-US" sz="1400"/>
+              <a:t>These </a:t>
+            </a:r>
+            <a:r>
+              <a:rPr lang="en-US" sz="1400" b="1">
+                <a:solidFill>
+                  <a:srgbClr val="FF0000"/>
+                </a:solidFill>
+              </a:rPr>
+              <a:t>reward transactions</a:t>
+            </a:r>
+            <a:r>
+              <a:rPr lang="en-US" sz="1400"/>
+              <a:t> are called </a:t>
+            </a:r>
+            <a:r>
+              <a:rPr lang="en-US" sz="1400" b="1">
+                <a:solidFill>
+                  <a:srgbClr val="FF0000"/>
+                </a:solidFill>
+              </a:rPr>
+              <a:t>coinbase transactions</a:t>
+            </a:r>
+            <a:r>
+              <a:rPr lang="en-US" sz="1400"/>
+              <a:t>. </a:t>
+            </a:r>
+          </a:p>
+          <a:p>
+            <a:r>
+              <a:rPr lang="en-US" sz="1400"/>
+              <a:t>Each </a:t>
+            </a:r>
+            <a:r>
+              <a:rPr lang="en-US" sz="1400" b="1">
+                <a:solidFill>
+                  <a:srgbClr val="FF0000"/>
+                </a:solidFill>
+              </a:rPr>
+              <a:t>coinbase transaction</a:t>
+            </a:r>
+            <a:r>
+              <a:rPr lang="en-US" sz="1400"/>
+              <a:t> is responsible for transmitting the virgin coins to the miner who has resolved the block.</a:t>
+            </a:r>
+          </a:p>
+          <a:p>
+            <a:endParaRPr lang="en-US" sz="1400" b="1">
+              <a:solidFill>
+                <a:srgbClr val="FF0000"/>
+              </a:solidFill>
+            </a:endParaRPr>
+          </a:p>
+          <a:p>
+            <a:r>
+              <a:rPr lang="en-US" sz="1400" b="1">
+                <a:solidFill>
+                  <a:srgbClr val="FF0000"/>
+                </a:solidFill>
+              </a:rPr>
+              <a:t>Coinbase transactions</a:t>
+            </a:r>
+            <a:r>
+              <a:rPr lang="en-US" sz="1400"/>
+              <a:t> are also known as </a:t>
+            </a:r>
+            <a:r>
+              <a:rPr lang="en-US" sz="1400" b="1">
+                <a:solidFill>
+                  <a:srgbClr val="FF0000"/>
+                </a:solidFill>
+              </a:rPr>
+              <a:t>generating transactions</a:t>
+            </a:r>
+            <a:r>
+              <a:rPr lang="en-US" sz="1400"/>
+              <a:t>. </a:t>
+            </a:r>
+          </a:p>
+          <a:p>
+            <a:r>
+              <a:rPr lang="en-US" sz="1400"/>
+              <a:t>In a nutshell, they are the genesis of the currencies that we can handle today across the entire Bitcoin blockchain.</a:t>
+            </a:r>
+          </a:p>
+        </p:txBody>
+      </p:sp>
     </p:spTree>
     <p:extLst>
       <p:ext uri="{BB962C8B-B14F-4D97-AF65-F5344CB8AC3E}">

--- a/crypto_05_exchanges.pptx
+++ b/crypto_05_exchanges.pptx
@@ -5,24 +5,26 @@
     <p:sldMasterId id="2147483834" r:id="rId1"/>
   </p:sldMasterIdLst>
   <p:notesMasterIdLst>
-    <p:notesMasterId r:id="rId17"/>
+    <p:notesMasterId r:id="rId19"/>
   </p:notesMasterIdLst>
   <p:sldIdLst>
     <p:sldId id="311" r:id="rId2"/>
     <p:sldId id="281" r:id="rId3"/>
-    <p:sldId id="262" r:id="rId4"/>
-    <p:sldId id="275" r:id="rId5"/>
-    <p:sldId id="305" r:id="rId6"/>
-    <p:sldId id="317" r:id="rId7"/>
-    <p:sldId id="318" r:id="rId8"/>
-    <p:sldId id="319" r:id="rId9"/>
-    <p:sldId id="320" r:id="rId10"/>
-    <p:sldId id="322" r:id="rId11"/>
-    <p:sldId id="323" r:id="rId12"/>
-    <p:sldId id="325" r:id="rId13"/>
-    <p:sldId id="315" r:id="rId14"/>
-    <p:sldId id="266" r:id="rId15"/>
-    <p:sldId id="283" r:id="rId16"/>
+    <p:sldId id="326" r:id="rId4"/>
+    <p:sldId id="262" r:id="rId5"/>
+    <p:sldId id="275" r:id="rId6"/>
+    <p:sldId id="305" r:id="rId7"/>
+    <p:sldId id="317" r:id="rId8"/>
+    <p:sldId id="318" r:id="rId9"/>
+    <p:sldId id="327" r:id="rId10"/>
+    <p:sldId id="319" r:id="rId11"/>
+    <p:sldId id="320" r:id="rId12"/>
+    <p:sldId id="322" r:id="rId13"/>
+    <p:sldId id="323" r:id="rId14"/>
+    <p:sldId id="325" r:id="rId15"/>
+    <p:sldId id="315" r:id="rId16"/>
+    <p:sldId id="266" r:id="rId17"/>
+    <p:sldId id="283" r:id="rId18"/>
   </p:sldIdLst>
   <p:sldSz cx="12192000" cy="6858000"/>
   <p:notesSz cx="6858000" cy="9144000"/>
@@ -821,7 +823,7 @@
           <a:p>
             <a:fld id="{EB1FAE4C-5332-014D-8E1B-BB8DA73EF81D}" type="datetimeFigureOut">
               <a:rPr lang="en-US"/>
-              <a:t>5/2/22</a:t>
+              <a:t>5/4/22</a:t>
             </a:fld>
             <a:endParaRPr lang="en-US"/>
           </a:p>
@@ -991,7 +993,7 @@
           <a:p>
             <a:fld id="{EB1FAE4C-5332-014D-8E1B-BB8DA73EF81D}" type="datetimeFigureOut">
               <a:rPr lang="en-US"/>
-              <a:t>5/2/22</a:t>
+              <a:t>5/4/22</a:t>
             </a:fld>
             <a:endParaRPr lang="en-US"/>
           </a:p>
@@ -1171,7 +1173,7 @@
           <a:p>
             <a:fld id="{EB1FAE4C-5332-014D-8E1B-BB8DA73EF81D}" type="datetimeFigureOut">
               <a:rPr lang="en-US"/>
-              <a:t>5/2/22</a:t>
+              <a:t>5/4/22</a:t>
             </a:fld>
             <a:endParaRPr lang="en-US"/>
           </a:p>
@@ -1341,7 +1343,7 @@
           <a:p>
             <a:fld id="{EB1FAE4C-5332-014D-8E1B-BB8DA73EF81D}" type="datetimeFigureOut">
               <a:rPr lang="en-US"/>
-              <a:t>5/2/22</a:t>
+              <a:t>5/4/22</a:t>
             </a:fld>
             <a:endParaRPr lang="en-US"/>
           </a:p>
@@ -1588,7 +1590,7 @@
           <a:p>
             <a:fld id="{EB1FAE4C-5332-014D-8E1B-BB8DA73EF81D}" type="datetimeFigureOut">
               <a:rPr lang="en-US"/>
-              <a:t>5/2/22</a:t>
+              <a:t>5/4/22</a:t>
             </a:fld>
             <a:endParaRPr lang="en-US"/>
           </a:p>
@@ -1819,7 +1821,7 @@
           <a:p>
             <a:fld id="{EB1FAE4C-5332-014D-8E1B-BB8DA73EF81D}" type="datetimeFigureOut">
               <a:rPr lang="en-US"/>
-              <a:t>5/2/22</a:t>
+              <a:t>5/4/22</a:t>
             </a:fld>
             <a:endParaRPr lang="en-US"/>
           </a:p>
@@ -2185,7 +2187,7 @@
           <a:p>
             <a:fld id="{EB1FAE4C-5332-014D-8E1B-BB8DA73EF81D}" type="datetimeFigureOut">
               <a:rPr lang="en-US"/>
-              <a:t>5/2/22</a:t>
+              <a:t>5/4/22</a:t>
             </a:fld>
             <a:endParaRPr lang="en-US"/>
           </a:p>
@@ -2304,7 +2306,7 @@
           <a:p>
             <a:fld id="{EB1FAE4C-5332-014D-8E1B-BB8DA73EF81D}" type="datetimeFigureOut">
               <a:rPr lang="en-US"/>
-              <a:t>5/2/22</a:t>
+              <a:t>5/4/22</a:t>
             </a:fld>
             <a:endParaRPr lang="en-US"/>
           </a:p>
@@ -2401,7 +2403,7 @@
           <a:p>
             <a:fld id="{EB1FAE4C-5332-014D-8E1B-BB8DA73EF81D}" type="datetimeFigureOut">
               <a:rPr lang="en-US"/>
-              <a:t>5/2/22</a:t>
+              <a:t>5/4/22</a:t>
             </a:fld>
             <a:endParaRPr lang="en-US"/>
           </a:p>
@@ -2677,7 +2679,7 @@
           <a:p>
             <a:fld id="{EB1FAE4C-5332-014D-8E1B-BB8DA73EF81D}" type="datetimeFigureOut">
               <a:rPr lang="en-US"/>
-              <a:t>5/2/22</a:t>
+              <a:t>5/4/22</a:t>
             </a:fld>
             <a:endParaRPr lang="en-US"/>
           </a:p>
@@ -2934,7 +2936,7 @@
           <a:p>
             <a:fld id="{EB1FAE4C-5332-014D-8E1B-BB8DA73EF81D}" type="datetimeFigureOut">
               <a:rPr lang="en-US"/>
-              <a:t>5/2/22</a:t>
+              <a:t>5/4/22</a:t>
             </a:fld>
             <a:endParaRPr lang="en-US"/>
           </a:p>
@@ -3147,7 +3149,7 @@
           <a:p>
             <a:fld id="{EB1FAE4C-5332-014D-8E1B-BB8DA73EF81D}" type="datetimeFigureOut">
               <a:rPr lang="en-US"/>
-              <a:t>5/2/22</a:t>
+              <a:t>5/4/22</a:t>
             </a:fld>
             <a:endParaRPr lang="en-US"/>
           </a:p>
@@ -4177,6 +4179,1116 @@
           <a:p>
             <a:r>
               <a:rPr lang="en-US" sz="2800" b="1"/>
+              <a:t>Bitstamp</a:t>
+            </a:r>
+          </a:p>
+        </p:txBody>
+      </p:sp>
+      <p:sp>
+        <p:nvSpPr>
+          <p:cNvPr id="4" name="TextBox 3">
+            <a:extLst>
+              <a:ext uri="{FF2B5EF4-FFF2-40B4-BE49-F238E27FC236}">
+                <a16:creationId xmlns:a16="http://schemas.microsoft.com/office/drawing/2014/main" id="{D450E834-9C35-33AB-8443-28E59C3504FF}"/>
+              </a:ext>
+            </a:extLst>
+          </p:cNvPr>
+          <p:cNvSpPr txBox="1"/>
+          <p:nvPr/>
+        </p:nvSpPr>
+        <p:spPr>
+          <a:xfrm>
+            <a:off x="-1" y="1712935"/>
+            <a:ext cx="5402424" cy="1600438"/>
+          </a:xfrm>
+          <a:prstGeom prst="rect">
+            <a:avLst/>
+          </a:prstGeom>
+          <a:noFill/>
+        </p:spPr>
+        <p:txBody>
+          <a:bodyPr wrap="square" rtlCol="0">
+            <a:spAutoFit/>
+          </a:bodyPr>
+          <a:lstStyle/>
+          <a:p>
+            <a:pPr marL="285750" indent="-285750">
+              <a:buFont typeface="Arial" panose="020B0604020202020204" pitchFamily="34" charset="0"/>
+              <a:buChar char="•"/>
+            </a:pPr>
+            <a:r>
+              <a:rPr lang="en-US" sz="1400"/>
+              <a:t>Bitstamp is a cryptocurrency exchange based in Luxembourg. </a:t>
+            </a:r>
+            <a:br>
+              <a:rPr lang="en-US" sz="1400"/>
+            </a:br>
+            <a:r>
+              <a:rPr lang="en-US" sz="1400"/>
+              <a:t>(London, Luxembourg, Slovenia, New York City)</a:t>
+            </a:r>
+          </a:p>
+          <a:p>
+            <a:pPr marL="285750" indent="-285750">
+              <a:buFont typeface="Arial" panose="020B0604020202020204" pitchFamily="34" charset="0"/>
+              <a:buChar char="•"/>
+            </a:pPr>
+            <a:r>
+              <a:rPr lang="en-US" sz="1400"/>
+              <a:t>Founded in 2011</a:t>
+            </a:r>
+          </a:p>
+          <a:p>
+            <a:pPr marL="285750" indent="-285750">
+              <a:buFont typeface="Arial" panose="020B0604020202020204" pitchFamily="34" charset="0"/>
+              <a:buChar char="•"/>
+            </a:pPr>
+            <a:r>
+              <a:rPr lang="en-US" sz="1400"/>
+              <a:t>It allows trading between fiat currency, bitcoin and other cryptocurrencies.</a:t>
+            </a:r>
+          </a:p>
+          <a:p>
+            <a:pPr marL="285750" indent="-285750">
+              <a:buFont typeface="Arial" panose="020B0604020202020204" pitchFamily="34" charset="0"/>
+              <a:buChar char="•"/>
+            </a:pPr>
+            <a:r>
+              <a:rPr lang="en-US" sz="1400"/>
+              <a:t>USD, EUR, GBP, bitcoin, ALGO, XRP, Ether, litecoin, bitcoin cash, XLM, Link, OMG Network, USD Coin or PAX deposits and withdrawals</a:t>
+            </a:r>
+          </a:p>
+        </p:txBody>
+      </p:sp>
+      <p:pic>
+        <p:nvPicPr>
+          <p:cNvPr id="3" name="Picture 2">
+            <a:extLst>
+              <a:ext uri="{FF2B5EF4-FFF2-40B4-BE49-F238E27FC236}">
+                <a16:creationId xmlns:a16="http://schemas.microsoft.com/office/drawing/2014/main" id="{B030F248-013D-EC55-1302-1CA6CF3F4623}"/>
+              </a:ext>
+            </a:extLst>
+          </p:cNvPr>
+          <p:cNvPicPr>
+            <a:picLocks noChangeAspect="1"/>
+          </p:cNvPicPr>
+          <p:nvPr/>
+        </p:nvPicPr>
+        <p:blipFill>
+          <a:blip r:embed="rId3" cstate="email">
+            <a:extLst>
+              <a:ext uri="{28A0092B-C50C-407E-A947-70E740481C1C}">
+                <a14:useLocalDpi xmlns:a14="http://schemas.microsoft.com/office/drawing/2010/main"/>
+              </a:ext>
+            </a:extLst>
+          </a:blip>
+          <a:stretch>
+            <a:fillRect/>
+          </a:stretch>
+        </p:blipFill>
+        <p:spPr>
+          <a:xfrm>
+            <a:off x="7997146" y="2091267"/>
+            <a:ext cx="4138870" cy="3348479"/>
+          </a:xfrm>
+          <a:prstGeom prst="rect">
+            <a:avLst/>
+          </a:prstGeom>
+        </p:spPr>
+      </p:pic>
+      <p:sp>
+        <p:nvSpPr>
+          <p:cNvPr id="5" name="TextBox 4">
+            <a:extLst>
+              <a:ext uri="{FF2B5EF4-FFF2-40B4-BE49-F238E27FC236}">
+                <a16:creationId xmlns:a16="http://schemas.microsoft.com/office/drawing/2014/main" id="{C34BAA9C-9CDA-6777-C3BB-E2B6236AF4FC}"/>
+              </a:ext>
+            </a:extLst>
+          </p:cNvPr>
+          <p:cNvSpPr txBox="1"/>
+          <p:nvPr/>
+        </p:nvSpPr>
+        <p:spPr>
+          <a:xfrm>
+            <a:off x="0" y="663179"/>
+            <a:ext cx="5243804" cy="1169551"/>
+          </a:xfrm>
+          <a:prstGeom prst="rect">
+            <a:avLst/>
+          </a:prstGeom>
+          <a:noFill/>
+        </p:spPr>
+        <p:txBody>
+          <a:bodyPr wrap="square" rtlCol="0">
+            <a:spAutoFit/>
+          </a:bodyPr>
+          <a:lstStyle/>
+          <a:p>
+            <a:pPr marL="285750" indent="-285750">
+              <a:buFont typeface="Arial" panose="020B0604020202020204" pitchFamily="34" charset="0"/>
+              <a:buChar char="•"/>
+            </a:pPr>
+            <a:r>
+              <a:rPr lang="en-US" sz="1400">
+                <a:hlinkClick r:id="rId4"/>
+              </a:rPr>
+              <a:t>https://www.bitstamp.net/</a:t>
+            </a:r>
+            <a:r>
+              <a:rPr lang="en-US" sz="1400"/>
+              <a:t> </a:t>
+            </a:r>
+          </a:p>
+          <a:p>
+            <a:pPr marL="285750" indent="-285750">
+              <a:buFont typeface="Arial" panose="020B0604020202020204" pitchFamily="34" charset="0"/>
+              <a:buChar char="•"/>
+            </a:pPr>
+            <a:r>
+              <a:rPr lang="en-US" sz="1400">
+                <a:hlinkClick r:id="rId5"/>
+              </a:rPr>
+              <a:t>https://en.wikipedia.org/wiki/Bitstamp</a:t>
+            </a:r>
+            <a:r>
+              <a:rPr lang="en-US" sz="1400"/>
+              <a:t> </a:t>
+            </a:r>
+          </a:p>
+          <a:p>
+            <a:pPr marL="285750" indent="-285750">
+              <a:buFont typeface="Arial" panose="020B0604020202020204" pitchFamily="34" charset="0"/>
+              <a:buChar char="•"/>
+            </a:pPr>
+            <a:r>
+              <a:rPr lang="en-US" sz="1400">
+                <a:hlinkClick r:id="rId6"/>
+              </a:rPr>
+              <a:t>https://www.bitstamp.net/api/</a:t>
+            </a:r>
+            <a:r>
+              <a:rPr lang="en-US" sz="1400"/>
+              <a:t> </a:t>
+            </a:r>
+          </a:p>
+          <a:p>
+            <a:pPr marL="285750" indent="-285750">
+              <a:buFont typeface="Arial" panose="020B0604020202020204" pitchFamily="34" charset="0"/>
+              <a:buChar char="•"/>
+            </a:pPr>
+            <a:r>
+              <a:rPr lang="en-US" sz="1400">
+                <a:hlinkClick r:id="rId7"/>
+              </a:rPr>
+              <a:t>https://github.com/kmadac/bitstamp-python-client</a:t>
+            </a:r>
+            <a:r>
+              <a:rPr lang="en-US" sz="1400"/>
+              <a:t> </a:t>
+            </a:r>
+          </a:p>
+          <a:p>
+            <a:pPr marL="285750" indent="-285750">
+              <a:buFont typeface="Arial" panose="020B0604020202020204" pitchFamily="34" charset="0"/>
+              <a:buChar char="•"/>
+            </a:pPr>
+            <a:endParaRPr lang="en-US" sz="1400"/>
+          </a:p>
+        </p:txBody>
+      </p:sp>
+      <p:pic>
+        <p:nvPicPr>
+          <p:cNvPr id="6" name="Picture 5">
+            <a:extLst>
+              <a:ext uri="{FF2B5EF4-FFF2-40B4-BE49-F238E27FC236}">
+                <a16:creationId xmlns:a16="http://schemas.microsoft.com/office/drawing/2014/main" id="{988DCB5F-E0B7-03AD-029A-33299D2E0718}"/>
+              </a:ext>
+            </a:extLst>
+          </p:cNvPr>
+          <p:cNvPicPr>
+            <a:picLocks noChangeAspect="1"/>
+          </p:cNvPicPr>
+          <p:nvPr/>
+        </p:nvPicPr>
+        <p:blipFill>
+          <a:blip r:embed="rId8" cstate="email">
+            <a:extLst>
+              <a:ext uri="{28A0092B-C50C-407E-A947-70E740481C1C}">
+                <a14:useLocalDpi xmlns:a14="http://schemas.microsoft.com/office/drawing/2010/main"/>
+              </a:ext>
+            </a:extLst>
+          </a:blip>
+          <a:stretch>
+            <a:fillRect/>
+          </a:stretch>
+        </p:blipFill>
+        <p:spPr>
+          <a:xfrm>
+            <a:off x="9050693" y="59666"/>
+            <a:ext cx="3085323" cy="771331"/>
+          </a:xfrm>
+          <a:prstGeom prst="rect">
+            <a:avLst/>
+          </a:prstGeom>
+        </p:spPr>
+      </p:pic>
+      <p:sp>
+        <p:nvSpPr>
+          <p:cNvPr id="7" name="TextBox 6">
+            <a:extLst>
+              <a:ext uri="{FF2B5EF4-FFF2-40B4-BE49-F238E27FC236}">
+                <a16:creationId xmlns:a16="http://schemas.microsoft.com/office/drawing/2014/main" id="{72D8A426-4282-B1E8-4045-B0EF4C0DFAAD}"/>
+              </a:ext>
+            </a:extLst>
+          </p:cNvPr>
+          <p:cNvSpPr txBox="1"/>
+          <p:nvPr/>
+        </p:nvSpPr>
+        <p:spPr>
+          <a:xfrm>
+            <a:off x="541581" y="3858339"/>
+            <a:ext cx="4758612" cy="2308324"/>
+          </a:xfrm>
+          <a:prstGeom prst="rect">
+            <a:avLst/>
+          </a:prstGeom>
+          <a:noFill/>
+        </p:spPr>
+        <p:txBody>
+          <a:bodyPr wrap="square" rtlCol="0">
+            <a:spAutoFit/>
+          </a:bodyPr>
+          <a:lstStyle/>
+          <a:p>
+            <a:r>
+              <a:rPr lang="en-US" sz="1200" b="1">
+                <a:solidFill>
+                  <a:srgbClr val="00B050"/>
+                </a:solidFill>
+                <a:latin typeface="Menlo" panose="020B0609030804020204" pitchFamily="49" charset="0"/>
+                <a:ea typeface="Menlo" panose="020B0609030804020204" pitchFamily="49" charset="0"/>
+                <a:cs typeface="Menlo" panose="020B0609030804020204" pitchFamily="49" charset="0"/>
+              </a:rPr>
+              <a:t># pip install BitstampClient</a:t>
+            </a:r>
+          </a:p>
+          <a:p>
+            <a:endParaRPr lang="en-US" sz="1200">
+              <a:solidFill>
+                <a:srgbClr val="00B0F0"/>
+              </a:solidFill>
+              <a:latin typeface="Menlo" panose="020B0609030804020204" pitchFamily="49" charset="0"/>
+              <a:ea typeface="Menlo" panose="020B0609030804020204" pitchFamily="49" charset="0"/>
+              <a:cs typeface="Menlo" panose="020B0609030804020204" pitchFamily="49" charset="0"/>
+            </a:endParaRPr>
+          </a:p>
+          <a:p>
+            <a:r>
+              <a:rPr lang="en-US" sz="1200">
+                <a:solidFill>
+                  <a:srgbClr val="00B0F0"/>
+                </a:solidFill>
+                <a:latin typeface="Menlo" panose="020B0609030804020204" pitchFamily="49" charset="0"/>
+                <a:ea typeface="Menlo" panose="020B0609030804020204" pitchFamily="49" charset="0"/>
+                <a:cs typeface="Menlo" panose="020B0609030804020204" pitchFamily="49" charset="0"/>
+              </a:rPr>
+              <a:t>import bitstamp.client</a:t>
+            </a:r>
+          </a:p>
+          <a:p>
+            <a:endParaRPr lang="en-US" sz="1200">
+              <a:solidFill>
+                <a:srgbClr val="00B0F0"/>
+              </a:solidFill>
+              <a:latin typeface="Menlo" panose="020B0609030804020204" pitchFamily="49" charset="0"/>
+              <a:ea typeface="Menlo" panose="020B0609030804020204" pitchFamily="49" charset="0"/>
+              <a:cs typeface="Menlo" panose="020B0609030804020204" pitchFamily="49" charset="0"/>
+            </a:endParaRPr>
+          </a:p>
+          <a:p>
+            <a:r>
+              <a:rPr lang="en-US" sz="1200">
+                <a:solidFill>
+                  <a:srgbClr val="00B0F0"/>
+                </a:solidFill>
+                <a:latin typeface="Menlo" panose="020B0609030804020204" pitchFamily="49" charset="0"/>
+                <a:ea typeface="Menlo" panose="020B0609030804020204" pitchFamily="49" charset="0"/>
+                <a:cs typeface="Menlo" panose="020B0609030804020204" pitchFamily="49" charset="0"/>
+              </a:rPr>
+              <a:t>public_client = bitstamp.client.Public()</a:t>
+            </a:r>
+          </a:p>
+          <a:p>
+            <a:r>
+              <a:rPr lang="en-US" sz="1200">
+                <a:solidFill>
+                  <a:srgbClr val="00B0F0"/>
+                </a:solidFill>
+                <a:latin typeface="Menlo" panose="020B0609030804020204" pitchFamily="49" charset="0"/>
+                <a:ea typeface="Menlo" panose="020B0609030804020204" pitchFamily="49" charset="0"/>
+                <a:cs typeface="Menlo" panose="020B0609030804020204" pitchFamily="49" charset="0"/>
+              </a:rPr>
+              <a:t>print(public_client.ticker()['volume'])</a:t>
+            </a:r>
+          </a:p>
+          <a:p>
+            <a:endParaRPr lang="en-US" sz="1200">
+              <a:solidFill>
+                <a:srgbClr val="00B0F0"/>
+              </a:solidFill>
+              <a:latin typeface="Menlo" panose="020B0609030804020204" pitchFamily="49" charset="0"/>
+              <a:ea typeface="Menlo" panose="020B0609030804020204" pitchFamily="49" charset="0"/>
+              <a:cs typeface="Menlo" panose="020B0609030804020204" pitchFamily="49" charset="0"/>
+            </a:endParaRPr>
+          </a:p>
+          <a:p>
+            <a:r>
+              <a:rPr lang="en-US" sz="1200">
+                <a:solidFill>
+                  <a:srgbClr val="00B0F0"/>
+                </a:solidFill>
+                <a:latin typeface="Menlo" panose="020B0609030804020204" pitchFamily="49" charset="0"/>
+                <a:ea typeface="Menlo" panose="020B0609030804020204" pitchFamily="49" charset="0"/>
+                <a:cs typeface="Menlo" panose="020B0609030804020204" pitchFamily="49" charset="0"/>
+              </a:rPr>
+              <a:t>trading_client = bitstamp.client.Trading(</a:t>
+            </a:r>
+          </a:p>
+          <a:p>
+            <a:r>
+              <a:rPr lang="en-US" sz="1200">
+                <a:solidFill>
+                  <a:srgbClr val="00B0F0"/>
+                </a:solidFill>
+                <a:latin typeface="Menlo" panose="020B0609030804020204" pitchFamily="49" charset="0"/>
+                <a:ea typeface="Menlo" panose="020B0609030804020204" pitchFamily="49" charset="0"/>
+                <a:cs typeface="Menlo" panose="020B0609030804020204" pitchFamily="49" charset="0"/>
+              </a:rPr>
+              <a:t>    username='999999', key='xxx', secret='xxx')</a:t>
+            </a:r>
+          </a:p>
+          <a:p>
+            <a:endParaRPr lang="en-US" sz="1200">
+              <a:solidFill>
+                <a:srgbClr val="00B0F0"/>
+              </a:solidFill>
+              <a:latin typeface="Menlo" panose="020B0609030804020204" pitchFamily="49" charset="0"/>
+              <a:ea typeface="Menlo" panose="020B0609030804020204" pitchFamily="49" charset="0"/>
+              <a:cs typeface="Menlo" panose="020B0609030804020204" pitchFamily="49" charset="0"/>
+            </a:endParaRPr>
+          </a:p>
+          <a:p>
+            <a:r>
+              <a:rPr lang="en-US" sz="1200">
+                <a:solidFill>
+                  <a:srgbClr val="00B0F0"/>
+                </a:solidFill>
+                <a:latin typeface="Menlo" panose="020B0609030804020204" pitchFamily="49" charset="0"/>
+                <a:ea typeface="Menlo" panose="020B0609030804020204" pitchFamily="49" charset="0"/>
+                <a:cs typeface="Menlo" panose="020B0609030804020204" pitchFamily="49" charset="0"/>
+              </a:rPr>
+              <a:t>print(trading_client.account_balance()['fee'])</a:t>
+            </a:r>
+          </a:p>
+          <a:p>
+            <a:r>
+              <a:rPr lang="en-US" sz="1200">
+                <a:solidFill>
+                  <a:srgbClr val="00B0F0"/>
+                </a:solidFill>
+                <a:latin typeface="Menlo" panose="020B0609030804020204" pitchFamily="49" charset="0"/>
+                <a:ea typeface="Menlo" panose="020B0609030804020204" pitchFamily="49" charset="0"/>
+                <a:cs typeface="Menlo" panose="020B0609030804020204" pitchFamily="49" charset="0"/>
+              </a:rPr>
+              <a:t>print(trading_client.ticker()['volume'])</a:t>
+            </a:r>
+          </a:p>
+        </p:txBody>
+      </p:sp>
+    </p:spTree>
+    <p:extLst>
+      <p:ext uri="{BB962C8B-B14F-4D97-AF65-F5344CB8AC3E}">
+        <p14:creationId xmlns:p14="http://schemas.microsoft.com/office/powerpoint/2010/main" val="1816705376"/>
+      </p:ext>
+    </p:extLst>
+  </p:cSld>
+  <p:clrMapOvr>
+    <a:masterClrMapping/>
+  </p:clrMapOvr>
+</p:sld>
+</file>
+
+<file path=ppt/slides/slide11.xml><?xml version="1.0" encoding="utf-8"?>
+<p:sld xmlns:a="http://schemas.openxmlformats.org/drawingml/2006/main" xmlns:r="http://schemas.openxmlformats.org/officeDocument/2006/relationships" xmlns:p="http://schemas.openxmlformats.org/presentationml/2006/main">
+  <p:cSld>
+    <p:spTree>
+      <p:nvGrpSpPr>
+        <p:cNvPr id="1" name=""/>
+        <p:cNvGrpSpPr/>
+        <p:nvPr/>
+      </p:nvGrpSpPr>
+      <p:grpSpPr>
+        <a:xfrm>
+          <a:off x="0" y="0"/>
+          <a:ext cx="0" cy="0"/>
+          <a:chOff x="0" y="0"/>
+          <a:chExt cx="0" cy="0"/>
+        </a:xfrm>
+      </p:grpSpPr>
+      <p:sp>
+        <p:nvSpPr>
+          <p:cNvPr id="2" name="TextBox 1">
+            <a:extLst>
+              <a:ext uri="{FF2B5EF4-FFF2-40B4-BE49-F238E27FC236}">
+                <a16:creationId xmlns:a16="http://schemas.microsoft.com/office/drawing/2014/main" id="{E7110EDD-1316-6D4C-4930-BCFF121273CA}"/>
+              </a:ext>
+            </a:extLst>
+          </p:cNvPr>
+          <p:cNvSpPr txBox="1"/>
+          <p:nvPr/>
+        </p:nvSpPr>
+        <p:spPr>
+          <a:xfrm>
+            <a:off x="-1" y="0"/>
+            <a:ext cx="2072641" cy="523220"/>
+          </a:xfrm>
+          <a:prstGeom prst="rect">
+            <a:avLst/>
+          </a:prstGeom>
+          <a:noFill/>
+        </p:spPr>
+        <p:txBody>
+          <a:bodyPr wrap="square" rtlCol="0">
+            <a:spAutoFit/>
+          </a:bodyPr>
+          <a:lstStyle/>
+          <a:p>
+            <a:r>
+              <a:rPr lang="en-US" sz="2800" b="1"/>
+              <a:t>Kraken</a:t>
+            </a:r>
+          </a:p>
+        </p:txBody>
+      </p:sp>
+      <p:sp>
+        <p:nvSpPr>
+          <p:cNvPr id="4" name="TextBox 3">
+            <a:extLst>
+              <a:ext uri="{FF2B5EF4-FFF2-40B4-BE49-F238E27FC236}">
+                <a16:creationId xmlns:a16="http://schemas.microsoft.com/office/drawing/2014/main" id="{D450E834-9C35-33AB-8443-28E59C3504FF}"/>
+              </a:ext>
+            </a:extLst>
+          </p:cNvPr>
+          <p:cNvSpPr txBox="1"/>
+          <p:nvPr/>
+        </p:nvSpPr>
+        <p:spPr>
+          <a:xfrm>
+            <a:off x="0" y="509286"/>
+            <a:ext cx="6690049" cy="954107"/>
+          </a:xfrm>
+          <a:prstGeom prst="rect">
+            <a:avLst/>
+          </a:prstGeom>
+          <a:noFill/>
+        </p:spPr>
+        <p:txBody>
+          <a:bodyPr wrap="square" rtlCol="0">
+            <a:spAutoFit/>
+          </a:bodyPr>
+          <a:lstStyle/>
+          <a:p>
+            <a:pPr marL="285750" indent="-285750">
+              <a:buFont typeface="Arial" panose="020B0604020202020204" pitchFamily="34" charset="0"/>
+              <a:buChar char="•"/>
+            </a:pPr>
+            <a:r>
+              <a:rPr lang="en-US" sz="1400">
+                <a:hlinkClick r:id="rId2"/>
+              </a:rPr>
+              <a:t>https://www.kraken.com</a:t>
+            </a:r>
+            <a:r>
+              <a:rPr lang="en-US" sz="1400"/>
+              <a:t> </a:t>
+            </a:r>
+          </a:p>
+          <a:p>
+            <a:pPr marL="285750" indent="-285750">
+              <a:buFont typeface="Arial" panose="020B0604020202020204" pitchFamily="34" charset="0"/>
+              <a:buChar char="•"/>
+            </a:pPr>
+            <a:r>
+              <a:rPr lang="en-US" sz="1400">
+                <a:hlinkClick r:id="rId3"/>
+              </a:rPr>
+              <a:t>https://en.wikipedia.org/wiki/Kraken_(company)</a:t>
+            </a:r>
+            <a:r>
+              <a:rPr lang="en-US" sz="1400"/>
+              <a:t> </a:t>
+            </a:r>
+          </a:p>
+          <a:p>
+            <a:pPr marL="285750" indent="-285750">
+              <a:buFont typeface="Arial" panose="020B0604020202020204" pitchFamily="34" charset="0"/>
+              <a:buChar char="•"/>
+            </a:pPr>
+            <a:r>
+              <a:rPr lang="en-US" sz="1400">
+                <a:hlinkClick r:id="rId4"/>
+              </a:rPr>
+              <a:t>https://docs.kraken.com/rest/</a:t>
+            </a:r>
+            <a:endParaRPr lang="en-US" sz="1400"/>
+          </a:p>
+          <a:p>
+            <a:pPr marL="285750" indent="-285750">
+              <a:buFont typeface="Arial" panose="020B0604020202020204" pitchFamily="34" charset="0"/>
+              <a:buChar char="•"/>
+            </a:pPr>
+            <a:r>
+              <a:rPr lang="en-US" sz="1400">
+                <a:hlinkClick r:id="rId5"/>
+              </a:rPr>
+              <a:t>https://support.kraken.com/hc/en-us/sections/360003946512-Example-API-Code</a:t>
+            </a:r>
+            <a:endParaRPr lang="en-US" sz="1400"/>
+          </a:p>
+        </p:txBody>
+      </p:sp>
+      <p:sp>
+        <p:nvSpPr>
+          <p:cNvPr id="5" name="TextBox 4">
+            <a:extLst>
+              <a:ext uri="{FF2B5EF4-FFF2-40B4-BE49-F238E27FC236}">
+                <a16:creationId xmlns:a16="http://schemas.microsoft.com/office/drawing/2014/main" id="{98ACFF17-6F73-7014-B5A1-972FD9DD09A1}"/>
+              </a:ext>
+            </a:extLst>
+          </p:cNvPr>
+          <p:cNvSpPr txBox="1"/>
+          <p:nvPr/>
+        </p:nvSpPr>
+        <p:spPr>
+          <a:xfrm>
+            <a:off x="0" y="1776684"/>
+            <a:ext cx="6096000" cy="1815882"/>
+          </a:xfrm>
+          <a:prstGeom prst="rect">
+            <a:avLst/>
+          </a:prstGeom>
+          <a:noFill/>
+        </p:spPr>
+        <p:txBody>
+          <a:bodyPr wrap="square" rtlCol="0">
+            <a:spAutoFit/>
+          </a:bodyPr>
+          <a:lstStyle/>
+          <a:p>
+            <a:pPr marL="285750" indent="-285750">
+              <a:buFont typeface="Arial" panose="020B0604020202020204" pitchFamily="34" charset="0"/>
+              <a:buChar char="•"/>
+            </a:pPr>
+            <a:r>
+              <a:rPr lang="en-US" sz="1400" b="1">
+                <a:solidFill>
+                  <a:srgbClr val="00B050"/>
+                </a:solidFill>
+              </a:rPr>
+              <a:t>Kraken</a:t>
+            </a:r>
+            <a:r>
+              <a:rPr lang="en-US" sz="1400"/>
+              <a:t> is a cryptocurrency exchange in San Francisco, CA since </a:t>
+            </a:r>
+          </a:p>
+          <a:p>
+            <a:pPr marL="285750" indent="-285750">
+              <a:buFont typeface="Arial" panose="020B0604020202020204" pitchFamily="34" charset="0"/>
+              <a:buChar char="•"/>
+            </a:pPr>
+            <a:r>
+              <a:rPr lang="en-US" sz="1400"/>
+              <a:t>Founded in 2011 by </a:t>
+            </a:r>
+            <a:r>
+              <a:rPr lang="en-US" sz="1400" b="1">
+                <a:solidFill>
+                  <a:srgbClr val="00B050"/>
+                </a:solidFill>
+              </a:rPr>
+              <a:t>Jesse Powell</a:t>
+            </a:r>
+          </a:p>
+          <a:p>
+            <a:pPr marL="285750" indent="-285750">
+              <a:buFont typeface="Arial" panose="020B0604020202020204" pitchFamily="34" charset="0"/>
+              <a:buChar char="•"/>
+            </a:pPr>
+            <a:r>
+              <a:rPr lang="en-US" sz="1400"/>
+              <a:t>14+ Mln users, 1000+ employees, </a:t>
+            </a:r>
+          </a:p>
+          <a:p>
+            <a:pPr marL="285750" indent="-285750">
+              <a:buFont typeface="Arial" panose="020B0604020202020204" pitchFamily="34" charset="0"/>
+              <a:buChar char="•"/>
+            </a:pPr>
+            <a:r>
+              <a:rPr lang="en-US" sz="1400"/>
+              <a:t>Support for 120+ different crypto currencies including Bitcoin, Ethereum (ether), Litecoin, Namecoin, Dogecoin, Ripple, Stellar, Cardano, Polkadot, Polygon, Solana, Sushi, Uniswap</a:t>
+            </a:r>
+          </a:p>
+          <a:p>
+            <a:pPr marL="285750" indent="-285750">
+              <a:buFont typeface="Arial" panose="020B0604020202020204" pitchFamily="34" charset="0"/>
+              <a:buChar char="•"/>
+            </a:pPr>
+            <a:r>
+              <a:rPr lang="en-US" sz="1400"/>
+              <a:t>Trading can be executed between digital assets, and between digital assets and national currencies like USD, EUR, GBP, CAD and JPY</a:t>
+            </a:r>
+          </a:p>
+        </p:txBody>
+      </p:sp>
+      <p:pic>
+        <p:nvPicPr>
+          <p:cNvPr id="3" name="Picture 2">
+            <a:extLst>
+              <a:ext uri="{FF2B5EF4-FFF2-40B4-BE49-F238E27FC236}">
+                <a16:creationId xmlns:a16="http://schemas.microsoft.com/office/drawing/2014/main" id="{03544CE4-260E-F661-89C0-88B4D5D39902}"/>
+              </a:ext>
+            </a:extLst>
+          </p:cNvPr>
+          <p:cNvPicPr>
+            <a:picLocks noChangeAspect="1"/>
+          </p:cNvPicPr>
+          <p:nvPr/>
+        </p:nvPicPr>
+        <p:blipFill>
+          <a:blip r:embed="rId6" cstate="email">
+            <a:extLst>
+              <a:ext uri="{28A0092B-C50C-407E-A947-70E740481C1C}">
+                <a14:useLocalDpi xmlns:a14="http://schemas.microsoft.com/office/drawing/2010/main"/>
+              </a:ext>
+            </a:extLst>
+          </a:blip>
+          <a:stretch>
+            <a:fillRect/>
+          </a:stretch>
+        </p:blipFill>
+        <p:spPr>
+          <a:xfrm>
+            <a:off x="10046127" y="2440589"/>
+            <a:ext cx="2058695" cy="3166618"/>
+          </a:xfrm>
+          <a:prstGeom prst="rect">
+            <a:avLst/>
+          </a:prstGeom>
+        </p:spPr>
+      </p:pic>
+      <p:pic>
+        <p:nvPicPr>
+          <p:cNvPr id="6" name="Picture 5">
+            <a:extLst>
+              <a:ext uri="{FF2B5EF4-FFF2-40B4-BE49-F238E27FC236}">
+                <a16:creationId xmlns:a16="http://schemas.microsoft.com/office/drawing/2014/main" id="{FC57052F-3339-C4A3-57E2-4C2DCCC75B0F}"/>
+              </a:ext>
+            </a:extLst>
+          </p:cNvPr>
+          <p:cNvPicPr>
+            <a:picLocks noChangeAspect="1"/>
+          </p:cNvPicPr>
+          <p:nvPr/>
+        </p:nvPicPr>
+        <p:blipFill>
+          <a:blip r:embed="rId7" cstate="email">
+            <a:extLst>
+              <a:ext uri="{28A0092B-C50C-407E-A947-70E740481C1C}">
+                <a14:useLocalDpi xmlns:a14="http://schemas.microsoft.com/office/drawing/2010/main"/>
+              </a:ext>
+            </a:extLst>
+          </a:blip>
+          <a:stretch>
+            <a:fillRect/>
+          </a:stretch>
+        </p:blipFill>
+        <p:spPr>
+          <a:xfrm>
+            <a:off x="10544102" y="102637"/>
+            <a:ext cx="1560720" cy="1591934"/>
+          </a:xfrm>
+          <a:prstGeom prst="rect">
+            <a:avLst/>
+          </a:prstGeom>
+        </p:spPr>
+      </p:pic>
+      <p:sp>
+        <p:nvSpPr>
+          <p:cNvPr id="7" name="TextBox 6">
+            <a:extLst>
+              <a:ext uri="{FF2B5EF4-FFF2-40B4-BE49-F238E27FC236}">
+                <a16:creationId xmlns:a16="http://schemas.microsoft.com/office/drawing/2014/main" id="{D39FF3C4-289F-8C82-5F1A-2597B69EF113}"/>
+              </a:ext>
+            </a:extLst>
+          </p:cNvPr>
+          <p:cNvSpPr txBox="1"/>
+          <p:nvPr/>
+        </p:nvSpPr>
+        <p:spPr>
+          <a:xfrm>
+            <a:off x="10019080" y="5611872"/>
+            <a:ext cx="2058695" cy="954107"/>
+          </a:xfrm>
+          <a:prstGeom prst="rect">
+            <a:avLst/>
+          </a:prstGeom>
+          <a:noFill/>
+        </p:spPr>
+        <p:txBody>
+          <a:bodyPr wrap="square" rtlCol="0">
+            <a:spAutoFit/>
+          </a:bodyPr>
+          <a:lstStyle/>
+          <a:p>
+            <a:r>
+              <a:rPr lang="en-US" sz="1400"/>
+              <a:t>The kraken is a legendary sea monster of enormous size said to appear off the coasts of Norway.</a:t>
+            </a:r>
+          </a:p>
+        </p:txBody>
+      </p:sp>
+      <p:pic>
+        <p:nvPicPr>
+          <p:cNvPr id="8" name="Picture 7">
+            <a:extLst>
+              <a:ext uri="{FF2B5EF4-FFF2-40B4-BE49-F238E27FC236}">
+                <a16:creationId xmlns:a16="http://schemas.microsoft.com/office/drawing/2014/main" id="{90BB8598-50E9-6F94-D070-727FAD0D212D}"/>
+              </a:ext>
+            </a:extLst>
+          </p:cNvPr>
+          <p:cNvPicPr>
+            <a:picLocks noChangeAspect="1"/>
+          </p:cNvPicPr>
+          <p:nvPr/>
+        </p:nvPicPr>
+        <p:blipFill>
+          <a:blip r:embed="rId8" cstate="email">
+            <a:extLst>
+              <a:ext uri="{28A0092B-C50C-407E-A947-70E740481C1C}">
+                <a14:useLocalDpi xmlns:a14="http://schemas.microsoft.com/office/drawing/2010/main"/>
+              </a:ext>
+            </a:extLst>
+          </a:blip>
+          <a:stretch>
+            <a:fillRect/>
+          </a:stretch>
+        </p:blipFill>
+        <p:spPr>
+          <a:xfrm>
+            <a:off x="7679852" y="102637"/>
+            <a:ext cx="1690410" cy="2039517"/>
+          </a:xfrm>
+          <a:prstGeom prst="rect">
+            <a:avLst/>
+          </a:prstGeom>
+        </p:spPr>
+      </p:pic>
+      <p:sp>
+        <p:nvSpPr>
+          <p:cNvPr id="9" name="TextBox 8">
+            <a:extLst>
+              <a:ext uri="{FF2B5EF4-FFF2-40B4-BE49-F238E27FC236}">
+                <a16:creationId xmlns:a16="http://schemas.microsoft.com/office/drawing/2014/main" id="{D9EE38EE-1A99-433D-4D12-D2DCB3E26CD6}"/>
+              </a:ext>
+            </a:extLst>
+          </p:cNvPr>
+          <p:cNvSpPr txBox="1"/>
+          <p:nvPr/>
+        </p:nvSpPr>
+        <p:spPr>
+          <a:xfrm>
+            <a:off x="7679852" y="2136706"/>
+            <a:ext cx="1690410" cy="369332"/>
+          </a:xfrm>
+          <a:prstGeom prst="rect">
+            <a:avLst/>
+          </a:prstGeom>
+          <a:noFill/>
+        </p:spPr>
+        <p:txBody>
+          <a:bodyPr wrap="square" rtlCol="0">
+            <a:spAutoFit/>
+          </a:bodyPr>
+          <a:lstStyle/>
+          <a:p>
+            <a:pPr algn="ctr"/>
+            <a:r>
+              <a:rPr lang="en-US"/>
+              <a:t> Jesse Powell</a:t>
+            </a:r>
+          </a:p>
+        </p:txBody>
+      </p:sp>
+      <p:pic>
+        <p:nvPicPr>
+          <p:cNvPr id="10" name="Picture 9">
+            <a:extLst>
+              <a:ext uri="{FF2B5EF4-FFF2-40B4-BE49-F238E27FC236}">
+                <a16:creationId xmlns:a16="http://schemas.microsoft.com/office/drawing/2014/main" id="{BDCF295C-9364-9856-BF30-79F02D5E9901}"/>
+              </a:ext>
+            </a:extLst>
+          </p:cNvPr>
+          <p:cNvPicPr>
+            <a:picLocks noChangeAspect="1"/>
+          </p:cNvPicPr>
+          <p:nvPr/>
+        </p:nvPicPr>
+        <p:blipFill>
+          <a:blip r:embed="rId9" cstate="email">
+            <a:extLst>
+              <a:ext uri="{28A0092B-C50C-407E-A947-70E740481C1C}">
+                <a14:useLocalDpi xmlns:a14="http://schemas.microsoft.com/office/drawing/2010/main"/>
+              </a:ext>
+            </a:extLst>
+          </a:blip>
+          <a:stretch>
+            <a:fillRect/>
+          </a:stretch>
+        </p:blipFill>
+        <p:spPr>
+          <a:xfrm>
+            <a:off x="5499650" y="3571612"/>
+            <a:ext cx="4492383" cy="3183751"/>
+          </a:xfrm>
+          <a:prstGeom prst="rect">
+            <a:avLst/>
+          </a:prstGeom>
+        </p:spPr>
+      </p:pic>
+      <p:sp>
+        <p:nvSpPr>
+          <p:cNvPr id="11" name="TextBox 10">
+            <a:extLst>
+              <a:ext uri="{FF2B5EF4-FFF2-40B4-BE49-F238E27FC236}">
+                <a16:creationId xmlns:a16="http://schemas.microsoft.com/office/drawing/2014/main" id="{66D1B042-CBFA-C060-A90E-BCF559314667}"/>
+              </a:ext>
+            </a:extLst>
+          </p:cNvPr>
+          <p:cNvSpPr txBox="1"/>
+          <p:nvPr/>
+        </p:nvSpPr>
+        <p:spPr>
+          <a:xfrm>
+            <a:off x="102637" y="4099022"/>
+            <a:ext cx="5342919" cy="1785104"/>
+          </a:xfrm>
+          <a:prstGeom prst="rect">
+            <a:avLst/>
+          </a:prstGeom>
+          <a:noFill/>
+        </p:spPr>
+        <p:txBody>
+          <a:bodyPr wrap="square" rtlCol="0">
+            <a:spAutoFit/>
+          </a:bodyPr>
+          <a:lstStyle/>
+          <a:p>
+            <a:r>
+              <a:rPr lang="en-US" sz="1000">
+                <a:solidFill>
+                  <a:srgbClr val="00B0F0"/>
+                </a:solidFill>
+                <a:latin typeface="Menlo" panose="020B0609030804020204" pitchFamily="49" charset="0"/>
+                <a:ea typeface="Menlo" panose="020B0609030804020204" pitchFamily="49" charset="0"/>
+                <a:cs typeface="Menlo" panose="020B0609030804020204" pitchFamily="49" charset="0"/>
+              </a:rPr>
+              <a:t>import sys, time, json, urllib.request</a:t>
+            </a:r>
+          </a:p>
+          <a:p>
+            <a:endParaRPr lang="en-US" sz="1000">
+              <a:solidFill>
+                <a:srgbClr val="00B0F0"/>
+              </a:solidFill>
+              <a:latin typeface="Menlo" panose="020B0609030804020204" pitchFamily="49" charset="0"/>
+              <a:ea typeface="Menlo" panose="020B0609030804020204" pitchFamily="49" charset="0"/>
+              <a:cs typeface="Menlo" panose="020B0609030804020204" pitchFamily="49" charset="0"/>
+            </a:endParaRPr>
+          </a:p>
+          <a:p>
+            <a:r>
+              <a:rPr lang="en-US" sz="1000">
+                <a:solidFill>
+                  <a:srgbClr val="00B0F0"/>
+                </a:solidFill>
+                <a:latin typeface="Menlo" panose="020B0609030804020204" pitchFamily="49" charset="0"/>
+                <a:ea typeface="Menlo" panose="020B0609030804020204" pitchFamily="49" charset="0"/>
+                <a:cs typeface="Menlo" panose="020B0609030804020204" pitchFamily="49" charset="0"/>
+              </a:rPr>
+              <a:t>api_domain = "</a:t>
+            </a:r>
+            <a:r>
+              <a:rPr lang="en-US" sz="1000">
+                <a:solidFill>
+                  <a:srgbClr val="00B050"/>
+                </a:solidFill>
+                <a:latin typeface="Menlo" panose="020B0609030804020204" pitchFamily="49" charset="0"/>
+                <a:ea typeface="Menlo" panose="020B0609030804020204" pitchFamily="49" charset="0"/>
+                <a:cs typeface="Menlo" panose="020B0609030804020204" pitchFamily="49" charset="0"/>
+              </a:rPr>
+              <a:t>https://api.kraken.com</a:t>
+            </a:r>
+            <a:r>
+              <a:rPr lang="en-US" sz="1000">
+                <a:solidFill>
+                  <a:srgbClr val="00B0F0"/>
+                </a:solidFill>
+                <a:latin typeface="Menlo" panose="020B0609030804020204" pitchFamily="49" charset="0"/>
+                <a:ea typeface="Menlo" panose="020B0609030804020204" pitchFamily="49" charset="0"/>
+                <a:cs typeface="Menlo" panose="020B0609030804020204" pitchFamily="49" charset="0"/>
+              </a:rPr>
+              <a:t>"</a:t>
+            </a:r>
+          </a:p>
+          <a:p>
+            <a:r>
+              <a:rPr lang="en-US" sz="1000">
+                <a:solidFill>
+                  <a:srgbClr val="00B050"/>
+                </a:solidFill>
+                <a:latin typeface="Menlo" panose="020B0609030804020204" pitchFamily="49" charset="0"/>
+                <a:ea typeface="Menlo" panose="020B0609030804020204" pitchFamily="49" charset="0"/>
+                <a:cs typeface="Menlo" panose="020B0609030804020204" pitchFamily="49" charset="0"/>
+              </a:rPr>
+              <a:t># ...</a:t>
+            </a:r>
+          </a:p>
+          <a:p>
+            <a:endParaRPr lang="en-US" sz="1000">
+              <a:solidFill>
+                <a:srgbClr val="00B0F0"/>
+              </a:solidFill>
+              <a:latin typeface="Menlo" panose="020B0609030804020204" pitchFamily="49" charset="0"/>
+              <a:ea typeface="Menlo" panose="020B0609030804020204" pitchFamily="49" charset="0"/>
+              <a:cs typeface="Menlo" panose="020B0609030804020204" pitchFamily="49" charset="0"/>
+            </a:endParaRPr>
+          </a:p>
+          <a:p>
+            <a:r>
+              <a:rPr lang="en-US" sz="1000">
+                <a:solidFill>
+                  <a:srgbClr val="00B0F0"/>
+                </a:solidFill>
+                <a:latin typeface="Menlo" panose="020B0609030804020204" pitchFamily="49" charset="0"/>
+                <a:ea typeface="Menlo" panose="020B0609030804020204" pitchFamily="49" charset="0"/>
+                <a:cs typeface="Menlo" panose="020B0609030804020204" pitchFamily="49" charset="0"/>
+              </a:rPr>
+              <a:t>api_data = "?pair=%(pair)s&amp;since=%(since)s" % {"pair":api_symbol, "since":api_start}</a:t>
+            </a:r>
+          </a:p>
+          <a:p>
+            <a:r>
+              <a:rPr lang="en-US" sz="1000">
+                <a:solidFill>
+                  <a:srgbClr val="00B0F0"/>
+                </a:solidFill>
+                <a:latin typeface="Menlo" panose="020B0609030804020204" pitchFamily="49" charset="0"/>
+                <a:ea typeface="Menlo" panose="020B0609030804020204" pitchFamily="49" charset="0"/>
+                <a:cs typeface="Menlo" panose="020B0609030804020204" pitchFamily="49" charset="0"/>
+              </a:rPr>
+              <a:t>api_request = urllib.request.Request(api_domain + api_path + api_method + api_data)</a:t>
+            </a:r>
+          </a:p>
+          <a:p>
+            <a:r>
+              <a:rPr lang="en-US" sz="1000">
+                <a:solidFill>
+                  <a:srgbClr val="00B0F0"/>
+                </a:solidFill>
+                <a:latin typeface="Menlo" panose="020B0609030804020204" pitchFamily="49" charset="0"/>
+                <a:ea typeface="Menlo" panose="020B0609030804020204" pitchFamily="49" charset="0"/>
+                <a:cs typeface="Menlo" panose="020B0609030804020204" pitchFamily="49" charset="0"/>
+              </a:rPr>
+              <a:t>api_data = urllib.request.urlopen(api_request).read()</a:t>
+            </a:r>
+          </a:p>
+          <a:p>
+            <a:r>
+              <a:rPr lang="en-US" sz="1000">
+                <a:solidFill>
+                  <a:srgbClr val="00B050"/>
+                </a:solidFill>
+                <a:latin typeface="Menlo" panose="020B0609030804020204" pitchFamily="49" charset="0"/>
+                <a:ea typeface="Menlo" panose="020B0609030804020204" pitchFamily="49" charset="0"/>
+                <a:cs typeface="Menlo" panose="020B0609030804020204" pitchFamily="49" charset="0"/>
+              </a:rPr>
+              <a:t># ...</a:t>
+            </a:r>
+          </a:p>
+        </p:txBody>
+      </p:sp>
+    </p:spTree>
+    <p:extLst>
+      <p:ext uri="{BB962C8B-B14F-4D97-AF65-F5344CB8AC3E}">
+        <p14:creationId xmlns:p14="http://schemas.microsoft.com/office/powerpoint/2010/main" val="1823628582"/>
+      </p:ext>
+    </p:extLst>
+  </p:cSld>
+  <p:clrMapOvr>
+    <a:masterClrMapping/>
+  </p:clrMapOvr>
+</p:sld>
+</file>
+
+<file path=ppt/slides/slide12.xml><?xml version="1.0" encoding="utf-8"?>
+<p:sld xmlns:a="http://schemas.openxmlformats.org/drawingml/2006/main" xmlns:r="http://schemas.openxmlformats.org/officeDocument/2006/relationships" xmlns:p="http://schemas.openxmlformats.org/presentationml/2006/main">
+  <p:cSld>
+    <p:spTree>
+      <p:nvGrpSpPr>
+        <p:cNvPr id="1" name=""/>
+        <p:cNvGrpSpPr/>
+        <p:nvPr/>
+      </p:nvGrpSpPr>
+      <p:grpSpPr>
+        <a:xfrm>
+          <a:off x="0" y="0"/>
+          <a:ext cx="0" cy="0"/>
+          <a:chOff x="0" y="0"/>
+          <a:chExt cx="0" cy="0"/>
+        </a:xfrm>
+      </p:grpSpPr>
+      <p:sp>
+        <p:nvSpPr>
+          <p:cNvPr id="2" name="TextBox 1">
+            <a:extLst>
+              <a:ext uri="{FF2B5EF4-FFF2-40B4-BE49-F238E27FC236}">
+                <a16:creationId xmlns:a16="http://schemas.microsoft.com/office/drawing/2014/main" id="{E7110EDD-1316-6D4C-4930-BCFF121273CA}"/>
+              </a:ext>
+            </a:extLst>
+          </p:cNvPr>
+          <p:cNvSpPr txBox="1"/>
+          <p:nvPr/>
+        </p:nvSpPr>
+        <p:spPr>
+          <a:xfrm>
+            <a:off x="-1" y="0"/>
+            <a:ext cx="2072641" cy="523220"/>
+          </a:xfrm>
+          <a:prstGeom prst="rect">
+            <a:avLst/>
+          </a:prstGeom>
+          <a:noFill/>
+        </p:spPr>
+        <p:txBody>
+          <a:bodyPr wrap="square" rtlCol="0">
+            <a:spAutoFit/>
+          </a:bodyPr>
+          <a:lstStyle/>
+          <a:p>
+            <a:r>
+              <a:rPr lang="en-US" sz="2800" b="1"/>
               <a:t>Ripple</a:t>
             </a:r>
           </a:p>
@@ -5002,7 +6114,7 @@
 </p:sld>
 </file>
 
-<file path=ppt/slides/slide11.xml><?xml version="1.0" encoding="utf-8"?>
+<file path=ppt/slides/slide13.xml><?xml version="1.0" encoding="utf-8"?>
 <p:sld xmlns:a="http://schemas.openxmlformats.org/drawingml/2006/main" xmlns:r="http://schemas.openxmlformats.org/officeDocument/2006/relationships" xmlns:p="http://schemas.openxmlformats.org/presentationml/2006/main">
   <p:cSld>
     <p:spTree>
@@ -5812,7 +6924,7 @@
 </p:sld>
 </file>
 
-<file path=ppt/slides/slide12.xml><?xml version="1.0" encoding="utf-8"?>
+<file path=ppt/slides/slide14.xml><?xml version="1.0" encoding="utf-8"?>
 <p:sld xmlns:a="http://schemas.openxmlformats.org/drawingml/2006/main" xmlns:r="http://schemas.openxmlformats.org/officeDocument/2006/relationships" xmlns:p="http://schemas.openxmlformats.org/presentationml/2006/main">
   <p:cSld>
     <p:spTree>
@@ -5843,8 +6955,8 @@
         </p:nvSpPr>
         <p:spPr>
           <a:xfrm>
-            <a:off x="285134" y="1406013"/>
-            <a:ext cx="6518787" cy="923330"/>
+            <a:off x="0" y="544722"/>
+            <a:ext cx="2542952" cy="307777"/>
           </a:xfrm>
           <a:prstGeom prst="rect">
             <a:avLst/>
@@ -5857,19 +6969,17 @@
           </a:bodyPr>
           <a:lstStyle/>
           <a:p>
-            <a:r>
-              <a:rPr lang="en-US"/>
-              <a:t>https://www.kucoin.com/</a:t>
-            </a:r>
-          </a:p>
-          <a:p>
-            <a:endParaRPr lang="en-US"/>
-          </a:p>
-          <a:p>
-            <a:r>
-              <a:rPr lang="en-US"/>
-              <a:t>1 Out of 4 Crypto Holders Worldwide Is with KuCoin</a:t>
-            </a:r>
+            <a:pPr marL="285750" indent="-285750">
+              <a:buFont typeface="Arial" panose="020B0604020202020204" pitchFamily="34" charset="0"/>
+              <a:buChar char="•"/>
+            </a:pPr>
+            <a:r>
+              <a:rPr lang="en-US" sz="1400">
+                <a:hlinkClick r:id="rId2"/>
+              </a:rPr>
+              <a:t>https://www.kucoin.com</a:t>
+            </a:r>
+            <a:endParaRPr lang="en-US" sz="1400"/>
           </a:p>
         </p:txBody>
       </p:sp>
@@ -5888,14 +6998,20 @@
           <p:nvPr/>
         </p:nvPicPr>
         <p:blipFill>
-          <a:blip r:embed="rId2"/>
+          <a:blip r:embed="rId3" cstate="email">
+            <a:extLst>
+              <a:ext uri="{28A0092B-C50C-407E-A947-70E740481C1C}">
+                <a14:useLocalDpi xmlns:a14="http://schemas.microsoft.com/office/drawing/2010/main"/>
+              </a:ext>
+            </a:extLst>
+          </a:blip>
           <a:stretch>
             <a:fillRect/>
           </a:stretch>
         </p:blipFill>
         <p:spPr>
           <a:xfrm>
-            <a:off x="9029700" y="0"/>
+            <a:off x="8930111" y="52399"/>
             <a:ext cx="3162300" cy="800100"/>
           </a:xfrm>
           <a:prstGeom prst="rect">
@@ -5917,7 +7033,7 @@
         </p:nvSpPr>
         <p:spPr>
           <a:xfrm>
-            <a:off x="127819" y="117987"/>
+            <a:off x="0" y="0"/>
             <a:ext cx="1406013" cy="523220"/>
           </a:xfrm>
           <a:prstGeom prst="rect">
@@ -5938,6 +7054,148 @@
           </a:p>
         </p:txBody>
       </p:sp>
+      <p:sp>
+        <p:nvSpPr>
+          <p:cNvPr id="7" name="TextBox 6">
+            <a:extLst>
+              <a:ext uri="{FF2B5EF4-FFF2-40B4-BE49-F238E27FC236}">
+                <a16:creationId xmlns:a16="http://schemas.microsoft.com/office/drawing/2014/main" id="{C48BC8C4-7A92-E899-7BD5-6B30EEA7FFA0}"/>
+              </a:ext>
+            </a:extLst>
+          </p:cNvPr>
+          <p:cNvSpPr txBox="1"/>
+          <p:nvPr/>
+        </p:nvSpPr>
+        <p:spPr>
+          <a:xfrm>
+            <a:off x="153471" y="1177890"/>
+            <a:ext cx="5848977" cy="2462213"/>
+          </a:xfrm>
+          <a:prstGeom prst="rect">
+            <a:avLst/>
+          </a:prstGeom>
+          <a:noFill/>
+        </p:spPr>
+        <p:txBody>
+          <a:bodyPr wrap="square" rtlCol="0">
+            <a:spAutoFit/>
+          </a:bodyPr>
+          <a:lstStyle/>
+          <a:p>
+            <a:pPr marL="285750" indent="-285750">
+              <a:buFont typeface="Arial" panose="020B0604020202020204" pitchFamily="34" charset="0"/>
+              <a:buChar char="•"/>
+            </a:pPr>
+            <a:r>
+              <a:rPr lang="en-US" sz="1400"/>
+              <a:t>Used by 25% of crypto holders worldwide</a:t>
+            </a:r>
+          </a:p>
+          <a:p>
+            <a:pPr marL="285750" indent="-285750">
+              <a:buFont typeface="Arial" panose="020B0604020202020204" pitchFamily="34" charset="0"/>
+              <a:buChar char="•"/>
+            </a:pPr>
+            <a:r>
+              <a:rPr lang="en-US" sz="1400"/>
+              <a:t>Located at Seychelles - an archipelago of 115 islands in the Indian Ocean</a:t>
+            </a:r>
+          </a:p>
+          <a:p>
+            <a:pPr marL="285750" indent="-285750">
+              <a:buFont typeface="Arial" panose="020B0604020202020204" pitchFamily="34" charset="0"/>
+              <a:buChar char="•"/>
+            </a:pPr>
+            <a:r>
+              <a:rPr lang="en-US" sz="1400"/>
+              <a:t>Daily trading volume ~ $2 Bln</a:t>
+            </a:r>
+          </a:p>
+          <a:p>
+            <a:pPr marL="285750" indent="-285750">
+              <a:buFont typeface="Arial" panose="020B0604020202020204" pitchFamily="34" charset="0"/>
+              <a:buChar char="•"/>
+            </a:pPr>
+            <a:endParaRPr lang="en-US" sz="1400"/>
+          </a:p>
+          <a:p>
+            <a:pPr marL="285750" indent="-285750">
+              <a:buFont typeface="Arial" panose="020B0604020202020204" pitchFamily="34" charset="0"/>
+              <a:buChar char="•"/>
+            </a:pPr>
+            <a:r>
+              <a:rPr lang="en-US" sz="1400"/>
+              <a:t>KuCoin is a large cryptocurrency exchange offering the ability to buy, sell, and trade cryptocurrencies. </a:t>
+            </a:r>
+          </a:p>
+          <a:p>
+            <a:pPr marL="285750" indent="-285750">
+              <a:buFont typeface="Arial" panose="020B0604020202020204" pitchFamily="34" charset="0"/>
+              <a:buChar char="•"/>
+            </a:pPr>
+            <a:r>
+              <a:rPr lang="en-US" sz="1400"/>
+              <a:t>In addition to basic trading options, the platform offers margin, futures, and peer-to-peer (P2P) trading. </a:t>
+            </a:r>
+          </a:p>
+          <a:p>
+            <a:pPr marL="285750" indent="-285750">
+              <a:buFont typeface="Arial" panose="020B0604020202020204" pitchFamily="34" charset="0"/>
+              <a:buChar char="•"/>
+            </a:pPr>
+            <a:r>
+              <a:rPr lang="en-US" sz="1400"/>
+              <a:t>Users can also choose to stake or lend their crypto to earn rewards.</a:t>
+            </a:r>
+          </a:p>
+          <a:p>
+            <a:pPr marL="285750" indent="-285750">
+              <a:buFont typeface="Arial" panose="020B0604020202020204" pitchFamily="34" charset="0"/>
+              <a:buChar char="•"/>
+            </a:pPr>
+            <a:r>
+              <a:rPr lang="en-US" sz="1400"/>
+              <a:t>Compared to some competitors, KuCoin offers low trading fees, making it an attractive option. </a:t>
+            </a:r>
+          </a:p>
+        </p:txBody>
+      </p:sp>
+      <p:pic>
+        <p:nvPicPr>
+          <p:cNvPr id="8" name="Picture 7">
+            <a:extLst>
+              <a:ext uri="{FF2B5EF4-FFF2-40B4-BE49-F238E27FC236}">
+                <a16:creationId xmlns:a16="http://schemas.microsoft.com/office/drawing/2014/main" id="{FB6B637C-0303-B87A-4383-93FDA50EFAE1}"/>
+              </a:ext>
+            </a:extLst>
+          </p:cNvPr>
+          <p:cNvPicPr>
+            <a:picLocks noChangeAspect="1"/>
+          </p:cNvPicPr>
+          <p:nvPr/>
+        </p:nvPicPr>
+        <p:blipFill>
+          <a:blip r:embed="rId4" cstate="email">
+            <a:extLst>
+              <a:ext uri="{28A0092B-C50C-407E-A947-70E740481C1C}">
+                <a14:useLocalDpi xmlns:a14="http://schemas.microsoft.com/office/drawing/2010/main"/>
+              </a:ext>
+            </a:extLst>
+          </a:blip>
+          <a:stretch>
+            <a:fillRect/>
+          </a:stretch>
+        </p:blipFill>
+        <p:spPr>
+          <a:xfrm>
+            <a:off x="7739116" y="1439500"/>
+            <a:ext cx="4299413" cy="3847724"/>
+          </a:xfrm>
+          <a:prstGeom prst="rect">
+            <a:avLst/>
+          </a:prstGeom>
+        </p:spPr>
+      </p:pic>
     </p:spTree>
     <p:extLst>
       <p:ext uri="{BB962C8B-B14F-4D97-AF65-F5344CB8AC3E}">
@@ -5951,7 +7209,7 @@
 </p:sld>
 </file>
 
-<file path=ppt/slides/slide13.xml><?xml version="1.0" encoding="utf-8"?>
+<file path=ppt/slides/slide15.xml><?xml version="1.0" encoding="utf-8"?>
 <p:sld xmlns:a="http://schemas.openxmlformats.org/drawingml/2006/main" xmlns:r="http://schemas.openxmlformats.org/officeDocument/2006/relationships" xmlns:p="http://schemas.openxmlformats.org/presentationml/2006/main">
   <p:cSld>
     <p:spTree>
@@ -6330,7 +7588,7 @@
 </p:sld>
 </file>
 
-<file path=ppt/slides/slide14.xml><?xml version="1.0" encoding="utf-8"?>
+<file path=ppt/slides/slide16.xml><?xml version="1.0" encoding="utf-8"?>
 <p:sld xmlns:a="http://schemas.openxmlformats.org/drawingml/2006/main" xmlns:r="http://schemas.openxmlformats.org/officeDocument/2006/relationships" xmlns:p="http://schemas.openxmlformats.org/presentationml/2006/main">
   <p:cSld>
     <p:spTree>
@@ -6848,7 +8106,7 @@
 </p:sld>
 </file>
 
-<file path=ppt/slides/slide15.xml><?xml version="1.0" encoding="utf-8"?>
+<file path=ppt/slides/slide17.xml><?xml version="1.0" encoding="utf-8"?>
 <p:sld xmlns:a="http://schemas.openxmlformats.org/drawingml/2006/main" xmlns:r="http://schemas.openxmlformats.org/officeDocument/2006/relationships" xmlns:p="http://schemas.openxmlformats.org/presentationml/2006/main">
   <p:cSld>
     <p:spTree>
@@ -7512,6 +8770,2680 @@
       </p:grpSpPr>
       <p:sp>
         <p:nvSpPr>
+          <p:cNvPr id="2" name="TextBox 1">
+            <a:extLst>
+              <a:ext uri="{FF2B5EF4-FFF2-40B4-BE49-F238E27FC236}">
+                <a16:creationId xmlns:a16="http://schemas.microsoft.com/office/drawing/2014/main" id="{913DB045-F72E-FDB5-FA01-5ADAA57DED8B}"/>
+              </a:ext>
+            </a:extLst>
+          </p:cNvPr>
+          <p:cNvSpPr txBox="1"/>
+          <p:nvPr/>
+        </p:nvSpPr>
+        <p:spPr>
+          <a:xfrm>
+            <a:off x="1856" y="0"/>
+            <a:ext cx="6384471" cy="523220"/>
+          </a:xfrm>
+          <a:prstGeom prst="rect">
+            <a:avLst/>
+          </a:prstGeom>
+          <a:noFill/>
+        </p:spPr>
+        <p:txBody>
+          <a:bodyPr wrap="square" rtlCol="0">
+            <a:spAutoFit/>
+          </a:bodyPr>
+          <a:lstStyle/>
+          <a:p>
+            <a:r>
+              <a:rPr lang="en-US" sz="2800" b="1"/>
+              <a:t>Twenty Largest Crypto Exchanges (2021) </a:t>
+            </a:r>
+          </a:p>
+        </p:txBody>
+      </p:sp>
+      <p:graphicFrame>
+        <p:nvGraphicFramePr>
+          <p:cNvPr id="3" name="Table 2">
+            <a:extLst>
+              <a:ext uri="{FF2B5EF4-FFF2-40B4-BE49-F238E27FC236}">
+                <a16:creationId xmlns:a16="http://schemas.microsoft.com/office/drawing/2014/main" id="{614586BE-5218-CB12-594D-C2A22543A4AA}"/>
+              </a:ext>
+            </a:extLst>
+          </p:cNvPr>
+          <p:cNvGraphicFramePr>
+            <a:graphicFrameLocks noGrp="1"/>
+          </p:cNvGraphicFramePr>
+          <p:nvPr>
+            <p:extLst>
+              <p:ext uri="{D42A27DB-BD31-4B8C-83A1-F6EECF244321}">
+                <p14:modId xmlns:p14="http://schemas.microsoft.com/office/powerpoint/2010/main" val="2908998981"/>
+              </p:ext>
+            </p:extLst>
+          </p:nvPr>
+        </p:nvGraphicFramePr>
+        <p:xfrm>
+          <a:off x="124968" y="825062"/>
+          <a:ext cx="6384471" cy="5394454"/>
+        </p:xfrm>
+        <a:graphic>
+          <a:graphicData uri="http://schemas.openxmlformats.org/drawingml/2006/table">
+            <a:tbl>
+              <a:tblPr>
+                <a:tableStyleId>{5C22544A-7EE6-4342-B048-85BDC9FD1C3A}</a:tableStyleId>
+              </a:tblPr>
+              <a:tblGrid>
+                <a:gridCol w="816593">
+                  <a:extLst>
+                    <a:ext uri="{9D8B030D-6E8A-4147-A177-3AD203B41FA5}">
+                      <a16:colId xmlns:a16="http://schemas.microsoft.com/office/drawing/2014/main" val="3175990804"/>
+                    </a:ext>
+                  </a:extLst>
+                </a:gridCol>
+                <a:gridCol w="2417275">
+                  <a:extLst>
+                    <a:ext uri="{9D8B030D-6E8A-4147-A177-3AD203B41FA5}">
+                      <a16:colId xmlns:a16="http://schemas.microsoft.com/office/drawing/2014/main" val="1655490010"/>
+                    </a:ext>
+                  </a:extLst>
+                </a:gridCol>
+                <a:gridCol w="1934267">
+                  <a:extLst>
+                    <a:ext uri="{9D8B030D-6E8A-4147-A177-3AD203B41FA5}">
+                      <a16:colId xmlns:a16="http://schemas.microsoft.com/office/drawing/2014/main" val="93243831"/>
+                    </a:ext>
+                  </a:extLst>
+                </a:gridCol>
+                <a:gridCol w="1216336">
+                  <a:extLst>
+                    <a:ext uri="{9D8B030D-6E8A-4147-A177-3AD203B41FA5}">
+                      <a16:colId xmlns:a16="http://schemas.microsoft.com/office/drawing/2014/main" val="1462544625"/>
+                    </a:ext>
+                  </a:extLst>
+                </a:gridCol>
+              </a:tblGrid>
+              <a:tr h="272708">
+                <a:tc>
+                  <a:txBody>
+                    <a:bodyPr/>
+                    <a:lstStyle/>
+                    <a:p>
+                      <a:pPr algn="ctr" fontAlgn="b"/>
+                      <a:r>
+                        <a:rPr lang="en-US" sz="1200" u="none" strike="noStrike">
+                          <a:effectLst/>
+                          <a:latin typeface="+mn-lt"/>
+                        </a:rPr>
+                        <a:t>Rank</a:t>
+                      </a:r>
+                      <a:endParaRPr lang="en-US" sz="1200" b="0" i="0" u="none" strike="noStrike">
+                        <a:solidFill>
+                          <a:srgbClr val="000000"/>
+                        </a:solidFill>
+                        <a:effectLst/>
+                        <a:latin typeface="+mn-lt"/>
+                      </a:endParaRPr>
+                    </a:p>
+                  </a:txBody>
+                  <a:tcPr marL="6922" marR="6922" marT="6922" marB="0" anchor="ctr">
+                    <a:solidFill>
+                      <a:schemeClr val="accent4">
+                        <a:lumMod val="20000"/>
+                        <a:lumOff val="80000"/>
+                      </a:schemeClr>
+                    </a:solidFill>
+                  </a:tcPr>
+                </a:tc>
+                <a:tc>
+                  <a:txBody>
+                    <a:bodyPr/>
+                    <a:lstStyle/>
+                    <a:p>
+                      <a:pPr algn="ctr" fontAlgn="b"/>
+                      <a:r>
+                        <a:rPr lang="en-US" sz="1200" u="none" strike="noStrike">
+                          <a:effectLst/>
+                          <a:latin typeface="+mn-lt"/>
+                        </a:rPr>
+                        <a:t>Crypto Exchange</a:t>
+                      </a:r>
+                      <a:endParaRPr lang="en-US" sz="1200" b="0" i="0" u="none" strike="noStrike">
+                        <a:solidFill>
+                          <a:srgbClr val="000000"/>
+                        </a:solidFill>
+                        <a:effectLst/>
+                        <a:latin typeface="+mn-lt"/>
+                      </a:endParaRPr>
+                    </a:p>
+                  </a:txBody>
+                  <a:tcPr marL="6922" marR="6922" marT="6922" marB="0" anchor="ctr">
+                    <a:solidFill>
+                      <a:schemeClr val="accent4">
+                        <a:lumMod val="20000"/>
+                        <a:lumOff val="80000"/>
+                      </a:schemeClr>
+                    </a:solidFill>
+                  </a:tcPr>
+                </a:tc>
+                <a:tc>
+                  <a:txBody>
+                    <a:bodyPr/>
+                    <a:lstStyle/>
+                    <a:p>
+                      <a:pPr algn="ctr" fontAlgn="b"/>
+                      <a:r>
+                        <a:rPr lang="en-US" sz="1200" u="none" strike="noStrike">
+                          <a:effectLst/>
+                          <a:latin typeface="+mn-lt"/>
+                        </a:rPr>
+                        <a:t>Country/Territory</a:t>
+                      </a:r>
+                      <a:endParaRPr lang="en-US" sz="1200" b="0" i="0" u="none" strike="noStrike">
+                        <a:solidFill>
+                          <a:srgbClr val="000000"/>
+                        </a:solidFill>
+                        <a:effectLst/>
+                        <a:latin typeface="+mn-lt"/>
+                      </a:endParaRPr>
+                    </a:p>
+                  </a:txBody>
+                  <a:tcPr marL="6922" marR="6922" marT="6922" marB="0" anchor="ctr">
+                    <a:solidFill>
+                      <a:schemeClr val="accent4">
+                        <a:lumMod val="20000"/>
+                        <a:lumOff val="80000"/>
+                      </a:schemeClr>
+                    </a:solidFill>
+                  </a:tcPr>
+                </a:tc>
+                <a:tc>
+                  <a:txBody>
+                    <a:bodyPr/>
+                    <a:lstStyle/>
+                    <a:p>
+                      <a:pPr algn="ctr" fontAlgn="b"/>
+                      <a:r>
+                        <a:rPr lang="en-US" sz="1200" u="none" strike="noStrike">
+                          <a:effectLst/>
+                          <a:latin typeface="+mn-lt"/>
+                        </a:rPr>
+                        <a:t>Daily Volume</a:t>
+                      </a:r>
+                      <a:br>
+                        <a:rPr lang="en-US" sz="1200" u="none" strike="noStrike">
+                          <a:effectLst/>
+                          <a:latin typeface="+mn-lt"/>
+                        </a:rPr>
+                      </a:br>
+                      <a:r>
+                        <a:rPr lang="en-US" sz="1200" u="none" strike="noStrike">
+                          <a:effectLst/>
+                          <a:latin typeface="+mn-lt"/>
+                        </a:rPr>
+                        <a:t>in $Bln</a:t>
+                      </a:r>
+                      <a:endParaRPr lang="en-US" sz="1200" b="0" i="0" u="none" strike="noStrike">
+                        <a:solidFill>
+                          <a:srgbClr val="000000"/>
+                        </a:solidFill>
+                        <a:effectLst/>
+                        <a:latin typeface="+mn-lt"/>
+                      </a:endParaRPr>
+                    </a:p>
+                  </a:txBody>
+                  <a:tcPr marL="6922" marR="6922" marT="6922" marB="0" anchor="ctr">
+                    <a:solidFill>
+                      <a:schemeClr val="accent4">
+                        <a:lumMod val="20000"/>
+                        <a:lumOff val="80000"/>
+                      </a:schemeClr>
+                    </a:solidFill>
+                  </a:tcPr>
+                </a:tc>
+                <a:extLst>
+                  <a:ext uri="{0D108BD9-81ED-4DB2-BD59-A6C34878D82A}">
+                    <a16:rowId xmlns:a16="http://schemas.microsoft.com/office/drawing/2014/main" val="3022042519"/>
+                  </a:ext>
+                </a:extLst>
+              </a:tr>
+              <a:tr h="272708">
+                <a:tc>
+                  <a:txBody>
+                    <a:bodyPr/>
+                    <a:lstStyle/>
+                    <a:p>
+                      <a:pPr algn="ctr" fontAlgn="b"/>
+                      <a:r>
+                        <a:rPr lang="en-US" sz="1200" u="none" strike="noStrike">
+                          <a:effectLst/>
+                          <a:latin typeface="+mn-lt"/>
+                        </a:rPr>
+                        <a:t>1</a:t>
+                      </a:r>
+                      <a:endParaRPr lang="en-US" sz="1200" b="0" i="0" u="none" strike="noStrike">
+                        <a:solidFill>
+                          <a:srgbClr val="000000"/>
+                        </a:solidFill>
+                        <a:effectLst/>
+                        <a:latin typeface="+mn-lt"/>
+                      </a:endParaRPr>
+                    </a:p>
+                  </a:txBody>
+                  <a:tcPr marL="6922" marR="6922" marT="6922" marB="0" anchor="ctr"/>
+                </a:tc>
+                <a:tc>
+                  <a:txBody>
+                    <a:bodyPr/>
+                    <a:lstStyle/>
+                    <a:p>
+                      <a:pPr algn="ctr" fontAlgn="b"/>
+                      <a:r>
+                        <a:rPr lang="en-US" sz="1200" b="1" u="none" strike="noStrike">
+                          <a:solidFill>
+                            <a:srgbClr val="FF0000"/>
+                          </a:solidFill>
+                          <a:effectLst/>
+                          <a:latin typeface="+mn-lt"/>
+                        </a:rPr>
+                        <a:t>Binance</a:t>
+                      </a:r>
+                      <a:endParaRPr lang="en-US" sz="1200" b="1" i="0" u="none" strike="noStrike">
+                        <a:solidFill>
+                          <a:srgbClr val="FF0000"/>
+                        </a:solidFill>
+                        <a:effectLst/>
+                        <a:latin typeface="+mn-lt"/>
+                      </a:endParaRPr>
+                    </a:p>
+                  </a:txBody>
+                  <a:tcPr marL="6922" marR="6922" marT="6922" marB="0" anchor="ctr"/>
+                </a:tc>
+                <a:tc>
+                  <a:txBody>
+                    <a:bodyPr/>
+                    <a:lstStyle/>
+                    <a:p>
+                      <a:pPr algn="ctr" fontAlgn="b"/>
+                      <a:r>
+                        <a:rPr lang="en-US" sz="1200" u="none" strike="noStrike">
+                          <a:effectLst/>
+                          <a:latin typeface="+mn-lt"/>
+                        </a:rPr>
+                        <a:t>Cayman Islands</a:t>
+                      </a:r>
+                      <a:endParaRPr lang="en-US" sz="1200" b="0" i="0" u="none" strike="noStrike">
+                        <a:solidFill>
+                          <a:srgbClr val="000000"/>
+                        </a:solidFill>
+                        <a:effectLst/>
+                        <a:latin typeface="+mn-lt"/>
+                      </a:endParaRPr>
+                    </a:p>
+                  </a:txBody>
+                  <a:tcPr marL="6922" marR="6922" marT="6922" marB="0" anchor="ctr"/>
+                </a:tc>
+                <a:tc>
+                  <a:txBody>
+                    <a:bodyPr/>
+                    <a:lstStyle/>
+                    <a:p>
+                      <a:pPr algn="ctr" fontAlgn="b"/>
+                      <a:r>
+                        <a:rPr lang="en-US" sz="1200" u="none" strike="noStrike">
+                          <a:effectLst/>
+                          <a:latin typeface="+mn-lt"/>
+                        </a:rPr>
+                        <a:t>24.19</a:t>
+                      </a:r>
+                      <a:endParaRPr lang="en-US" sz="1200" b="0" i="0" u="none" strike="noStrike">
+                        <a:solidFill>
+                          <a:srgbClr val="000000"/>
+                        </a:solidFill>
+                        <a:effectLst/>
+                        <a:latin typeface="+mn-lt"/>
+                      </a:endParaRPr>
+                    </a:p>
+                  </a:txBody>
+                  <a:tcPr marL="6922" marR="6922" marT="6922" marB="0" anchor="ctr"/>
+                </a:tc>
+                <a:extLst>
+                  <a:ext uri="{0D108BD9-81ED-4DB2-BD59-A6C34878D82A}">
+                    <a16:rowId xmlns:a16="http://schemas.microsoft.com/office/drawing/2014/main" val="81286840"/>
+                  </a:ext>
+                </a:extLst>
+              </a:tr>
+              <a:tr h="272708">
+                <a:tc>
+                  <a:txBody>
+                    <a:bodyPr/>
+                    <a:lstStyle/>
+                    <a:p>
+                      <a:pPr algn="ctr" fontAlgn="b"/>
+                      <a:r>
+                        <a:rPr lang="en-US" sz="1200" u="none" strike="noStrike">
+                          <a:solidFill>
+                            <a:schemeClr val="bg1">
+                              <a:lumMod val="65000"/>
+                            </a:schemeClr>
+                          </a:solidFill>
+                          <a:effectLst/>
+                          <a:latin typeface="+mn-lt"/>
+                        </a:rPr>
+                        <a:t>2</a:t>
+                      </a:r>
+                      <a:endParaRPr lang="en-US" sz="1200" b="0" i="0" u="none" strike="noStrike">
+                        <a:solidFill>
+                          <a:schemeClr val="bg1">
+                            <a:lumMod val="65000"/>
+                          </a:schemeClr>
+                        </a:solidFill>
+                        <a:effectLst/>
+                        <a:latin typeface="+mn-lt"/>
+                      </a:endParaRPr>
+                    </a:p>
+                  </a:txBody>
+                  <a:tcPr marL="6922" marR="6922" marT="6922" marB="0" anchor="ctr"/>
+                </a:tc>
+                <a:tc>
+                  <a:txBody>
+                    <a:bodyPr/>
+                    <a:lstStyle/>
+                    <a:p>
+                      <a:pPr algn="ctr" fontAlgn="b"/>
+                      <a:r>
+                        <a:rPr lang="en-US" sz="1200" u="none" strike="noStrike">
+                          <a:solidFill>
+                            <a:schemeClr val="bg1">
+                              <a:lumMod val="65000"/>
+                            </a:schemeClr>
+                          </a:solidFill>
+                          <a:effectLst/>
+                          <a:latin typeface="+mn-lt"/>
+                        </a:rPr>
+                        <a:t>Mandala Exchange</a:t>
+                      </a:r>
+                    </a:p>
+                    <a:p>
+                      <a:pPr algn="ctr" fontAlgn="b"/>
+                      <a:r>
+                        <a:rPr lang="en-US" sz="1200" b="0" i="0" u="none" strike="noStrike">
+                          <a:solidFill>
+                            <a:schemeClr val="bg1">
+                              <a:lumMod val="65000"/>
+                            </a:schemeClr>
+                          </a:solidFill>
+                          <a:effectLst/>
+                          <a:latin typeface="+mn-lt"/>
+                        </a:rPr>
+                        <a:t>(considered to be a scam)</a:t>
+                      </a:r>
+                    </a:p>
+                  </a:txBody>
+                  <a:tcPr marL="6922" marR="6922" marT="6922" marB="0" anchor="ctr"/>
+                </a:tc>
+                <a:tc>
+                  <a:txBody>
+                    <a:bodyPr/>
+                    <a:lstStyle/>
+                    <a:p>
+                      <a:pPr algn="ctr" fontAlgn="b"/>
+                      <a:r>
+                        <a:rPr lang="en-US" sz="1200" u="none" strike="noStrike">
+                          <a:solidFill>
+                            <a:schemeClr val="bg1">
+                              <a:lumMod val="65000"/>
+                            </a:schemeClr>
+                          </a:solidFill>
+                          <a:effectLst/>
+                          <a:latin typeface="+mn-lt"/>
+                        </a:rPr>
+                        <a:t>United States</a:t>
+                      </a:r>
+                      <a:endParaRPr lang="en-US" sz="1200" b="0" i="0" u="none" strike="noStrike">
+                        <a:solidFill>
+                          <a:schemeClr val="bg1">
+                            <a:lumMod val="65000"/>
+                          </a:schemeClr>
+                        </a:solidFill>
+                        <a:effectLst/>
+                        <a:latin typeface="+mn-lt"/>
+                      </a:endParaRPr>
+                    </a:p>
+                  </a:txBody>
+                  <a:tcPr marL="6922" marR="6922" marT="6922" marB="0" anchor="ctr"/>
+                </a:tc>
+                <a:tc>
+                  <a:txBody>
+                    <a:bodyPr/>
+                    <a:lstStyle/>
+                    <a:p>
+                      <a:pPr algn="ctr" fontAlgn="b"/>
+                      <a:r>
+                        <a:rPr lang="en-US" sz="1200" u="none" strike="noStrike">
+                          <a:solidFill>
+                            <a:schemeClr val="bg1">
+                              <a:lumMod val="65000"/>
+                            </a:schemeClr>
+                          </a:solidFill>
+                          <a:effectLst/>
+                          <a:latin typeface="+mn-lt"/>
+                        </a:rPr>
+                        <a:t>20.77</a:t>
+                      </a:r>
+                      <a:endParaRPr lang="en-US" sz="1200" b="0" i="0" u="none" strike="noStrike">
+                        <a:solidFill>
+                          <a:schemeClr val="bg1">
+                            <a:lumMod val="65000"/>
+                          </a:schemeClr>
+                        </a:solidFill>
+                        <a:effectLst/>
+                        <a:latin typeface="+mn-lt"/>
+                      </a:endParaRPr>
+                    </a:p>
+                  </a:txBody>
+                  <a:tcPr marL="6922" marR="6922" marT="6922" marB="0" anchor="ctr"/>
+                </a:tc>
+                <a:extLst>
+                  <a:ext uri="{0D108BD9-81ED-4DB2-BD59-A6C34878D82A}">
+                    <a16:rowId xmlns:a16="http://schemas.microsoft.com/office/drawing/2014/main" val="3142808359"/>
+                  </a:ext>
+                </a:extLst>
+              </a:tr>
+              <a:tr h="147659">
+                <a:tc>
+                  <a:txBody>
+                    <a:bodyPr/>
+                    <a:lstStyle/>
+                    <a:p>
+                      <a:pPr algn="ctr" fontAlgn="b"/>
+                      <a:r>
+                        <a:rPr lang="en-US" sz="1200" u="none" strike="noStrike">
+                          <a:effectLst/>
+                          <a:latin typeface="+mn-lt"/>
+                        </a:rPr>
+                        <a:t>3</a:t>
+                      </a:r>
+                      <a:endParaRPr lang="en-US" sz="1200" b="0" i="0" u="none" strike="noStrike">
+                        <a:solidFill>
+                          <a:srgbClr val="000000"/>
+                        </a:solidFill>
+                        <a:effectLst/>
+                        <a:latin typeface="+mn-lt"/>
+                      </a:endParaRPr>
+                    </a:p>
+                  </a:txBody>
+                  <a:tcPr marL="6922" marR="6922" marT="6922" marB="0" anchor="ctr"/>
+                </a:tc>
+                <a:tc>
+                  <a:txBody>
+                    <a:bodyPr/>
+                    <a:lstStyle/>
+                    <a:p>
+                      <a:pPr algn="ctr" fontAlgn="b"/>
+                      <a:r>
+                        <a:rPr lang="en-US" sz="1200" u="none" strike="noStrike">
+                          <a:effectLst/>
+                          <a:latin typeface="+mn-lt"/>
+                        </a:rPr>
+                        <a:t>Coinsbit</a:t>
+                      </a:r>
+                      <a:endParaRPr lang="en-US" sz="1200" b="0" i="0" u="none" strike="noStrike">
+                        <a:solidFill>
+                          <a:srgbClr val="000000"/>
+                        </a:solidFill>
+                        <a:effectLst/>
+                        <a:latin typeface="+mn-lt"/>
+                      </a:endParaRPr>
+                    </a:p>
+                  </a:txBody>
+                  <a:tcPr marL="6922" marR="6922" marT="6922" marB="0" anchor="ctr"/>
+                </a:tc>
+                <a:tc>
+                  <a:txBody>
+                    <a:bodyPr/>
+                    <a:lstStyle/>
+                    <a:p>
+                      <a:pPr algn="ctr" fontAlgn="b"/>
+                      <a:r>
+                        <a:rPr lang="en-US" sz="1200" u="none" strike="noStrike">
+                          <a:effectLst/>
+                          <a:latin typeface="+mn-lt"/>
+                        </a:rPr>
+                        <a:t>Seychelles</a:t>
+                      </a:r>
+                      <a:endParaRPr lang="en-US" sz="1200" b="0" i="0" u="none" strike="noStrike">
+                        <a:solidFill>
+                          <a:srgbClr val="000000"/>
+                        </a:solidFill>
+                        <a:effectLst/>
+                        <a:latin typeface="+mn-lt"/>
+                      </a:endParaRPr>
+                    </a:p>
+                  </a:txBody>
+                  <a:tcPr marL="6922" marR="6922" marT="6922" marB="0" anchor="ctr"/>
+                </a:tc>
+                <a:tc>
+                  <a:txBody>
+                    <a:bodyPr/>
+                    <a:lstStyle/>
+                    <a:p>
+                      <a:pPr algn="ctr" fontAlgn="b"/>
+                      <a:r>
+                        <a:rPr lang="en-US" sz="1200" u="none" strike="noStrike">
+                          <a:effectLst/>
+                          <a:latin typeface="+mn-lt"/>
+                        </a:rPr>
+                        <a:t>7.01</a:t>
+                      </a:r>
+                      <a:endParaRPr lang="en-US" sz="1200" b="0" i="0" u="none" strike="noStrike">
+                        <a:solidFill>
+                          <a:srgbClr val="000000"/>
+                        </a:solidFill>
+                        <a:effectLst/>
+                        <a:latin typeface="+mn-lt"/>
+                      </a:endParaRPr>
+                    </a:p>
+                  </a:txBody>
+                  <a:tcPr marL="6922" marR="6922" marT="6922" marB="0" anchor="ctr"/>
+                </a:tc>
+                <a:extLst>
+                  <a:ext uri="{0D108BD9-81ED-4DB2-BD59-A6C34878D82A}">
+                    <a16:rowId xmlns:a16="http://schemas.microsoft.com/office/drawing/2014/main" val="1091278200"/>
+                  </a:ext>
+                </a:extLst>
+              </a:tr>
+              <a:tr h="147659">
+                <a:tc>
+                  <a:txBody>
+                    <a:bodyPr/>
+                    <a:lstStyle/>
+                    <a:p>
+                      <a:pPr algn="ctr" fontAlgn="b"/>
+                      <a:r>
+                        <a:rPr lang="en-US" sz="1200" u="none" strike="noStrike">
+                          <a:effectLst/>
+                          <a:latin typeface="+mn-lt"/>
+                        </a:rPr>
+                        <a:t>4</a:t>
+                      </a:r>
+                      <a:endParaRPr lang="en-US" sz="1200" b="0" i="0" u="none" strike="noStrike">
+                        <a:solidFill>
+                          <a:srgbClr val="000000"/>
+                        </a:solidFill>
+                        <a:effectLst/>
+                        <a:latin typeface="+mn-lt"/>
+                      </a:endParaRPr>
+                    </a:p>
+                  </a:txBody>
+                  <a:tcPr marL="6922" marR="6922" marT="6922" marB="0" anchor="ctr"/>
+                </a:tc>
+                <a:tc>
+                  <a:txBody>
+                    <a:bodyPr/>
+                    <a:lstStyle/>
+                    <a:p>
+                      <a:pPr algn="ctr" fontAlgn="b"/>
+                      <a:r>
+                        <a:rPr lang="en-US" sz="1200" u="none" strike="noStrike">
+                          <a:effectLst/>
+                          <a:latin typeface="+mn-lt"/>
+                        </a:rPr>
+                        <a:t>Upbit</a:t>
+                      </a:r>
+                      <a:endParaRPr lang="en-US" sz="1200" b="0" i="0" u="none" strike="noStrike">
+                        <a:solidFill>
+                          <a:srgbClr val="000000"/>
+                        </a:solidFill>
+                        <a:effectLst/>
+                        <a:latin typeface="+mn-lt"/>
+                      </a:endParaRPr>
+                    </a:p>
+                  </a:txBody>
+                  <a:tcPr marL="6922" marR="6922" marT="6922" marB="0" anchor="ctr"/>
+                </a:tc>
+                <a:tc>
+                  <a:txBody>
+                    <a:bodyPr/>
+                    <a:lstStyle/>
+                    <a:p>
+                      <a:pPr algn="ctr" fontAlgn="b"/>
+                      <a:r>
+                        <a:rPr lang="en-US" sz="1200" u="none" strike="noStrike">
+                          <a:effectLst/>
+                          <a:latin typeface="+mn-lt"/>
+                        </a:rPr>
+                        <a:t>South Korea</a:t>
+                      </a:r>
+                      <a:endParaRPr lang="en-US" sz="1200" b="0" i="0" u="none" strike="noStrike">
+                        <a:solidFill>
+                          <a:srgbClr val="000000"/>
+                        </a:solidFill>
+                        <a:effectLst/>
+                        <a:latin typeface="+mn-lt"/>
+                      </a:endParaRPr>
+                    </a:p>
+                  </a:txBody>
+                  <a:tcPr marL="6922" marR="6922" marT="6922" marB="0" anchor="ctr"/>
+                </a:tc>
+                <a:tc>
+                  <a:txBody>
+                    <a:bodyPr/>
+                    <a:lstStyle/>
+                    <a:p>
+                      <a:pPr algn="ctr" fontAlgn="b"/>
+                      <a:r>
+                        <a:rPr lang="en-US" sz="1200" u="none" strike="noStrike">
+                          <a:effectLst/>
+                          <a:latin typeface="+mn-lt"/>
+                        </a:rPr>
+                        <a:t>5.43</a:t>
+                      </a:r>
+                      <a:endParaRPr lang="en-US" sz="1200" b="0" i="0" u="none" strike="noStrike">
+                        <a:solidFill>
+                          <a:srgbClr val="000000"/>
+                        </a:solidFill>
+                        <a:effectLst/>
+                        <a:latin typeface="+mn-lt"/>
+                      </a:endParaRPr>
+                    </a:p>
+                  </a:txBody>
+                  <a:tcPr marL="6922" marR="6922" marT="6922" marB="0" anchor="ctr"/>
+                </a:tc>
+                <a:extLst>
+                  <a:ext uri="{0D108BD9-81ED-4DB2-BD59-A6C34878D82A}">
+                    <a16:rowId xmlns:a16="http://schemas.microsoft.com/office/drawing/2014/main" val="978583552"/>
+                  </a:ext>
+                </a:extLst>
+              </a:tr>
+              <a:tr h="147659">
+                <a:tc>
+                  <a:txBody>
+                    <a:bodyPr/>
+                    <a:lstStyle/>
+                    <a:p>
+                      <a:pPr algn="ctr" fontAlgn="b"/>
+                      <a:r>
+                        <a:rPr lang="en-US" sz="1200" u="none" strike="noStrike">
+                          <a:effectLst/>
+                          <a:latin typeface="+mn-lt"/>
+                        </a:rPr>
+                        <a:t>5</a:t>
+                      </a:r>
+                      <a:endParaRPr lang="en-US" sz="1200" b="0" i="0" u="none" strike="noStrike">
+                        <a:solidFill>
+                          <a:srgbClr val="000000"/>
+                        </a:solidFill>
+                        <a:effectLst/>
+                        <a:latin typeface="+mn-lt"/>
+                      </a:endParaRPr>
+                    </a:p>
+                  </a:txBody>
+                  <a:tcPr marL="6922" marR="6922" marT="6922" marB="0" anchor="ctr"/>
+                </a:tc>
+                <a:tc>
+                  <a:txBody>
+                    <a:bodyPr/>
+                    <a:lstStyle/>
+                    <a:p>
+                      <a:pPr algn="ctr" fontAlgn="b"/>
+                      <a:r>
+                        <a:rPr lang="en-US" sz="1200" u="none" strike="noStrike">
+                          <a:effectLst/>
+                          <a:latin typeface="+mn-lt"/>
+                        </a:rPr>
+                        <a:t>OKEx</a:t>
+                      </a:r>
+                      <a:endParaRPr lang="en-US" sz="1200" b="0" i="0" u="none" strike="noStrike">
+                        <a:solidFill>
+                          <a:srgbClr val="000000"/>
+                        </a:solidFill>
+                        <a:effectLst/>
+                        <a:latin typeface="+mn-lt"/>
+                      </a:endParaRPr>
+                    </a:p>
+                  </a:txBody>
+                  <a:tcPr marL="6922" marR="6922" marT="6922" marB="0" anchor="ctr"/>
+                </a:tc>
+                <a:tc>
+                  <a:txBody>
+                    <a:bodyPr/>
+                    <a:lstStyle/>
+                    <a:p>
+                      <a:pPr algn="ctr" fontAlgn="b"/>
+                      <a:r>
+                        <a:rPr lang="en-US" sz="1200" u="none" strike="noStrike">
+                          <a:effectLst/>
+                          <a:latin typeface="+mn-lt"/>
+                        </a:rPr>
+                        <a:t>Seychelles</a:t>
+                      </a:r>
+                      <a:endParaRPr lang="en-US" sz="1200" b="0" i="0" u="none" strike="noStrike">
+                        <a:solidFill>
+                          <a:srgbClr val="000000"/>
+                        </a:solidFill>
+                        <a:effectLst/>
+                        <a:latin typeface="+mn-lt"/>
+                      </a:endParaRPr>
+                    </a:p>
+                  </a:txBody>
+                  <a:tcPr marL="6922" marR="6922" marT="6922" marB="0" anchor="ctr"/>
+                </a:tc>
+                <a:tc>
+                  <a:txBody>
+                    <a:bodyPr/>
+                    <a:lstStyle/>
+                    <a:p>
+                      <a:pPr algn="ctr" fontAlgn="b"/>
+                      <a:r>
+                        <a:rPr lang="en-US" sz="1200" u="none" strike="noStrike">
+                          <a:effectLst/>
+                          <a:latin typeface="+mn-lt"/>
+                        </a:rPr>
+                        <a:t>4.86</a:t>
+                      </a:r>
+                      <a:endParaRPr lang="en-US" sz="1200" b="0" i="0" u="none" strike="noStrike">
+                        <a:solidFill>
+                          <a:srgbClr val="000000"/>
+                        </a:solidFill>
+                        <a:effectLst/>
+                        <a:latin typeface="+mn-lt"/>
+                      </a:endParaRPr>
+                    </a:p>
+                  </a:txBody>
+                  <a:tcPr marL="6922" marR="6922" marT="6922" marB="0" anchor="ctr"/>
+                </a:tc>
+                <a:extLst>
+                  <a:ext uri="{0D108BD9-81ED-4DB2-BD59-A6C34878D82A}">
+                    <a16:rowId xmlns:a16="http://schemas.microsoft.com/office/drawing/2014/main" val="3727701753"/>
+                  </a:ext>
+                </a:extLst>
+              </a:tr>
+              <a:tr h="147659">
+                <a:tc>
+                  <a:txBody>
+                    <a:bodyPr/>
+                    <a:lstStyle/>
+                    <a:p>
+                      <a:pPr algn="ctr" fontAlgn="b"/>
+                      <a:r>
+                        <a:rPr lang="en-US" sz="1200" u="none" strike="noStrike">
+                          <a:effectLst/>
+                          <a:latin typeface="+mn-lt"/>
+                        </a:rPr>
+                        <a:t>6</a:t>
+                      </a:r>
+                      <a:endParaRPr lang="en-US" sz="1200" b="0" i="0" u="none" strike="noStrike">
+                        <a:solidFill>
+                          <a:srgbClr val="000000"/>
+                        </a:solidFill>
+                        <a:effectLst/>
+                        <a:latin typeface="+mn-lt"/>
+                      </a:endParaRPr>
+                    </a:p>
+                  </a:txBody>
+                  <a:tcPr marL="6922" marR="6922" marT="6922" marB="0" anchor="ctr"/>
+                </a:tc>
+                <a:tc>
+                  <a:txBody>
+                    <a:bodyPr/>
+                    <a:lstStyle/>
+                    <a:p>
+                      <a:pPr algn="ctr" fontAlgn="b"/>
+                      <a:r>
+                        <a:rPr lang="en-US" sz="1200" u="none" strike="noStrike">
+                          <a:effectLst/>
+                          <a:latin typeface="+mn-lt"/>
+                        </a:rPr>
+                        <a:t>Huobi</a:t>
+                      </a:r>
+                      <a:endParaRPr lang="en-US" sz="1200" b="0" i="0" u="none" strike="noStrike">
+                        <a:solidFill>
+                          <a:srgbClr val="000000"/>
+                        </a:solidFill>
+                        <a:effectLst/>
+                        <a:latin typeface="+mn-lt"/>
+                      </a:endParaRPr>
+                    </a:p>
+                  </a:txBody>
+                  <a:tcPr marL="6922" marR="6922" marT="6922" marB="0" anchor="ctr"/>
+                </a:tc>
+                <a:tc>
+                  <a:txBody>
+                    <a:bodyPr/>
+                    <a:lstStyle/>
+                    <a:p>
+                      <a:pPr algn="ctr" fontAlgn="b"/>
+                      <a:r>
+                        <a:rPr lang="en-US" sz="1200" u="none" strike="noStrike">
+                          <a:effectLst/>
+                          <a:latin typeface="+mn-lt"/>
+                        </a:rPr>
+                        <a:t>Seychelles</a:t>
+                      </a:r>
+                      <a:endParaRPr lang="en-US" sz="1200" b="0" i="0" u="none" strike="noStrike">
+                        <a:solidFill>
+                          <a:srgbClr val="000000"/>
+                        </a:solidFill>
+                        <a:effectLst/>
+                        <a:latin typeface="+mn-lt"/>
+                      </a:endParaRPr>
+                    </a:p>
+                  </a:txBody>
+                  <a:tcPr marL="6922" marR="6922" marT="6922" marB="0" anchor="ctr"/>
+                </a:tc>
+                <a:tc>
+                  <a:txBody>
+                    <a:bodyPr/>
+                    <a:lstStyle/>
+                    <a:p>
+                      <a:pPr algn="ctr" fontAlgn="b"/>
+                      <a:r>
+                        <a:rPr lang="en-US" sz="1200" u="none" strike="noStrike">
+                          <a:effectLst/>
+                          <a:latin typeface="+mn-lt"/>
+                        </a:rPr>
+                        <a:t>4.22</a:t>
+                      </a:r>
+                      <a:endParaRPr lang="en-US" sz="1200" b="0" i="0" u="none" strike="noStrike">
+                        <a:solidFill>
+                          <a:srgbClr val="000000"/>
+                        </a:solidFill>
+                        <a:effectLst/>
+                        <a:latin typeface="+mn-lt"/>
+                      </a:endParaRPr>
+                    </a:p>
+                  </a:txBody>
+                  <a:tcPr marL="6922" marR="6922" marT="6922" marB="0" anchor="ctr"/>
+                </a:tc>
+                <a:extLst>
+                  <a:ext uri="{0D108BD9-81ED-4DB2-BD59-A6C34878D82A}">
+                    <a16:rowId xmlns:a16="http://schemas.microsoft.com/office/drawing/2014/main" val="3127659413"/>
+                  </a:ext>
+                </a:extLst>
+              </a:tr>
+              <a:tr h="272708">
+                <a:tc>
+                  <a:txBody>
+                    <a:bodyPr/>
+                    <a:lstStyle/>
+                    <a:p>
+                      <a:pPr algn="ctr" fontAlgn="b"/>
+                      <a:r>
+                        <a:rPr lang="en-US" sz="1200" u="none" strike="noStrike">
+                          <a:effectLst/>
+                          <a:latin typeface="+mn-lt"/>
+                        </a:rPr>
+                        <a:t>7</a:t>
+                      </a:r>
+                      <a:endParaRPr lang="en-US" sz="1200" b="0" i="0" u="none" strike="noStrike">
+                        <a:solidFill>
+                          <a:srgbClr val="000000"/>
+                        </a:solidFill>
+                        <a:effectLst/>
+                        <a:latin typeface="+mn-lt"/>
+                      </a:endParaRPr>
+                    </a:p>
+                  </a:txBody>
+                  <a:tcPr marL="6922" marR="6922" marT="6922" marB="0" anchor="ctr"/>
+                </a:tc>
+                <a:tc>
+                  <a:txBody>
+                    <a:bodyPr/>
+                    <a:lstStyle/>
+                    <a:p>
+                      <a:pPr algn="ctr" fontAlgn="b"/>
+                      <a:r>
+                        <a:rPr lang="en-US" sz="1200" u="none" strike="noStrike">
+                          <a:effectLst/>
+                          <a:latin typeface="+mn-lt"/>
+                        </a:rPr>
+                        <a:t>HitBTC</a:t>
+                      </a:r>
+                      <a:endParaRPr lang="en-US" sz="1200" b="0" i="0" u="none" strike="noStrike">
+                        <a:solidFill>
+                          <a:srgbClr val="000000"/>
+                        </a:solidFill>
+                        <a:effectLst/>
+                        <a:latin typeface="+mn-lt"/>
+                      </a:endParaRPr>
+                    </a:p>
+                  </a:txBody>
+                  <a:tcPr marL="6922" marR="6922" marT="6922" marB="0" anchor="ctr"/>
+                </a:tc>
+                <a:tc>
+                  <a:txBody>
+                    <a:bodyPr/>
+                    <a:lstStyle/>
+                    <a:p>
+                      <a:pPr algn="ctr" fontAlgn="b"/>
+                      <a:r>
+                        <a:rPr lang="en-US" sz="1200" u="none" strike="noStrike">
+                          <a:effectLst/>
+                          <a:latin typeface="+mn-lt"/>
+                        </a:rPr>
+                        <a:t>British Virgin Islands</a:t>
+                      </a:r>
+                      <a:endParaRPr lang="en-US" sz="1200" b="0" i="0" u="none" strike="noStrike">
+                        <a:solidFill>
+                          <a:srgbClr val="000000"/>
+                        </a:solidFill>
+                        <a:effectLst/>
+                        <a:latin typeface="+mn-lt"/>
+                      </a:endParaRPr>
+                    </a:p>
+                  </a:txBody>
+                  <a:tcPr marL="6922" marR="6922" marT="6922" marB="0" anchor="ctr"/>
+                </a:tc>
+                <a:tc>
+                  <a:txBody>
+                    <a:bodyPr/>
+                    <a:lstStyle/>
+                    <a:p>
+                      <a:pPr algn="ctr" fontAlgn="b"/>
+                      <a:r>
+                        <a:rPr lang="en-US" sz="1200" u="none" strike="noStrike">
+                          <a:effectLst/>
+                          <a:latin typeface="+mn-lt"/>
+                        </a:rPr>
+                        <a:t>4.08</a:t>
+                      </a:r>
+                      <a:endParaRPr lang="en-US" sz="1200" b="0" i="0" u="none" strike="noStrike">
+                        <a:solidFill>
+                          <a:srgbClr val="000000"/>
+                        </a:solidFill>
+                        <a:effectLst/>
+                        <a:latin typeface="+mn-lt"/>
+                      </a:endParaRPr>
+                    </a:p>
+                  </a:txBody>
+                  <a:tcPr marL="6922" marR="6922" marT="6922" marB="0" anchor="ctr"/>
+                </a:tc>
+                <a:extLst>
+                  <a:ext uri="{0D108BD9-81ED-4DB2-BD59-A6C34878D82A}">
+                    <a16:rowId xmlns:a16="http://schemas.microsoft.com/office/drawing/2014/main" val="3335724844"/>
+                  </a:ext>
+                </a:extLst>
+              </a:tr>
+              <a:tr h="272708">
+                <a:tc>
+                  <a:txBody>
+                    <a:bodyPr/>
+                    <a:lstStyle/>
+                    <a:p>
+                      <a:pPr algn="ctr" fontAlgn="b"/>
+                      <a:r>
+                        <a:rPr lang="en-US" sz="1200" u="none" strike="noStrike">
+                          <a:effectLst/>
+                          <a:latin typeface="+mn-lt"/>
+                        </a:rPr>
+                        <a:t>8</a:t>
+                      </a:r>
+                      <a:endParaRPr lang="en-US" sz="1200" b="0" i="0" u="none" strike="noStrike">
+                        <a:solidFill>
+                          <a:srgbClr val="000000"/>
+                        </a:solidFill>
+                        <a:effectLst/>
+                        <a:latin typeface="+mn-lt"/>
+                      </a:endParaRPr>
+                    </a:p>
+                  </a:txBody>
+                  <a:tcPr marL="6922" marR="6922" marT="6922" marB="0" anchor="ctr"/>
+                </a:tc>
+                <a:tc>
+                  <a:txBody>
+                    <a:bodyPr/>
+                    <a:lstStyle/>
+                    <a:p>
+                      <a:pPr algn="ctr" fontAlgn="b"/>
+                      <a:r>
+                        <a:rPr lang="en-US" sz="1200" b="1" u="none" strike="noStrike">
+                          <a:solidFill>
+                            <a:srgbClr val="FF0000"/>
+                          </a:solidFill>
+                          <a:effectLst/>
+                          <a:latin typeface="+mn-lt"/>
+                        </a:rPr>
+                        <a:t>Coinbase</a:t>
+                      </a:r>
+                      <a:endParaRPr lang="en-US" sz="1200" b="1" i="0" u="none" strike="noStrike">
+                        <a:solidFill>
+                          <a:srgbClr val="FF0000"/>
+                        </a:solidFill>
+                        <a:effectLst/>
+                        <a:latin typeface="+mn-lt"/>
+                      </a:endParaRPr>
+                    </a:p>
+                  </a:txBody>
+                  <a:tcPr marL="6922" marR="6922" marT="6922" marB="0" anchor="ctr"/>
+                </a:tc>
+                <a:tc>
+                  <a:txBody>
+                    <a:bodyPr/>
+                    <a:lstStyle/>
+                    <a:p>
+                      <a:pPr algn="ctr" fontAlgn="b"/>
+                      <a:r>
+                        <a:rPr lang="en-US" sz="1200" b="1" u="none" strike="noStrike">
+                          <a:solidFill>
+                            <a:srgbClr val="FF0000"/>
+                          </a:solidFill>
+                          <a:effectLst/>
+                          <a:latin typeface="+mn-lt"/>
+                        </a:rPr>
+                        <a:t>United States</a:t>
+                      </a:r>
+                      <a:endParaRPr lang="en-US" sz="1200" b="1" i="0" u="none" strike="noStrike">
+                        <a:solidFill>
+                          <a:srgbClr val="FF0000"/>
+                        </a:solidFill>
+                        <a:effectLst/>
+                        <a:latin typeface="+mn-lt"/>
+                      </a:endParaRPr>
+                    </a:p>
+                  </a:txBody>
+                  <a:tcPr marL="6922" marR="6922" marT="6922" marB="0" anchor="ctr"/>
+                </a:tc>
+                <a:tc>
+                  <a:txBody>
+                    <a:bodyPr/>
+                    <a:lstStyle/>
+                    <a:p>
+                      <a:pPr algn="ctr" fontAlgn="b"/>
+                      <a:r>
+                        <a:rPr lang="en-US" sz="1200" u="none" strike="noStrike">
+                          <a:effectLst/>
+                          <a:latin typeface="+mn-lt"/>
+                        </a:rPr>
+                        <a:t>3.87</a:t>
+                      </a:r>
+                      <a:endParaRPr lang="en-US" sz="1200" b="0" i="0" u="none" strike="noStrike">
+                        <a:solidFill>
+                          <a:srgbClr val="000000"/>
+                        </a:solidFill>
+                        <a:effectLst/>
+                        <a:latin typeface="+mn-lt"/>
+                      </a:endParaRPr>
+                    </a:p>
+                  </a:txBody>
+                  <a:tcPr marL="6922" marR="6922" marT="6922" marB="0" anchor="ctr"/>
+                </a:tc>
+                <a:extLst>
+                  <a:ext uri="{0D108BD9-81ED-4DB2-BD59-A6C34878D82A}">
+                    <a16:rowId xmlns:a16="http://schemas.microsoft.com/office/drawing/2014/main" val="1855836611"/>
+                  </a:ext>
+                </a:extLst>
+              </a:tr>
+              <a:tr h="147659">
+                <a:tc>
+                  <a:txBody>
+                    <a:bodyPr/>
+                    <a:lstStyle/>
+                    <a:p>
+                      <a:pPr algn="ctr" fontAlgn="b"/>
+                      <a:r>
+                        <a:rPr lang="en-US" sz="1200" u="none" strike="noStrike">
+                          <a:effectLst/>
+                          <a:latin typeface="+mn-lt"/>
+                        </a:rPr>
+                        <a:t>9</a:t>
+                      </a:r>
+                      <a:endParaRPr lang="en-US" sz="1200" b="0" i="0" u="none" strike="noStrike">
+                        <a:solidFill>
+                          <a:srgbClr val="000000"/>
+                        </a:solidFill>
+                        <a:effectLst/>
+                        <a:latin typeface="+mn-lt"/>
+                      </a:endParaRPr>
+                    </a:p>
+                  </a:txBody>
+                  <a:tcPr marL="6922" marR="6922" marT="6922" marB="0" anchor="ctr"/>
+                </a:tc>
+                <a:tc>
+                  <a:txBody>
+                    <a:bodyPr/>
+                    <a:lstStyle/>
+                    <a:p>
+                      <a:pPr algn="ctr" fontAlgn="b"/>
+                      <a:r>
+                        <a:rPr lang="en-US" sz="1200" u="none" strike="noStrike">
+                          <a:effectLst/>
+                          <a:latin typeface="+mn-lt"/>
+                        </a:rPr>
+                        <a:t>ZT</a:t>
+                      </a:r>
+                      <a:endParaRPr lang="en-US" sz="1200" b="0" i="0" u="none" strike="noStrike">
+                        <a:solidFill>
+                          <a:srgbClr val="000000"/>
+                        </a:solidFill>
+                        <a:effectLst/>
+                        <a:latin typeface="+mn-lt"/>
+                      </a:endParaRPr>
+                    </a:p>
+                  </a:txBody>
+                  <a:tcPr marL="6922" marR="6922" marT="6922" marB="0" anchor="ctr"/>
+                </a:tc>
+                <a:tc>
+                  <a:txBody>
+                    <a:bodyPr/>
+                    <a:lstStyle/>
+                    <a:p>
+                      <a:pPr algn="ctr" fontAlgn="b"/>
+                      <a:r>
+                        <a:rPr lang="en-US" sz="1200" u="none" strike="noStrike">
+                          <a:effectLst/>
+                          <a:latin typeface="+mn-lt"/>
+                        </a:rPr>
+                        <a:t>Seychelles</a:t>
+                      </a:r>
+                      <a:endParaRPr lang="en-US" sz="1200" b="0" i="0" u="none" strike="noStrike">
+                        <a:solidFill>
+                          <a:srgbClr val="000000"/>
+                        </a:solidFill>
+                        <a:effectLst/>
+                        <a:latin typeface="+mn-lt"/>
+                      </a:endParaRPr>
+                    </a:p>
+                  </a:txBody>
+                  <a:tcPr marL="6922" marR="6922" marT="6922" marB="0" anchor="ctr"/>
+                </a:tc>
+                <a:tc>
+                  <a:txBody>
+                    <a:bodyPr/>
+                    <a:lstStyle/>
+                    <a:p>
+                      <a:pPr algn="ctr" fontAlgn="b"/>
+                      <a:r>
+                        <a:rPr lang="en-US" sz="1200" u="none" strike="noStrike">
+                          <a:effectLst/>
+                          <a:latin typeface="+mn-lt"/>
+                        </a:rPr>
+                        <a:t>3.83</a:t>
+                      </a:r>
+                      <a:endParaRPr lang="en-US" sz="1200" b="0" i="0" u="none" strike="noStrike">
+                        <a:solidFill>
+                          <a:srgbClr val="000000"/>
+                        </a:solidFill>
+                        <a:effectLst/>
+                        <a:latin typeface="+mn-lt"/>
+                      </a:endParaRPr>
+                    </a:p>
+                  </a:txBody>
+                  <a:tcPr marL="6922" marR="6922" marT="6922" marB="0" anchor="ctr"/>
+                </a:tc>
+                <a:extLst>
+                  <a:ext uri="{0D108BD9-81ED-4DB2-BD59-A6C34878D82A}">
+                    <a16:rowId xmlns:a16="http://schemas.microsoft.com/office/drawing/2014/main" val="916170551"/>
+                  </a:ext>
+                </a:extLst>
+              </a:tr>
+              <a:tr h="147659">
+                <a:tc>
+                  <a:txBody>
+                    <a:bodyPr/>
+                    <a:lstStyle/>
+                    <a:p>
+                      <a:pPr algn="ctr" fontAlgn="b"/>
+                      <a:r>
+                        <a:rPr lang="en-US" sz="1200" u="none" strike="noStrike">
+                          <a:effectLst/>
+                          <a:latin typeface="+mn-lt"/>
+                        </a:rPr>
+                        <a:t>10</a:t>
+                      </a:r>
+                      <a:endParaRPr lang="en-US" sz="1200" b="0" i="0" u="none" strike="noStrike">
+                        <a:solidFill>
+                          <a:srgbClr val="000000"/>
+                        </a:solidFill>
+                        <a:effectLst/>
+                        <a:latin typeface="+mn-lt"/>
+                      </a:endParaRPr>
+                    </a:p>
+                  </a:txBody>
+                  <a:tcPr marL="6922" marR="6922" marT="6922" marB="0" anchor="ctr"/>
+                </a:tc>
+                <a:tc>
+                  <a:txBody>
+                    <a:bodyPr/>
+                    <a:lstStyle/>
+                    <a:p>
+                      <a:pPr algn="ctr" fontAlgn="b"/>
+                      <a:r>
+                        <a:rPr lang="en-US" sz="1200" u="none" strike="noStrike">
+                          <a:effectLst/>
+                          <a:latin typeface="+mn-lt"/>
+                        </a:rPr>
+                        <a:t>BiONE</a:t>
+                      </a:r>
+                      <a:endParaRPr lang="en-US" sz="1200" b="0" i="0" u="none" strike="noStrike">
+                        <a:solidFill>
+                          <a:srgbClr val="000000"/>
+                        </a:solidFill>
+                        <a:effectLst/>
+                        <a:latin typeface="+mn-lt"/>
+                      </a:endParaRPr>
+                    </a:p>
+                  </a:txBody>
+                  <a:tcPr marL="6922" marR="6922" marT="6922" marB="0" anchor="ctr"/>
+                </a:tc>
+                <a:tc>
+                  <a:txBody>
+                    <a:bodyPr/>
+                    <a:lstStyle/>
+                    <a:p>
+                      <a:pPr algn="ctr" fontAlgn="b"/>
+                      <a:r>
+                        <a:rPr lang="en-US" sz="1200" u="none" strike="noStrike">
+                          <a:effectLst/>
+                          <a:latin typeface="+mn-lt"/>
+                        </a:rPr>
+                        <a:t>Singapore</a:t>
+                      </a:r>
+                      <a:endParaRPr lang="en-US" sz="1200" b="0" i="0" u="none" strike="noStrike">
+                        <a:solidFill>
+                          <a:srgbClr val="000000"/>
+                        </a:solidFill>
+                        <a:effectLst/>
+                        <a:latin typeface="+mn-lt"/>
+                      </a:endParaRPr>
+                    </a:p>
+                  </a:txBody>
+                  <a:tcPr marL="6922" marR="6922" marT="6922" marB="0" anchor="ctr"/>
+                </a:tc>
+                <a:tc>
+                  <a:txBody>
+                    <a:bodyPr/>
+                    <a:lstStyle/>
+                    <a:p>
+                      <a:pPr algn="ctr" fontAlgn="b"/>
+                      <a:r>
+                        <a:rPr lang="en-US" sz="1200" u="none" strike="noStrike">
+                          <a:effectLst/>
+                          <a:latin typeface="+mn-lt"/>
+                        </a:rPr>
+                        <a:t>3.7</a:t>
+                      </a:r>
+                      <a:endParaRPr lang="en-US" sz="1200" b="0" i="0" u="none" strike="noStrike">
+                        <a:solidFill>
+                          <a:srgbClr val="000000"/>
+                        </a:solidFill>
+                        <a:effectLst/>
+                        <a:latin typeface="+mn-lt"/>
+                      </a:endParaRPr>
+                    </a:p>
+                  </a:txBody>
+                  <a:tcPr marL="6922" marR="6922" marT="6922" marB="0" anchor="ctr"/>
+                </a:tc>
+                <a:extLst>
+                  <a:ext uri="{0D108BD9-81ED-4DB2-BD59-A6C34878D82A}">
+                    <a16:rowId xmlns:a16="http://schemas.microsoft.com/office/drawing/2014/main" val="1384141576"/>
+                  </a:ext>
+                </a:extLst>
+              </a:tr>
+              <a:tr h="272708">
+                <a:tc>
+                  <a:txBody>
+                    <a:bodyPr/>
+                    <a:lstStyle/>
+                    <a:p>
+                      <a:pPr algn="ctr" fontAlgn="b"/>
+                      <a:r>
+                        <a:rPr lang="en-US" sz="1200" u="none" strike="noStrike">
+                          <a:effectLst/>
+                          <a:latin typeface="+mn-lt"/>
+                        </a:rPr>
+                        <a:t>11</a:t>
+                      </a:r>
+                      <a:endParaRPr lang="en-US" sz="1200" b="0" i="0" u="none" strike="noStrike">
+                        <a:solidFill>
+                          <a:srgbClr val="000000"/>
+                        </a:solidFill>
+                        <a:effectLst/>
+                        <a:latin typeface="+mn-lt"/>
+                      </a:endParaRPr>
+                    </a:p>
+                  </a:txBody>
+                  <a:tcPr marL="6922" marR="6922" marT="6922" marB="0" anchor="ctr"/>
+                </a:tc>
+                <a:tc>
+                  <a:txBody>
+                    <a:bodyPr/>
+                    <a:lstStyle/>
+                    <a:p>
+                      <a:pPr algn="ctr" fontAlgn="b"/>
+                      <a:r>
+                        <a:rPr lang="en-US" sz="1200" u="none" strike="noStrike">
+                          <a:effectLst/>
+                          <a:latin typeface="+mn-lt"/>
+                        </a:rPr>
+                        <a:t>Challengy PRO</a:t>
+                      </a:r>
+                      <a:endParaRPr lang="en-US" sz="1200" b="0" i="0" u="none" strike="noStrike">
+                        <a:solidFill>
+                          <a:srgbClr val="000000"/>
+                        </a:solidFill>
+                        <a:effectLst/>
+                        <a:latin typeface="+mn-lt"/>
+                      </a:endParaRPr>
+                    </a:p>
+                  </a:txBody>
+                  <a:tcPr marL="6922" marR="6922" marT="6922" marB="0" anchor="ctr"/>
+                </a:tc>
+                <a:tc>
+                  <a:txBody>
+                    <a:bodyPr/>
+                    <a:lstStyle/>
+                    <a:p>
+                      <a:pPr algn="ctr" fontAlgn="b"/>
+                      <a:r>
+                        <a:rPr lang="en-US" sz="1200" u="none" strike="noStrike">
+                          <a:effectLst/>
+                          <a:latin typeface="+mn-lt"/>
+                        </a:rPr>
+                        <a:t>Hong Kong</a:t>
+                      </a:r>
+                      <a:endParaRPr lang="en-US" sz="1200" b="0" i="0" u="none" strike="noStrike">
+                        <a:solidFill>
+                          <a:srgbClr val="000000"/>
+                        </a:solidFill>
+                        <a:effectLst/>
+                        <a:latin typeface="+mn-lt"/>
+                      </a:endParaRPr>
+                    </a:p>
+                  </a:txBody>
+                  <a:tcPr marL="6922" marR="6922" marT="6922" marB="0" anchor="ctr"/>
+                </a:tc>
+                <a:tc>
+                  <a:txBody>
+                    <a:bodyPr/>
+                    <a:lstStyle/>
+                    <a:p>
+                      <a:pPr algn="ctr" fontAlgn="b"/>
+                      <a:r>
+                        <a:rPr lang="en-US" sz="1200" u="none" strike="noStrike">
+                          <a:effectLst/>
+                          <a:latin typeface="+mn-lt"/>
+                        </a:rPr>
+                        <a:t>3.68</a:t>
+                      </a:r>
+                      <a:endParaRPr lang="en-US" sz="1200" b="0" i="0" u="none" strike="noStrike">
+                        <a:solidFill>
+                          <a:srgbClr val="000000"/>
+                        </a:solidFill>
+                        <a:effectLst/>
+                        <a:latin typeface="+mn-lt"/>
+                      </a:endParaRPr>
+                    </a:p>
+                  </a:txBody>
+                  <a:tcPr marL="6922" marR="6922" marT="6922" marB="0" anchor="ctr"/>
+                </a:tc>
+                <a:extLst>
+                  <a:ext uri="{0D108BD9-81ED-4DB2-BD59-A6C34878D82A}">
+                    <a16:rowId xmlns:a16="http://schemas.microsoft.com/office/drawing/2014/main" val="1651756130"/>
+                  </a:ext>
+                </a:extLst>
+              </a:tr>
+              <a:tr h="272708">
+                <a:tc>
+                  <a:txBody>
+                    <a:bodyPr/>
+                    <a:lstStyle/>
+                    <a:p>
+                      <a:pPr algn="ctr" fontAlgn="b"/>
+                      <a:r>
+                        <a:rPr lang="en-US" sz="1200" u="none" strike="noStrike">
+                          <a:effectLst/>
+                          <a:latin typeface="+mn-lt"/>
+                        </a:rPr>
+                        <a:t>12</a:t>
+                      </a:r>
+                      <a:endParaRPr lang="en-US" sz="1200" b="0" i="0" u="none" strike="noStrike">
+                        <a:solidFill>
+                          <a:srgbClr val="000000"/>
+                        </a:solidFill>
+                        <a:effectLst/>
+                        <a:latin typeface="+mn-lt"/>
+                      </a:endParaRPr>
+                    </a:p>
+                  </a:txBody>
+                  <a:tcPr marL="6922" marR="6922" marT="6922" marB="0" anchor="ctr"/>
+                </a:tc>
+                <a:tc>
+                  <a:txBody>
+                    <a:bodyPr/>
+                    <a:lstStyle/>
+                    <a:p>
+                      <a:pPr algn="ctr" fontAlgn="b"/>
+                      <a:r>
+                        <a:rPr lang="en-US" sz="1200" u="none" strike="noStrike">
+                          <a:effectLst/>
+                          <a:latin typeface="+mn-lt"/>
+                        </a:rPr>
+                        <a:t>Crypto.com Exchange</a:t>
+                      </a:r>
+                      <a:endParaRPr lang="en-US" sz="1200" b="0" i="0" u="none" strike="noStrike">
+                        <a:solidFill>
+                          <a:srgbClr val="000000"/>
+                        </a:solidFill>
+                        <a:effectLst/>
+                        <a:latin typeface="+mn-lt"/>
+                      </a:endParaRPr>
+                    </a:p>
+                  </a:txBody>
+                  <a:tcPr marL="6922" marR="6922" marT="6922" marB="0" anchor="ctr"/>
+                </a:tc>
+                <a:tc>
+                  <a:txBody>
+                    <a:bodyPr/>
+                    <a:lstStyle/>
+                    <a:p>
+                      <a:pPr algn="ctr" fontAlgn="b"/>
+                      <a:r>
+                        <a:rPr lang="en-US" sz="1200" u="none" strike="noStrike">
+                          <a:effectLst/>
+                          <a:latin typeface="+mn-lt"/>
+                        </a:rPr>
+                        <a:t>Singapore</a:t>
+                      </a:r>
+                      <a:endParaRPr lang="en-US" sz="1200" b="0" i="0" u="none" strike="noStrike">
+                        <a:solidFill>
+                          <a:srgbClr val="000000"/>
+                        </a:solidFill>
+                        <a:effectLst/>
+                        <a:latin typeface="+mn-lt"/>
+                      </a:endParaRPr>
+                    </a:p>
+                  </a:txBody>
+                  <a:tcPr marL="6922" marR="6922" marT="6922" marB="0" anchor="ctr"/>
+                </a:tc>
+                <a:tc>
+                  <a:txBody>
+                    <a:bodyPr/>
+                    <a:lstStyle/>
+                    <a:p>
+                      <a:pPr algn="ctr" fontAlgn="b"/>
+                      <a:r>
+                        <a:rPr lang="en-US" sz="1200" u="none" strike="noStrike">
+                          <a:effectLst/>
+                          <a:latin typeface="+mn-lt"/>
+                        </a:rPr>
+                        <a:t>3.1</a:t>
+                      </a:r>
+                      <a:endParaRPr lang="en-US" sz="1200" b="0" i="0" u="none" strike="noStrike">
+                        <a:solidFill>
+                          <a:srgbClr val="000000"/>
+                        </a:solidFill>
+                        <a:effectLst/>
+                        <a:latin typeface="+mn-lt"/>
+                      </a:endParaRPr>
+                    </a:p>
+                  </a:txBody>
+                  <a:tcPr marL="6922" marR="6922" marT="6922" marB="0" anchor="ctr"/>
+                </a:tc>
+                <a:extLst>
+                  <a:ext uri="{0D108BD9-81ED-4DB2-BD59-A6C34878D82A}">
+                    <a16:rowId xmlns:a16="http://schemas.microsoft.com/office/drawing/2014/main" val="4101405884"/>
+                  </a:ext>
+                </a:extLst>
+              </a:tr>
+              <a:tr h="147659">
+                <a:tc>
+                  <a:txBody>
+                    <a:bodyPr/>
+                    <a:lstStyle/>
+                    <a:p>
+                      <a:pPr algn="ctr" fontAlgn="b"/>
+                      <a:r>
+                        <a:rPr lang="en-US" sz="1200" u="none" strike="noStrike">
+                          <a:effectLst/>
+                          <a:latin typeface="+mn-lt"/>
+                        </a:rPr>
+                        <a:t>13</a:t>
+                      </a:r>
+                      <a:endParaRPr lang="en-US" sz="1200" b="0" i="0" u="none" strike="noStrike">
+                        <a:solidFill>
+                          <a:srgbClr val="000000"/>
+                        </a:solidFill>
+                        <a:effectLst/>
+                        <a:latin typeface="+mn-lt"/>
+                      </a:endParaRPr>
+                    </a:p>
+                  </a:txBody>
+                  <a:tcPr marL="6922" marR="6922" marT="6922" marB="0" anchor="ctr"/>
+                </a:tc>
+                <a:tc>
+                  <a:txBody>
+                    <a:bodyPr/>
+                    <a:lstStyle/>
+                    <a:p>
+                      <a:pPr algn="ctr" fontAlgn="b"/>
+                      <a:r>
+                        <a:rPr lang="en-US" sz="1200" u="none" strike="noStrike">
+                          <a:effectLst/>
+                          <a:latin typeface="+mn-lt"/>
+                        </a:rPr>
+                        <a:t>Ecxx</a:t>
+                      </a:r>
+                      <a:endParaRPr lang="en-US" sz="1200" b="0" i="0" u="none" strike="noStrike">
+                        <a:solidFill>
+                          <a:srgbClr val="000000"/>
+                        </a:solidFill>
+                        <a:effectLst/>
+                        <a:latin typeface="+mn-lt"/>
+                      </a:endParaRPr>
+                    </a:p>
+                  </a:txBody>
+                  <a:tcPr marL="6922" marR="6922" marT="6922" marB="0" anchor="ctr"/>
+                </a:tc>
+                <a:tc>
+                  <a:txBody>
+                    <a:bodyPr/>
+                    <a:lstStyle/>
+                    <a:p>
+                      <a:pPr algn="ctr" fontAlgn="b"/>
+                      <a:r>
+                        <a:rPr lang="en-US" sz="1200" u="none" strike="noStrike">
+                          <a:effectLst/>
+                          <a:latin typeface="+mn-lt"/>
+                        </a:rPr>
+                        <a:t>Singapore</a:t>
+                      </a:r>
+                      <a:endParaRPr lang="en-US" sz="1200" b="0" i="0" u="none" strike="noStrike">
+                        <a:solidFill>
+                          <a:srgbClr val="000000"/>
+                        </a:solidFill>
+                        <a:effectLst/>
+                        <a:latin typeface="+mn-lt"/>
+                      </a:endParaRPr>
+                    </a:p>
+                  </a:txBody>
+                  <a:tcPr marL="6922" marR="6922" marT="6922" marB="0" anchor="ctr"/>
+                </a:tc>
+                <a:tc>
+                  <a:txBody>
+                    <a:bodyPr/>
+                    <a:lstStyle/>
+                    <a:p>
+                      <a:pPr algn="ctr" fontAlgn="b"/>
+                      <a:r>
+                        <a:rPr lang="en-US" sz="1200" u="none" strike="noStrike">
+                          <a:effectLst/>
+                          <a:latin typeface="+mn-lt"/>
+                        </a:rPr>
+                        <a:t>2.76</a:t>
+                      </a:r>
+                      <a:endParaRPr lang="en-US" sz="1200" b="0" i="0" u="none" strike="noStrike">
+                        <a:solidFill>
+                          <a:srgbClr val="000000"/>
+                        </a:solidFill>
+                        <a:effectLst/>
+                        <a:latin typeface="+mn-lt"/>
+                      </a:endParaRPr>
+                    </a:p>
+                  </a:txBody>
+                  <a:tcPr marL="6922" marR="6922" marT="6922" marB="0" anchor="ctr"/>
+                </a:tc>
+                <a:extLst>
+                  <a:ext uri="{0D108BD9-81ED-4DB2-BD59-A6C34878D82A}">
+                    <a16:rowId xmlns:a16="http://schemas.microsoft.com/office/drawing/2014/main" val="2692037767"/>
+                  </a:ext>
+                </a:extLst>
+              </a:tr>
+              <a:tr h="272708">
+                <a:tc>
+                  <a:txBody>
+                    <a:bodyPr/>
+                    <a:lstStyle/>
+                    <a:p>
+                      <a:pPr algn="ctr" fontAlgn="b"/>
+                      <a:r>
+                        <a:rPr lang="en-US" sz="1200" u="none" strike="noStrike">
+                          <a:effectLst/>
+                          <a:latin typeface="+mn-lt"/>
+                        </a:rPr>
+                        <a:t>14</a:t>
+                      </a:r>
+                      <a:endParaRPr lang="en-US" sz="1200" b="0" i="0" u="none" strike="noStrike">
+                        <a:solidFill>
+                          <a:srgbClr val="000000"/>
+                        </a:solidFill>
+                        <a:effectLst/>
+                        <a:latin typeface="+mn-lt"/>
+                      </a:endParaRPr>
+                    </a:p>
+                  </a:txBody>
+                  <a:tcPr marL="6922" marR="6922" marT="6922" marB="0" anchor="ctr"/>
+                </a:tc>
+                <a:tc>
+                  <a:txBody>
+                    <a:bodyPr/>
+                    <a:lstStyle/>
+                    <a:p>
+                      <a:pPr algn="ctr" fontAlgn="b"/>
+                      <a:r>
+                        <a:rPr lang="en-US" sz="1200" u="none" strike="noStrike">
+                          <a:effectLst/>
+                          <a:latin typeface="+mn-lt"/>
+                        </a:rPr>
+                        <a:t>IndoEx</a:t>
+                      </a:r>
+                      <a:endParaRPr lang="en-US" sz="1200" b="0" i="0" u="none" strike="noStrike">
+                        <a:solidFill>
+                          <a:srgbClr val="000000"/>
+                        </a:solidFill>
+                        <a:effectLst/>
+                        <a:latin typeface="+mn-lt"/>
+                      </a:endParaRPr>
+                    </a:p>
+                  </a:txBody>
+                  <a:tcPr marL="6922" marR="6922" marT="6922" marB="0" anchor="ctr"/>
+                </a:tc>
+                <a:tc>
+                  <a:txBody>
+                    <a:bodyPr/>
+                    <a:lstStyle/>
+                    <a:p>
+                      <a:pPr algn="ctr" fontAlgn="b"/>
+                      <a:r>
+                        <a:rPr lang="en-US" sz="1200" u="none" strike="noStrike">
+                          <a:effectLst/>
+                          <a:latin typeface="+mn-lt"/>
+                        </a:rPr>
+                        <a:t>United Kingdom</a:t>
+                      </a:r>
+                      <a:endParaRPr lang="en-US" sz="1200" b="0" i="0" u="none" strike="noStrike">
+                        <a:solidFill>
+                          <a:srgbClr val="000000"/>
+                        </a:solidFill>
+                        <a:effectLst/>
+                        <a:latin typeface="+mn-lt"/>
+                      </a:endParaRPr>
+                    </a:p>
+                  </a:txBody>
+                  <a:tcPr marL="6922" marR="6922" marT="6922" marB="0" anchor="ctr"/>
+                </a:tc>
+                <a:tc>
+                  <a:txBody>
+                    <a:bodyPr/>
+                    <a:lstStyle/>
+                    <a:p>
+                      <a:pPr algn="ctr" fontAlgn="b"/>
+                      <a:r>
+                        <a:rPr lang="en-US" sz="1200" u="none" strike="noStrike">
+                          <a:effectLst/>
+                          <a:latin typeface="+mn-lt"/>
+                        </a:rPr>
+                        <a:t>2.62</a:t>
+                      </a:r>
+                      <a:endParaRPr lang="en-US" sz="1200" b="0" i="0" u="none" strike="noStrike">
+                        <a:solidFill>
+                          <a:srgbClr val="000000"/>
+                        </a:solidFill>
+                        <a:effectLst/>
+                        <a:latin typeface="+mn-lt"/>
+                      </a:endParaRPr>
+                    </a:p>
+                  </a:txBody>
+                  <a:tcPr marL="6922" marR="6922" marT="6922" marB="0" anchor="ctr"/>
+                </a:tc>
+                <a:extLst>
+                  <a:ext uri="{0D108BD9-81ED-4DB2-BD59-A6C34878D82A}">
+                    <a16:rowId xmlns:a16="http://schemas.microsoft.com/office/drawing/2014/main" val="4190264315"/>
+                  </a:ext>
+                </a:extLst>
+              </a:tr>
+              <a:tr h="272708">
+                <a:tc>
+                  <a:txBody>
+                    <a:bodyPr/>
+                    <a:lstStyle/>
+                    <a:p>
+                      <a:pPr algn="ctr" fontAlgn="b"/>
+                      <a:r>
+                        <a:rPr lang="en-US" sz="1200" u="none" strike="noStrike">
+                          <a:effectLst/>
+                          <a:latin typeface="+mn-lt"/>
+                        </a:rPr>
+                        <a:t>15</a:t>
+                      </a:r>
+                      <a:endParaRPr lang="en-US" sz="1200" b="0" i="0" u="none" strike="noStrike">
+                        <a:solidFill>
+                          <a:srgbClr val="000000"/>
+                        </a:solidFill>
+                        <a:effectLst/>
+                        <a:latin typeface="+mn-lt"/>
+                      </a:endParaRPr>
+                    </a:p>
+                  </a:txBody>
+                  <a:tcPr marL="6922" marR="6922" marT="6922" marB="0" anchor="ctr"/>
+                </a:tc>
+                <a:tc>
+                  <a:txBody>
+                    <a:bodyPr/>
+                    <a:lstStyle/>
+                    <a:p>
+                      <a:pPr algn="ctr" fontAlgn="b"/>
+                      <a:r>
+                        <a:rPr lang="en-US" sz="1200" u="none" strike="noStrike">
+                          <a:effectLst/>
+                          <a:latin typeface="+mn-lt"/>
+                        </a:rPr>
+                        <a:t>Hotcoin Global</a:t>
+                      </a:r>
+                      <a:endParaRPr lang="en-US" sz="1200" b="0" i="0" u="none" strike="noStrike">
+                        <a:solidFill>
+                          <a:srgbClr val="000000"/>
+                        </a:solidFill>
+                        <a:effectLst/>
+                        <a:latin typeface="+mn-lt"/>
+                      </a:endParaRPr>
+                    </a:p>
+                  </a:txBody>
+                  <a:tcPr marL="6922" marR="6922" marT="6922" marB="0" anchor="ctr"/>
+                </a:tc>
+                <a:tc>
+                  <a:txBody>
+                    <a:bodyPr/>
+                    <a:lstStyle/>
+                    <a:p>
+                      <a:pPr algn="ctr" fontAlgn="b"/>
+                      <a:r>
+                        <a:rPr lang="en-US" sz="1200" u="none" strike="noStrike">
+                          <a:effectLst/>
+                          <a:latin typeface="+mn-lt"/>
+                        </a:rPr>
+                        <a:t>Australia</a:t>
+                      </a:r>
+                      <a:endParaRPr lang="en-US" sz="1200" b="0" i="0" u="none" strike="noStrike">
+                        <a:solidFill>
+                          <a:srgbClr val="000000"/>
+                        </a:solidFill>
+                        <a:effectLst/>
+                        <a:latin typeface="+mn-lt"/>
+                      </a:endParaRPr>
+                    </a:p>
+                  </a:txBody>
+                  <a:tcPr marL="6922" marR="6922" marT="6922" marB="0" anchor="ctr"/>
+                </a:tc>
+                <a:tc>
+                  <a:txBody>
+                    <a:bodyPr/>
+                    <a:lstStyle/>
+                    <a:p>
+                      <a:pPr algn="ctr" fontAlgn="b"/>
+                      <a:r>
+                        <a:rPr lang="en-US" sz="1200" u="none" strike="noStrike">
+                          <a:effectLst/>
+                          <a:latin typeface="+mn-lt"/>
+                        </a:rPr>
+                        <a:t>2.47</a:t>
+                      </a:r>
+                      <a:endParaRPr lang="en-US" sz="1200" b="0" i="0" u="none" strike="noStrike">
+                        <a:solidFill>
+                          <a:srgbClr val="000000"/>
+                        </a:solidFill>
+                        <a:effectLst/>
+                        <a:latin typeface="+mn-lt"/>
+                      </a:endParaRPr>
+                    </a:p>
+                  </a:txBody>
+                  <a:tcPr marL="6922" marR="6922" marT="6922" marB="0" anchor="ctr"/>
+                </a:tc>
+                <a:extLst>
+                  <a:ext uri="{0D108BD9-81ED-4DB2-BD59-A6C34878D82A}">
+                    <a16:rowId xmlns:a16="http://schemas.microsoft.com/office/drawing/2014/main" val="4054123688"/>
+                  </a:ext>
+                </a:extLst>
+              </a:tr>
+              <a:tr h="147659">
+                <a:tc>
+                  <a:txBody>
+                    <a:bodyPr/>
+                    <a:lstStyle/>
+                    <a:p>
+                      <a:pPr algn="ctr" fontAlgn="b"/>
+                      <a:r>
+                        <a:rPr lang="en-US" sz="1200" u="none" strike="noStrike">
+                          <a:effectLst/>
+                          <a:latin typeface="+mn-lt"/>
+                        </a:rPr>
+                        <a:t>16</a:t>
+                      </a:r>
+                      <a:endParaRPr lang="en-US" sz="1200" b="0" i="0" u="none" strike="noStrike">
+                        <a:solidFill>
+                          <a:srgbClr val="000000"/>
+                        </a:solidFill>
+                        <a:effectLst/>
+                        <a:latin typeface="+mn-lt"/>
+                      </a:endParaRPr>
+                    </a:p>
+                  </a:txBody>
+                  <a:tcPr marL="6922" marR="6922" marT="6922" marB="0" anchor="ctr"/>
+                </a:tc>
+                <a:tc>
+                  <a:txBody>
+                    <a:bodyPr/>
+                    <a:lstStyle/>
+                    <a:p>
+                      <a:pPr algn="ctr" fontAlgn="b"/>
+                      <a:r>
+                        <a:rPr lang="en-US" sz="1200" u="none" strike="noStrike">
+                          <a:effectLst/>
+                          <a:latin typeface="+mn-lt"/>
+                        </a:rPr>
+                        <a:t>TOKENCAN</a:t>
+                      </a:r>
+                      <a:endParaRPr lang="en-US" sz="1200" b="0" i="0" u="none" strike="noStrike">
+                        <a:solidFill>
+                          <a:srgbClr val="000000"/>
+                        </a:solidFill>
+                        <a:effectLst/>
+                        <a:latin typeface="+mn-lt"/>
+                      </a:endParaRPr>
+                    </a:p>
+                  </a:txBody>
+                  <a:tcPr marL="6922" marR="6922" marT="6922" marB="0" anchor="ctr"/>
+                </a:tc>
+                <a:tc>
+                  <a:txBody>
+                    <a:bodyPr/>
+                    <a:lstStyle/>
+                    <a:p>
+                      <a:pPr algn="ctr" fontAlgn="b"/>
+                      <a:r>
+                        <a:rPr lang="en-US" sz="1200" u="none" strike="noStrike">
+                          <a:effectLst/>
+                          <a:latin typeface="+mn-lt"/>
+                        </a:rPr>
+                        <a:t>Hong Kong</a:t>
+                      </a:r>
+                      <a:endParaRPr lang="en-US" sz="1200" b="0" i="0" u="none" strike="noStrike">
+                        <a:solidFill>
+                          <a:srgbClr val="000000"/>
+                        </a:solidFill>
+                        <a:effectLst/>
+                        <a:latin typeface="+mn-lt"/>
+                      </a:endParaRPr>
+                    </a:p>
+                  </a:txBody>
+                  <a:tcPr marL="6922" marR="6922" marT="6922" marB="0" anchor="ctr"/>
+                </a:tc>
+                <a:tc>
+                  <a:txBody>
+                    <a:bodyPr/>
+                    <a:lstStyle/>
+                    <a:p>
+                      <a:pPr algn="ctr" fontAlgn="b"/>
+                      <a:r>
+                        <a:rPr lang="en-US" sz="1200" u="none" strike="noStrike">
+                          <a:effectLst/>
+                          <a:latin typeface="+mn-lt"/>
+                        </a:rPr>
+                        <a:t>2.38</a:t>
+                      </a:r>
+                      <a:endParaRPr lang="en-US" sz="1200" b="0" i="0" u="none" strike="noStrike">
+                        <a:solidFill>
+                          <a:srgbClr val="000000"/>
+                        </a:solidFill>
+                        <a:effectLst/>
+                        <a:latin typeface="+mn-lt"/>
+                      </a:endParaRPr>
+                    </a:p>
+                  </a:txBody>
+                  <a:tcPr marL="6922" marR="6922" marT="6922" marB="0" anchor="ctr"/>
+                </a:tc>
+                <a:extLst>
+                  <a:ext uri="{0D108BD9-81ED-4DB2-BD59-A6C34878D82A}">
+                    <a16:rowId xmlns:a16="http://schemas.microsoft.com/office/drawing/2014/main" val="2293947711"/>
+                  </a:ext>
+                </a:extLst>
+              </a:tr>
+              <a:tr h="272708">
+                <a:tc>
+                  <a:txBody>
+                    <a:bodyPr/>
+                    <a:lstStyle/>
+                    <a:p>
+                      <a:pPr algn="ctr" fontAlgn="b"/>
+                      <a:r>
+                        <a:rPr lang="en-US" sz="1200" u="none" strike="noStrike">
+                          <a:effectLst/>
+                          <a:latin typeface="+mn-lt"/>
+                        </a:rPr>
+                        <a:t>17</a:t>
+                      </a:r>
+                      <a:endParaRPr lang="en-US" sz="1200" b="0" i="0" u="none" strike="noStrike">
+                        <a:solidFill>
+                          <a:srgbClr val="000000"/>
+                        </a:solidFill>
+                        <a:effectLst/>
+                        <a:latin typeface="+mn-lt"/>
+                      </a:endParaRPr>
+                    </a:p>
+                  </a:txBody>
+                  <a:tcPr marL="6922" marR="6922" marT="6922" marB="0" anchor="ctr"/>
+                </a:tc>
+                <a:tc>
+                  <a:txBody>
+                    <a:bodyPr/>
+                    <a:lstStyle/>
+                    <a:p>
+                      <a:pPr algn="ctr" fontAlgn="b"/>
+                      <a:r>
+                        <a:rPr lang="en-US" sz="1200" u="none" strike="noStrike">
+                          <a:effectLst/>
+                          <a:latin typeface="+mn-lt"/>
+                        </a:rPr>
+                        <a:t>FTX</a:t>
+                      </a:r>
+                      <a:endParaRPr lang="en-US" sz="1200" b="0" i="0" u="none" strike="noStrike">
+                        <a:solidFill>
+                          <a:srgbClr val="000000"/>
+                        </a:solidFill>
+                        <a:effectLst/>
+                        <a:latin typeface="+mn-lt"/>
+                      </a:endParaRPr>
+                    </a:p>
+                  </a:txBody>
+                  <a:tcPr marL="6922" marR="6922" marT="6922" marB="0" anchor="ctr"/>
+                </a:tc>
+                <a:tc>
+                  <a:txBody>
+                    <a:bodyPr/>
+                    <a:lstStyle/>
+                    <a:p>
+                      <a:pPr algn="ctr" fontAlgn="b"/>
+                      <a:r>
+                        <a:rPr lang="en-US" sz="1200" u="none" strike="noStrike">
+                          <a:effectLst/>
+                          <a:latin typeface="+mn-lt"/>
+                        </a:rPr>
+                        <a:t>Antigua and Barbuda</a:t>
+                      </a:r>
+                      <a:endParaRPr lang="en-US" sz="1200" b="0" i="0" u="none" strike="noStrike">
+                        <a:solidFill>
+                          <a:srgbClr val="000000"/>
+                        </a:solidFill>
+                        <a:effectLst/>
+                        <a:latin typeface="+mn-lt"/>
+                      </a:endParaRPr>
+                    </a:p>
+                  </a:txBody>
+                  <a:tcPr marL="6922" marR="6922" marT="6922" marB="0" anchor="ctr"/>
+                </a:tc>
+                <a:tc>
+                  <a:txBody>
+                    <a:bodyPr/>
+                    <a:lstStyle/>
+                    <a:p>
+                      <a:pPr algn="ctr" fontAlgn="b"/>
+                      <a:r>
+                        <a:rPr lang="en-US" sz="1200" u="none" strike="noStrike">
+                          <a:effectLst/>
+                          <a:latin typeface="+mn-lt"/>
+                        </a:rPr>
+                        <a:t>2.21</a:t>
+                      </a:r>
+                      <a:endParaRPr lang="en-US" sz="1200" b="0" i="0" u="none" strike="noStrike">
+                        <a:solidFill>
+                          <a:srgbClr val="000000"/>
+                        </a:solidFill>
+                        <a:effectLst/>
+                        <a:latin typeface="+mn-lt"/>
+                      </a:endParaRPr>
+                    </a:p>
+                  </a:txBody>
+                  <a:tcPr marL="6922" marR="6922" marT="6922" marB="0" anchor="ctr"/>
+                </a:tc>
+                <a:extLst>
+                  <a:ext uri="{0D108BD9-81ED-4DB2-BD59-A6C34878D82A}">
+                    <a16:rowId xmlns:a16="http://schemas.microsoft.com/office/drawing/2014/main" val="1964165156"/>
+                  </a:ext>
+                </a:extLst>
+              </a:tr>
+              <a:tr h="147659">
+                <a:tc>
+                  <a:txBody>
+                    <a:bodyPr/>
+                    <a:lstStyle/>
+                    <a:p>
+                      <a:pPr algn="ctr" fontAlgn="b"/>
+                      <a:r>
+                        <a:rPr lang="en-US" sz="1200" u="none" strike="noStrike">
+                          <a:effectLst/>
+                          <a:latin typeface="+mn-lt"/>
+                        </a:rPr>
+                        <a:t>18</a:t>
+                      </a:r>
+                      <a:endParaRPr lang="en-US" sz="1200" b="0" i="0" u="none" strike="noStrike">
+                        <a:solidFill>
+                          <a:srgbClr val="000000"/>
+                        </a:solidFill>
+                        <a:effectLst/>
+                        <a:latin typeface="+mn-lt"/>
+                      </a:endParaRPr>
+                    </a:p>
+                  </a:txBody>
+                  <a:tcPr marL="6922" marR="6922" marT="6922" marB="0" anchor="ctr"/>
+                </a:tc>
+                <a:tc>
+                  <a:txBody>
+                    <a:bodyPr/>
+                    <a:lstStyle/>
+                    <a:p>
+                      <a:pPr algn="ctr" fontAlgn="b"/>
+                      <a:r>
+                        <a:rPr lang="en-US" sz="1200" u="none" strike="noStrike">
+                          <a:effectLst/>
+                          <a:latin typeface="+mn-lt"/>
+                        </a:rPr>
+                        <a:t>Bitrue</a:t>
+                      </a:r>
+                      <a:endParaRPr lang="en-US" sz="1200" b="0" i="0" u="none" strike="noStrike">
+                        <a:solidFill>
+                          <a:srgbClr val="000000"/>
+                        </a:solidFill>
+                        <a:effectLst/>
+                        <a:latin typeface="+mn-lt"/>
+                      </a:endParaRPr>
+                    </a:p>
+                  </a:txBody>
+                  <a:tcPr marL="6922" marR="6922" marT="6922" marB="0" anchor="ctr"/>
+                </a:tc>
+                <a:tc>
+                  <a:txBody>
+                    <a:bodyPr/>
+                    <a:lstStyle/>
+                    <a:p>
+                      <a:pPr algn="ctr" fontAlgn="b"/>
+                      <a:r>
+                        <a:rPr lang="en-US" sz="1200" u="none" strike="noStrike">
+                          <a:effectLst/>
+                          <a:latin typeface="+mn-lt"/>
+                        </a:rPr>
+                        <a:t>Singapore</a:t>
+                      </a:r>
+                      <a:endParaRPr lang="en-US" sz="1200" b="0" i="0" u="none" strike="noStrike">
+                        <a:solidFill>
+                          <a:srgbClr val="000000"/>
+                        </a:solidFill>
+                        <a:effectLst/>
+                        <a:latin typeface="+mn-lt"/>
+                      </a:endParaRPr>
+                    </a:p>
+                  </a:txBody>
+                  <a:tcPr marL="6922" marR="6922" marT="6922" marB="0" anchor="ctr"/>
+                </a:tc>
+                <a:tc>
+                  <a:txBody>
+                    <a:bodyPr/>
+                    <a:lstStyle/>
+                    <a:p>
+                      <a:pPr algn="ctr" fontAlgn="b"/>
+                      <a:r>
+                        <a:rPr lang="en-US" sz="1200" u="none" strike="noStrike">
+                          <a:effectLst/>
+                          <a:latin typeface="+mn-lt"/>
+                        </a:rPr>
+                        <a:t>2.03</a:t>
+                      </a:r>
+                      <a:endParaRPr lang="en-US" sz="1200" b="0" i="0" u="none" strike="noStrike">
+                        <a:solidFill>
+                          <a:srgbClr val="000000"/>
+                        </a:solidFill>
+                        <a:effectLst/>
+                        <a:latin typeface="+mn-lt"/>
+                      </a:endParaRPr>
+                    </a:p>
+                  </a:txBody>
+                  <a:tcPr marL="6922" marR="6922" marT="6922" marB="0" anchor="ctr"/>
+                </a:tc>
+                <a:extLst>
+                  <a:ext uri="{0D108BD9-81ED-4DB2-BD59-A6C34878D82A}">
+                    <a16:rowId xmlns:a16="http://schemas.microsoft.com/office/drawing/2014/main" val="530991765"/>
+                  </a:ext>
+                </a:extLst>
+              </a:tr>
+              <a:tr h="147659">
+                <a:tc>
+                  <a:txBody>
+                    <a:bodyPr/>
+                    <a:lstStyle/>
+                    <a:p>
+                      <a:pPr algn="ctr" fontAlgn="b"/>
+                      <a:r>
+                        <a:rPr lang="en-US" sz="1200" u="none" strike="noStrike">
+                          <a:effectLst/>
+                          <a:latin typeface="+mn-lt"/>
+                        </a:rPr>
+                        <a:t>19</a:t>
+                      </a:r>
+                      <a:endParaRPr lang="en-US" sz="1200" b="0" i="0" u="none" strike="noStrike">
+                        <a:solidFill>
+                          <a:srgbClr val="000000"/>
+                        </a:solidFill>
+                        <a:effectLst/>
+                        <a:latin typeface="+mn-lt"/>
+                      </a:endParaRPr>
+                    </a:p>
+                  </a:txBody>
+                  <a:tcPr marL="6922" marR="6922" marT="6922" marB="0" anchor="ctr"/>
+                </a:tc>
+                <a:tc>
+                  <a:txBody>
+                    <a:bodyPr/>
+                    <a:lstStyle/>
+                    <a:p>
+                      <a:pPr algn="ctr" fontAlgn="b"/>
+                      <a:r>
+                        <a:rPr lang="en-US" sz="1200" b="1" u="none" strike="noStrike">
+                          <a:solidFill>
+                            <a:srgbClr val="FF0000"/>
+                          </a:solidFill>
+                          <a:effectLst/>
+                          <a:latin typeface="+mn-lt"/>
+                        </a:rPr>
+                        <a:t>KuCoin</a:t>
+                      </a:r>
+                      <a:endParaRPr lang="en-US" sz="1200" b="1" i="0" u="none" strike="noStrike">
+                        <a:solidFill>
+                          <a:srgbClr val="FF0000"/>
+                        </a:solidFill>
+                        <a:effectLst/>
+                        <a:latin typeface="+mn-lt"/>
+                      </a:endParaRPr>
+                    </a:p>
+                  </a:txBody>
+                  <a:tcPr marL="6922" marR="6922" marT="6922" marB="0" anchor="ctr"/>
+                </a:tc>
+                <a:tc>
+                  <a:txBody>
+                    <a:bodyPr/>
+                    <a:lstStyle/>
+                    <a:p>
+                      <a:pPr algn="ctr" fontAlgn="b"/>
+                      <a:r>
+                        <a:rPr lang="en-US" sz="1200" u="none" strike="noStrike">
+                          <a:effectLst/>
+                          <a:latin typeface="+mn-lt"/>
+                        </a:rPr>
+                        <a:t>Seychelles</a:t>
+                      </a:r>
+                      <a:endParaRPr lang="en-US" sz="1200" b="0" i="0" u="none" strike="noStrike">
+                        <a:solidFill>
+                          <a:srgbClr val="000000"/>
+                        </a:solidFill>
+                        <a:effectLst/>
+                        <a:latin typeface="+mn-lt"/>
+                      </a:endParaRPr>
+                    </a:p>
+                  </a:txBody>
+                  <a:tcPr marL="6922" marR="6922" marT="6922" marB="0" anchor="ctr"/>
+                </a:tc>
+                <a:tc>
+                  <a:txBody>
+                    <a:bodyPr/>
+                    <a:lstStyle/>
+                    <a:p>
+                      <a:pPr algn="ctr" fontAlgn="b"/>
+                      <a:r>
+                        <a:rPr lang="en-US" sz="1200" u="none" strike="noStrike">
+                          <a:effectLst/>
+                          <a:latin typeface="+mn-lt"/>
+                        </a:rPr>
+                        <a:t>1.99</a:t>
+                      </a:r>
+                      <a:endParaRPr lang="en-US" sz="1200" b="0" i="0" u="none" strike="noStrike">
+                        <a:solidFill>
+                          <a:srgbClr val="000000"/>
+                        </a:solidFill>
+                        <a:effectLst/>
+                        <a:latin typeface="+mn-lt"/>
+                      </a:endParaRPr>
+                    </a:p>
+                  </a:txBody>
+                  <a:tcPr marL="6922" marR="6922" marT="6922" marB="0" anchor="ctr"/>
+                </a:tc>
+                <a:extLst>
+                  <a:ext uri="{0D108BD9-81ED-4DB2-BD59-A6C34878D82A}">
+                    <a16:rowId xmlns:a16="http://schemas.microsoft.com/office/drawing/2014/main" val="506067624"/>
+                  </a:ext>
+                </a:extLst>
+              </a:tr>
+              <a:tr h="147659">
+                <a:tc>
+                  <a:txBody>
+                    <a:bodyPr/>
+                    <a:lstStyle/>
+                    <a:p>
+                      <a:pPr algn="ctr" fontAlgn="b"/>
+                      <a:r>
+                        <a:rPr lang="en-US" sz="1200" u="none" strike="noStrike">
+                          <a:effectLst/>
+                          <a:latin typeface="+mn-lt"/>
+                        </a:rPr>
+                        <a:t>20</a:t>
+                      </a:r>
+                      <a:endParaRPr lang="en-US" sz="1200" b="0" i="0" u="none" strike="noStrike">
+                        <a:solidFill>
+                          <a:srgbClr val="000000"/>
+                        </a:solidFill>
+                        <a:effectLst/>
+                        <a:latin typeface="+mn-lt"/>
+                      </a:endParaRPr>
+                    </a:p>
+                  </a:txBody>
+                  <a:tcPr marL="6922" marR="6922" marT="6922" marB="0" anchor="ctr"/>
+                </a:tc>
+                <a:tc>
+                  <a:txBody>
+                    <a:bodyPr/>
+                    <a:lstStyle/>
+                    <a:p>
+                      <a:pPr algn="ctr" fontAlgn="b"/>
+                      <a:r>
+                        <a:rPr lang="en-US" sz="1200" u="none" strike="noStrike">
+                          <a:effectLst/>
+                          <a:latin typeface="+mn-lt"/>
+                        </a:rPr>
+                        <a:t>CoinW</a:t>
+                      </a:r>
+                      <a:endParaRPr lang="en-US" sz="1200" b="0" i="0" u="none" strike="noStrike">
+                        <a:solidFill>
+                          <a:srgbClr val="000000"/>
+                        </a:solidFill>
+                        <a:effectLst/>
+                        <a:latin typeface="+mn-lt"/>
+                      </a:endParaRPr>
+                    </a:p>
+                  </a:txBody>
+                  <a:tcPr marL="6922" marR="6922" marT="6922" marB="0" anchor="ctr"/>
+                </a:tc>
+                <a:tc>
+                  <a:txBody>
+                    <a:bodyPr/>
+                    <a:lstStyle/>
+                    <a:p>
+                      <a:pPr algn="ctr" fontAlgn="b"/>
+                      <a:r>
+                        <a:rPr lang="en-US" sz="1200" u="none" strike="noStrike">
+                          <a:effectLst/>
+                          <a:latin typeface="+mn-lt"/>
+                        </a:rPr>
+                        <a:t>Singapore</a:t>
+                      </a:r>
+                      <a:endParaRPr lang="en-US" sz="1200" b="0" i="0" u="none" strike="noStrike">
+                        <a:solidFill>
+                          <a:srgbClr val="000000"/>
+                        </a:solidFill>
+                        <a:effectLst/>
+                        <a:latin typeface="+mn-lt"/>
+                      </a:endParaRPr>
+                    </a:p>
+                  </a:txBody>
+                  <a:tcPr marL="6922" marR="6922" marT="6922" marB="0" anchor="ctr"/>
+                </a:tc>
+                <a:tc>
+                  <a:txBody>
+                    <a:bodyPr/>
+                    <a:lstStyle/>
+                    <a:p>
+                      <a:pPr algn="ctr" fontAlgn="b"/>
+                      <a:r>
+                        <a:rPr lang="en-US" sz="1200" u="none" strike="noStrike">
+                          <a:effectLst/>
+                          <a:latin typeface="+mn-lt"/>
+                        </a:rPr>
+                        <a:t>1.88</a:t>
+                      </a:r>
+                      <a:endParaRPr lang="en-US" sz="1200" b="0" i="0" u="none" strike="noStrike">
+                        <a:solidFill>
+                          <a:srgbClr val="000000"/>
+                        </a:solidFill>
+                        <a:effectLst/>
+                        <a:latin typeface="+mn-lt"/>
+                      </a:endParaRPr>
+                    </a:p>
+                  </a:txBody>
+                  <a:tcPr marL="6922" marR="6922" marT="6922" marB="0" anchor="ctr"/>
+                </a:tc>
+                <a:extLst>
+                  <a:ext uri="{0D108BD9-81ED-4DB2-BD59-A6C34878D82A}">
+                    <a16:rowId xmlns:a16="http://schemas.microsoft.com/office/drawing/2014/main" val="3677408785"/>
+                  </a:ext>
+                </a:extLst>
+              </a:tr>
+              <a:tr h="147659">
+                <a:tc>
+                  <a:txBody>
+                    <a:bodyPr/>
+                    <a:lstStyle/>
+                    <a:p>
+                      <a:pPr algn="ctr" fontAlgn="b"/>
+                      <a:r>
+                        <a:rPr lang="en-US" sz="1200" b="0" i="0" u="none" strike="noStrike">
+                          <a:solidFill>
+                            <a:srgbClr val="000000"/>
+                          </a:solidFill>
+                          <a:effectLst/>
+                          <a:latin typeface="+mn-lt"/>
+                        </a:rPr>
+                        <a:t>...</a:t>
+                      </a:r>
+                    </a:p>
+                  </a:txBody>
+                  <a:tcPr marL="6922" marR="6922" marT="6922" marB="0" anchor="ctr"/>
+                </a:tc>
+                <a:tc>
+                  <a:txBody>
+                    <a:bodyPr/>
+                    <a:lstStyle/>
+                    <a:p>
+                      <a:pPr algn="ctr" fontAlgn="b"/>
+                      <a:r>
+                        <a:rPr lang="en-US" sz="1200" b="0" i="0" u="none" strike="noStrike">
+                          <a:solidFill>
+                            <a:srgbClr val="000000"/>
+                          </a:solidFill>
+                          <a:effectLst/>
+                          <a:latin typeface="+mn-lt"/>
+                        </a:rPr>
+                        <a:t>...</a:t>
+                      </a:r>
+                    </a:p>
+                  </a:txBody>
+                  <a:tcPr marL="6922" marR="6922" marT="6922" marB="0" anchor="ctr"/>
+                </a:tc>
+                <a:tc>
+                  <a:txBody>
+                    <a:bodyPr/>
+                    <a:lstStyle/>
+                    <a:p>
+                      <a:pPr algn="ctr" fontAlgn="b"/>
+                      <a:r>
+                        <a:rPr lang="en-US" sz="1200" b="0" i="0" u="none" strike="noStrike">
+                          <a:solidFill>
+                            <a:srgbClr val="000000"/>
+                          </a:solidFill>
+                          <a:effectLst/>
+                          <a:latin typeface="+mn-lt"/>
+                        </a:rPr>
+                        <a:t>...</a:t>
+                      </a:r>
+                    </a:p>
+                  </a:txBody>
+                  <a:tcPr marL="6922" marR="6922" marT="6922" marB="0" anchor="ctr"/>
+                </a:tc>
+                <a:tc>
+                  <a:txBody>
+                    <a:bodyPr/>
+                    <a:lstStyle/>
+                    <a:p>
+                      <a:pPr algn="ctr" fontAlgn="b"/>
+                      <a:r>
+                        <a:rPr lang="en-US" sz="1200" b="0" i="0" u="none" strike="noStrike">
+                          <a:solidFill>
+                            <a:srgbClr val="000000"/>
+                          </a:solidFill>
+                          <a:effectLst/>
+                          <a:latin typeface="+mn-lt"/>
+                        </a:rPr>
+                        <a:t>...</a:t>
+                      </a:r>
+                    </a:p>
+                  </a:txBody>
+                  <a:tcPr marL="6922" marR="6922" marT="6922" marB="0" anchor="ctr"/>
+                </a:tc>
+                <a:extLst>
+                  <a:ext uri="{0D108BD9-81ED-4DB2-BD59-A6C34878D82A}">
+                    <a16:rowId xmlns:a16="http://schemas.microsoft.com/office/drawing/2014/main" val="457071156"/>
+                  </a:ext>
+                </a:extLst>
+              </a:tr>
+              <a:tr h="147659">
+                <a:tc>
+                  <a:txBody>
+                    <a:bodyPr/>
+                    <a:lstStyle/>
+                    <a:p>
+                      <a:pPr algn="ctr" fontAlgn="b"/>
+                      <a:r>
+                        <a:rPr lang="en-US" sz="1200" b="0" i="0" u="none" strike="noStrike">
+                          <a:solidFill>
+                            <a:srgbClr val="000000"/>
+                          </a:solidFill>
+                          <a:effectLst/>
+                          <a:latin typeface="+mn-lt"/>
+                        </a:rPr>
+                        <a:t>...</a:t>
+                      </a:r>
+                    </a:p>
+                  </a:txBody>
+                  <a:tcPr marL="6922" marR="6922" marT="6922" marB="0" anchor="ctr"/>
+                </a:tc>
+                <a:tc>
+                  <a:txBody>
+                    <a:bodyPr/>
+                    <a:lstStyle/>
+                    <a:p>
+                      <a:pPr algn="ctr" fontAlgn="b"/>
+                      <a:r>
+                        <a:rPr lang="en-US" sz="1200" b="1" u="none" strike="noStrike">
+                          <a:solidFill>
+                            <a:srgbClr val="FF0000"/>
+                          </a:solidFill>
+                          <a:effectLst/>
+                          <a:latin typeface="+mn-lt"/>
+                        </a:rPr>
+                        <a:t>Binance.US</a:t>
+                      </a:r>
+                      <a:endParaRPr lang="en-US" sz="1200" b="0" i="0" u="none" strike="noStrike">
+                        <a:solidFill>
+                          <a:srgbClr val="000000"/>
+                        </a:solidFill>
+                        <a:effectLst/>
+                        <a:latin typeface="+mn-lt"/>
+                      </a:endParaRPr>
+                    </a:p>
+                  </a:txBody>
+                  <a:tcPr marL="6922" marR="6922" marT="6922" marB="0" anchor="ctr"/>
+                </a:tc>
+                <a:tc>
+                  <a:txBody>
+                    <a:bodyPr/>
+                    <a:lstStyle/>
+                    <a:p>
+                      <a:pPr marL="0" marR="0" lvl="0" indent="0" algn="ctr" defTabSz="914400" rtl="0" eaLnBrk="1" fontAlgn="b" latinLnBrk="0" hangingPunct="1">
+                        <a:lnSpc>
+                          <a:spcPct val="100000"/>
+                        </a:lnSpc>
+                        <a:spcBef>
+                          <a:spcPts val="0"/>
+                        </a:spcBef>
+                        <a:spcAft>
+                          <a:spcPts val="0"/>
+                        </a:spcAft>
+                        <a:buClrTx/>
+                        <a:buSzTx/>
+                        <a:buFontTx/>
+                        <a:buNone/>
+                        <a:tabLst/>
+                        <a:defRPr/>
+                      </a:pPr>
+                      <a:r>
+                        <a:rPr lang="en-US" sz="1200" b="1" u="none" strike="noStrike">
+                          <a:solidFill>
+                            <a:srgbClr val="FF0000"/>
+                          </a:solidFill>
+                          <a:effectLst/>
+                          <a:latin typeface="+mn-lt"/>
+                        </a:rPr>
+                        <a:t>United States</a:t>
+                      </a:r>
+                      <a:endParaRPr lang="en-US" sz="1200" b="1" i="0" u="none" strike="noStrike">
+                        <a:solidFill>
+                          <a:srgbClr val="FF0000"/>
+                        </a:solidFill>
+                        <a:effectLst/>
+                        <a:latin typeface="+mn-lt"/>
+                      </a:endParaRPr>
+                    </a:p>
+                  </a:txBody>
+                  <a:tcPr marL="6922" marR="6922" marT="6922" marB="0" anchor="ctr"/>
+                </a:tc>
+                <a:tc>
+                  <a:txBody>
+                    <a:bodyPr/>
+                    <a:lstStyle/>
+                    <a:p>
+                      <a:pPr algn="ctr" fontAlgn="b"/>
+                      <a:r>
+                        <a:rPr lang="en-US" sz="1200" b="0" i="0" u="none" strike="noStrike">
+                          <a:solidFill>
+                            <a:srgbClr val="000000"/>
+                          </a:solidFill>
+                          <a:effectLst/>
+                          <a:latin typeface="+mn-lt"/>
+                        </a:rPr>
+                        <a:t>0.33</a:t>
+                      </a:r>
+                    </a:p>
+                  </a:txBody>
+                  <a:tcPr marL="6922" marR="6922" marT="6922" marB="0" anchor="ctr"/>
+                </a:tc>
+                <a:extLst>
+                  <a:ext uri="{0D108BD9-81ED-4DB2-BD59-A6C34878D82A}">
+                    <a16:rowId xmlns:a16="http://schemas.microsoft.com/office/drawing/2014/main" val="1908487161"/>
+                  </a:ext>
+                </a:extLst>
+              </a:tr>
+            </a:tbl>
+          </a:graphicData>
+        </a:graphic>
+      </p:graphicFrame>
+      <p:sp>
+        <p:nvSpPr>
+          <p:cNvPr id="4" name="TextBox 3">
+            <a:extLst>
+              <a:ext uri="{FF2B5EF4-FFF2-40B4-BE49-F238E27FC236}">
+                <a16:creationId xmlns:a16="http://schemas.microsoft.com/office/drawing/2014/main" id="{1D7EE1FC-FB17-C02E-93F5-E20A6CFEB188}"/>
+              </a:ext>
+            </a:extLst>
+          </p:cNvPr>
+          <p:cNvSpPr txBox="1"/>
+          <p:nvPr/>
+        </p:nvSpPr>
+        <p:spPr>
+          <a:xfrm>
+            <a:off x="7903675" y="233592"/>
+            <a:ext cx="2634559" cy="584775"/>
+          </a:xfrm>
+          <a:prstGeom prst="rect">
+            <a:avLst/>
+          </a:prstGeom>
+          <a:noFill/>
+        </p:spPr>
+        <p:txBody>
+          <a:bodyPr wrap="square" rtlCol="0">
+            <a:spAutoFit/>
+          </a:bodyPr>
+          <a:lstStyle/>
+          <a:p>
+            <a:r>
+              <a:rPr lang="en-US" b="1">
+                <a:solidFill>
+                  <a:srgbClr val="00B050"/>
+                </a:solidFill>
+              </a:rPr>
+              <a:t>Current List (April 2022):</a:t>
+            </a:r>
+            <a:endParaRPr lang="en-US"/>
+          </a:p>
+          <a:p>
+            <a:r>
+              <a:rPr lang="en-US" sz="1400">
+                <a:hlinkClick r:id="rId2"/>
+              </a:rPr>
+              <a:t>https://nomics.com/exchanges</a:t>
+            </a:r>
+            <a:endParaRPr lang="en-US" sz="1400"/>
+          </a:p>
+        </p:txBody>
+      </p:sp>
+      <p:pic>
+        <p:nvPicPr>
+          <p:cNvPr id="6" name="Picture 5">
+            <a:extLst>
+              <a:ext uri="{FF2B5EF4-FFF2-40B4-BE49-F238E27FC236}">
+                <a16:creationId xmlns:a16="http://schemas.microsoft.com/office/drawing/2014/main" id="{7D63599C-59A6-1302-FCAE-F196541EEB7E}"/>
+              </a:ext>
+            </a:extLst>
+          </p:cNvPr>
+          <p:cNvPicPr>
+            <a:picLocks noChangeAspect="1"/>
+          </p:cNvPicPr>
+          <p:nvPr/>
+        </p:nvPicPr>
+        <p:blipFill>
+          <a:blip r:embed="rId3" cstate="email">
+            <a:extLst>
+              <a:ext uri="{28A0092B-C50C-407E-A947-70E740481C1C}">
+                <a14:useLocalDpi xmlns:a14="http://schemas.microsoft.com/office/drawing/2010/main"/>
+              </a:ext>
+            </a:extLst>
+          </a:blip>
+          <a:stretch>
+            <a:fillRect/>
+          </a:stretch>
+        </p:blipFill>
+        <p:spPr>
+          <a:xfrm>
+            <a:off x="7997911" y="825061"/>
+            <a:ext cx="3485028" cy="5758755"/>
+          </a:xfrm>
+          <a:prstGeom prst="rect">
+            <a:avLst/>
+          </a:prstGeom>
+          <a:noFill/>
+          <a:ln>
+            <a:solidFill>
+              <a:schemeClr val="accent1"/>
+            </a:solidFill>
+          </a:ln>
+        </p:spPr>
+      </p:pic>
+    </p:spTree>
+    <p:extLst>
+      <p:ext uri="{BB962C8B-B14F-4D97-AF65-F5344CB8AC3E}">
+        <p14:creationId xmlns:p14="http://schemas.microsoft.com/office/powerpoint/2010/main" val="77002737"/>
+      </p:ext>
+    </p:extLst>
+  </p:cSld>
+  <p:clrMapOvr>
+    <a:masterClrMapping/>
+  </p:clrMapOvr>
+</p:sld>
+</file>
+
+<file path=ppt/slides/slide4.xml><?xml version="1.0" encoding="utf-8"?>
+<p:sld xmlns:a="http://schemas.openxmlformats.org/drawingml/2006/main" xmlns:r="http://schemas.openxmlformats.org/officeDocument/2006/relationships" xmlns:p="http://schemas.openxmlformats.org/presentationml/2006/main">
+  <p:cSld>
+    <p:spTree>
+      <p:nvGrpSpPr>
+        <p:cNvPr id="1" name=""/>
+        <p:cNvGrpSpPr/>
+        <p:nvPr/>
+      </p:nvGrpSpPr>
+      <p:grpSpPr>
+        <a:xfrm>
+          <a:off x="0" y="0"/>
+          <a:ext cx="0" cy="0"/>
+          <a:chOff x="0" y="0"/>
+          <a:chExt cx="0" cy="0"/>
+        </a:xfrm>
+      </p:grpSpPr>
+      <p:sp>
+        <p:nvSpPr>
           <p:cNvPr id="3" name="TextBox 2">
             <a:extLst>
               <a:ext uri="{FF2B5EF4-FFF2-40B4-BE49-F238E27FC236}">
@@ -7891,7 +11823,7 @@
 </p:sld>
 </file>
 
-<file path=ppt/slides/slide4.xml><?xml version="1.0" encoding="utf-8"?>
+<file path=ppt/slides/slide5.xml><?xml version="1.0" encoding="utf-8"?>
 <p:sld xmlns:a="http://schemas.openxmlformats.org/drawingml/2006/main" xmlns:r="http://schemas.openxmlformats.org/officeDocument/2006/relationships" xmlns:p="http://schemas.openxmlformats.org/presentationml/2006/main">
   <p:cSld>
     <p:spTree>
@@ -8462,7 +12394,7 @@
 </p:sld>
 </file>
 
-<file path=ppt/slides/slide5.xml><?xml version="1.0" encoding="utf-8"?>
+<file path=ppt/slides/slide6.xml><?xml version="1.0" encoding="utf-8"?>
 <p:sld xmlns:a="http://schemas.openxmlformats.org/drawingml/2006/main" xmlns:r="http://schemas.openxmlformats.org/officeDocument/2006/relationships" xmlns:p="http://schemas.openxmlformats.org/presentationml/2006/main">
   <p:cSld>
     <p:spTree>
@@ -8923,7 +12855,7 @@
 </p:sld>
 </file>
 
-<file path=ppt/slides/slide6.xml><?xml version="1.0" encoding="utf-8"?>
+<file path=ppt/slides/slide7.xml><?xml version="1.0" encoding="utf-8"?>
 <p:sld xmlns:a="http://schemas.openxmlformats.org/drawingml/2006/main" xmlns:r="http://schemas.openxmlformats.org/officeDocument/2006/relationships" xmlns:p="http://schemas.openxmlformats.org/presentationml/2006/main">
   <p:cSld>
     <p:spTree>
@@ -9685,7 +13617,7 @@
 </p:sld>
 </file>
 
-<file path=ppt/slides/slide7.xml><?xml version="1.0" encoding="utf-8"?>
+<file path=ppt/slides/slide8.xml><?xml version="1.0" encoding="utf-8"?>
 <p:sld xmlns:a="http://schemas.openxmlformats.org/drawingml/2006/main" xmlns:r="http://schemas.openxmlformats.org/officeDocument/2006/relationships" xmlns:p="http://schemas.openxmlformats.org/presentationml/2006/main">
   <p:cSld>
     <p:spTree>
@@ -10315,492 +14247,6 @@
 </p:sld>
 </file>
 
-<file path=ppt/slides/slide8.xml><?xml version="1.0" encoding="utf-8"?>
-<p:sld xmlns:a="http://schemas.openxmlformats.org/drawingml/2006/main" xmlns:r="http://schemas.openxmlformats.org/officeDocument/2006/relationships" xmlns:p="http://schemas.openxmlformats.org/presentationml/2006/main">
-  <p:cSld>
-    <p:spTree>
-      <p:nvGrpSpPr>
-        <p:cNvPr id="1" name=""/>
-        <p:cNvGrpSpPr/>
-        <p:nvPr/>
-      </p:nvGrpSpPr>
-      <p:grpSpPr>
-        <a:xfrm>
-          <a:off x="0" y="0"/>
-          <a:ext cx="0" cy="0"/>
-          <a:chOff x="0" y="0"/>
-          <a:chExt cx="0" cy="0"/>
-        </a:xfrm>
-      </p:grpSpPr>
-      <p:sp>
-        <p:nvSpPr>
-          <p:cNvPr id="2" name="TextBox 1">
-            <a:extLst>
-              <a:ext uri="{FF2B5EF4-FFF2-40B4-BE49-F238E27FC236}">
-                <a16:creationId xmlns:a16="http://schemas.microsoft.com/office/drawing/2014/main" id="{E7110EDD-1316-6D4C-4930-BCFF121273CA}"/>
-              </a:ext>
-            </a:extLst>
-          </p:cNvPr>
-          <p:cNvSpPr txBox="1"/>
-          <p:nvPr/>
-        </p:nvSpPr>
-        <p:spPr>
-          <a:xfrm>
-            <a:off x="-1" y="0"/>
-            <a:ext cx="2072641" cy="523220"/>
-          </a:xfrm>
-          <a:prstGeom prst="rect">
-            <a:avLst/>
-          </a:prstGeom>
-          <a:noFill/>
-        </p:spPr>
-        <p:txBody>
-          <a:bodyPr wrap="square" rtlCol="0">
-            <a:spAutoFit/>
-          </a:bodyPr>
-          <a:lstStyle/>
-          <a:p>
-            <a:r>
-              <a:rPr lang="en-US" sz="2800" b="1"/>
-              <a:t>Bitstamp</a:t>
-            </a:r>
-          </a:p>
-        </p:txBody>
-      </p:sp>
-      <p:sp>
-        <p:nvSpPr>
-          <p:cNvPr id="4" name="TextBox 3">
-            <a:extLst>
-              <a:ext uri="{FF2B5EF4-FFF2-40B4-BE49-F238E27FC236}">
-                <a16:creationId xmlns:a16="http://schemas.microsoft.com/office/drawing/2014/main" id="{D450E834-9C35-33AB-8443-28E59C3504FF}"/>
-              </a:ext>
-            </a:extLst>
-          </p:cNvPr>
-          <p:cNvSpPr txBox="1"/>
-          <p:nvPr/>
-        </p:nvSpPr>
-        <p:spPr>
-          <a:xfrm>
-            <a:off x="-1" y="1712935"/>
-            <a:ext cx="5402424" cy="1600438"/>
-          </a:xfrm>
-          <a:prstGeom prst="rect">
-            <a:avLst/>
-          </a:prstGeom>
-          <a:noFill/>
-        </p:spPr>
-        <p:txBody>
-          <a:bodyPr wrap="square" rtlCol="0">
-            <a:spAutoFit/>
-          </a:bodyPr>
-          <a:lstStyle/>
-          <a:p>
-            <a:pPr marL="285750" indent="-285750">
-              <a:buFont typeface="Arial" panose="020B0604020202020204" pitchFamily="34" charset="0"/>
-              <a:buChar char="•"/>
-            </a:pPr>
-            <a:r>
-              <a:rPr lang="en-US" sz="1400"/>
-              <a:t>Bitstamp is a cryptocurrency exchange based in Luxembourg. </a:t>
-            </a:r>
-            <a:br>
-              <a:rPr lang="en-US" sz="1400"/>
-            </a:br>
-            <a:r>
-              <a:rPr lang="en-US" sz="1400"/>
-              <a:t>(London, Luxembourg, Slovenia, New York City)</a:t>
-            </a:r>
-          </a:p>
-          <a:p>
-            <a:pPr marL="285750" indent="-285750">
-              <a:buFont typeface="Arial" panose="020B0604020202020204" pitchFamily="34" charset="0"/>
-              <a:buChar char="•"/>
-            </a:pPr>
-            <a:r>
-              <a:rPr lang="en-US" sz="1400"/>
-              <a:t>Founded in 2011</a:t>
-            </a:r>
-          </a:p>
-          <a:p>
-            <a:pPr marL="285750" indent="-285750">
-              <a:buFont typeface="Arial" panose="020B0604020202020204" pitchFamily="34" charset="0"/>
-              <a:buChar char="•"/>
-            </a:pPr>
-            <a:r>
-              <a:rPr lang="en-US" sz="1400"/>
-              <a:t>It allows trading between fiat currency, bitcoin and other cryptocurrencies.</a:t>
-            </a:r>
-          </a:p>
-          <a:p>
-            <a:pPr marL="285750" indent="-285750">
-              <a:buFont typeface="Arial" panose="020B0604020202020204" pitchFamily="34" charset="0"/>
-              <a:buChar char="•"/>
-            </a:pPr>
-            <a:r>
-              <a:rPr lang="en-US" sz="1400"/>
-              <a:t>USD, EUR, GBP, bitcoin, ALGO, XRP, Ether, litecoin, bitcoin cash, XLM, Link, OMG Network, USD Coin or PAX deposits and withdrawals</a:t>
-            </a:r>
-          </a:p>
-        </p:txBody>
-      </p:sp>
-      <p:pic>
-        <p:nvPicPr>
-          <p:cNvPr id="3" name="Picture 2">
-            <a:extLst>
-              <a:ext uri="{FF2B5EF4-FFF2-40B4-BE49-F238E27FC236}">
-                <a16:creationId xmlns:a16="http://schemas.microsoft.com/office/drawing/2014/main" id="{B030F248-013D-EC55-1302-1CA6CF3F4623}"/>
-              </a:ext>
-            </a:extLst>
-          </p:cNvPr>
-          <p:cNvPicPr>
-            <a:picLocks noChangeAspect="1"/>
-          </p:cNvPicPr>
-          <p:nvPr/>
-        </p:nvPicPr>
-        <p:blipFill>
-          <a:blip r:embed="rId3" cstate="email">
-            <a:extLst>
-              <a:ext uri="{28A0092B-C50C-407E-A947-70E740481C1C}">
-                <a14:useLocalDpi xmlns:a14="http://schemas.microsoft.com/office/drawing/2010/main"/>
-              </a:ext>
-            </a:extLst>
-          </a:blip>
-          <a:stretch>
-            <a:fillRect/>
-          </a:stretch>
-        </p:blipFill>
-        <p:spPr>
-          <a:xfrm>
-            <a:off x="7997146" y="2091267"/>
-            <a:ext cx="4138870" cy="3348479"/>
-          </a:xfrm>
-          <a:prstGeom prst="rect">
-            <a:avLst/>
-          </a:prstGeom>
-        </p:spPr>
-      </p:pic>
-      <p:sp>
-        <p:nvSpPr>
-          <p:cNvPr id="5" name="TextBox 4">
-            <a:extLst>
-              <a:ext uri="{FF2B5EF4-FFF2-40B4-BE49-F238E27FC236}">
-                <a16:creationId xmlns:a16="http://schemas.microsoft.com/office/drawing/2014/main" id="{C34BAA9C-9CDA-6777-C3BB-E2B6236AF4FC}"/>
-              </a:ext>
-            </a:extLst>
-          </p:cNvPr>
-          <p:cNvSpPr txBox="1"/>
-          <p:nvPr/>
-        </p:nvSpPr>
-        <p:spPr>
-          <a:xfrm>
-            <a:off x="0" y="663179"/>
-            <a:ext cx="5243804" cy="1169551"/>
-          </a:xfrm>
-          <a:prstGeom prst="rect">
-            <a:avLst/>
-          </a:prstGeom>
-          <a:noFill/>
-        </p:spPr>
-        <p:txBody>
-          <a:bodyPr wrap="square" rtlCol="0">
-            <a:spAutoFit/>
-          </a:bodyPr>
-          <a:lstStyle/>
-          <a:p>
-            <a:pPr marL="285750" indent="-285750">
-              <a:buFont typeface="Arial" panose="020B0604020202020204" pitchFamily="34" charset="0"/>
-              <a:buChar char="•"/>
-            </a:pPr>
-            <a:r>
-              <a:rPr lang="en-US" sz="1400">
-                <a:hlinkClick r:id="rId4"/>
-              </a:rPr>
-              <a:t>https://www.bitstamp.net/</a:t>
-            </a:r>
-            <a:r>
-              <a:rPr lang="en-US" sz="1400"/>
-              <a:t> </a:t>
-            </a:r>
-          </a:p>
-          <a:p>
-            <a:pPr marL="285750" indent="-285750">
-              <a:buFont typeface="Arial" panose="020B0604020202020204" pitchFamily="34" charset="0"/>
-              <a:buChar char="•"/>
-            </a:pPr>
-            <a:r>
-              <a:rPr lang="en-US" sz="1400">
-                <a:hlinkClick r:id="rId5"/>
-              </a:rPr>
-              <a:t>https://en.wikipedia.org/wiki/Bitstamp</a:t>
-            </a:r>
-            <a:r>
-              <a:rPr lang="en-US" sz="1400"/>
-              <a:t> </a:t>
-            </a:r>
-          </a:p>
-          <a:p>
-            <a:pPr marL="285750" indent="-285750">
-              <a:buFont typeface="Arial" panose="020B0604020202020204" pitchFamily="34" charset="0"/>
-              <a:buChar char="•"/>
-            </a:pPr>
-            <a:r>
-              <a:rPr lang="en-US" sz="1400">
-                <a:hlinkClick r:id="rId6"/>
-              </a:rPr>
-              <a:t>https://www.bitstamp.net/api/</a:t>
-            </a:r>
-            <a:r>
-              <a:rPr lang="en-US" sz="1400"/>
-              <a:t> </a:t>
-            </a:r>
-          </a:p>
-          <a:p>
-            <a:pPr marL="285750" indent="-285750">
-              <a:buFont typeface="Arial" panose="020B0604020202020204" pitchFamily="34" charset="0"/>
-              <a:buChar char="•"/>
-            </a:pPr>
-            <a:r>
-              <a:rPr lang="en-US" sz="1400">
-                <a:hlinkClick r:id="rId7"/>
-              </a:rPr>
-              <a:t>https://github.com/kmadac/bitstamp-python-client</a:t>
-            </a:r>
-            <a:r>
-              <a:rPr lang="en-US" sz="1400"/>
-              <a:t> </a:t>
-            </a:r>
-          </a:p>
-          <a:p>
-            <a:pPr marL="285750" indent="-285750">
-              <a:buFont typeface="Arial" panose="020B0604020202020204" pitchFamily="34" charset="0"/>
-              <a:buChar char="•"/>
-            </a:pPr>
-            <a:endParaRPr lang="en-US" sz="1400"/>
-          </a:p>
-        </p:txBody>
-      </p:sp>
-      <p:pic>
-        <p:nvPicPr>
-          <p:cNvPr id="6" name="Picture 5">
-            <a:extLst>
-              <a:ext uri="{FF2B5EF4-FFF2-40B4-BE49-F238E27FC236}">
-                <a16:creationId xmlns:a16="http://schemas.microsoft.com/office/drawing/2014/main" id="{988DCB5F-E0B7-03AD-029A-33299D2E0718}"/>
-              </a:ext>
-            </a:extLst>
-          </p:cNvPr>
-          <p:cNvPicPr>
-            <a:picLocks noChangeAspect="1"/>
-          </p:cNvPicPr>
-          <p:nvPr/>
-        </p:nvPicPr>
-        <p:blipFill>
-          <a:blip r:embed="rId8" cstate="email">
-            <a:extLst>
-              <a:ext uri="{28A0092B-C50C-407E-A947-70E740481C1C}">
-                <a14:useLocalDpi xmlns:a14="http://schemas.microsoft.com/office/drawing/2010/main"/>
-              </a:ext>
-            </a:extLst>
-          </a:blip>
-          <a:stretch>
-            <a:fillRect/>
-          </a:stretch>
-        </p:blipFill>
-        <p:spPr>
-          <a:xfrm>
-            <a:off x="9050693" y="59666"/>
-            <a:ext cx="3085323" cy="771331"/>
-          </a:xfrm>
-          <a:prstGeom prst="rect">
-            <a:avLst/>
-          </a:prstGeom>
-        </p:spPr>
-      </p:pic>
-      <p:sp>
-        <p:nvSpPr>
-          <p:cNvPr id="7" name="TextBox 6">
-            <a:extLst>
-              <a:ext uri="{FF2B5EF4-FFF2-40B4-BE49-F238E27FC236}">
-                <a16:creationId xmlns:a16="http://schemas.microsoft.com/office/drawing/2014/main" id="{72D8A426-4282-B1E8-4045-B0EF4C0DFAAD}"/>
-              </a:ext>
-            </a:extLst>
-          </p:cNvPr>
-          <p:cNvSpPr txBox="1"/>
-          <p:nvPr/>
-        </p:nvSpPr>
-        <p:spPr>
-          <a:xfrm>
-            <a:off x="541581" y="3858339"/>
-            <a:ext cx="4758612" cy="2308324"/>
-          </a:xfrm>
-          <a:prstGeom prst="rect">
-            <a:avLst/>
-          </a:prstGeom>
-          <a:noFill/>
-        </p:spPr>
-        <p:txBody>
-          <a:bodyPr wrap="square" rtlCol="0">
-            <a:spAutoFit/>
-          </a:bodyPr>
-          <a:lstStyle/>
-          <a:p>
-            <a:r>
-              <a:rPr lang="en-US" sz="1200" b="1">
-                <a:solidFill>
-                  <a:srgbClr val="00B050"/>
-                </a:solidFill>
-                <a:latin typeface="Menlo" panose="020B0609030804020204" pitchFamily="49" charset="0"/>
-                <a:ea typeface="Menlo" panose="020B0609030804020204" pitchFamily="49" charset="0"/>
-                <a:cs typeface="Menlo" panose="020B0609030804020204" pitchFamily="49" charset="0"/>
-              </a:rPr>
-              <a:t># pip install BitstampClient</a:t>
-            </a:r>
-          </a:p>
-          <a:p>
-            <a:endParaRPr lang="en-US" sz="1200">
-              <a:solidFill>
-                <a:srgbClr val="00B0F0"/>
-              </a:solidFill>
-              <a:latin typeface="Menlo" panose="020B0609030804020204" pitchFamily="49" charset="0"/>
-              <a:ea typeface="Menlo" panose="020B0609030804020204" pitchFamily="49" charset="0"/>
-              <a:cs typeface="Menlo" panose="020B0609030804020204" pitchFamily="49" charset="0"/>
-            </a:endParaRPr>
-          </a:p>
-          <a:p>
-            <a:r>
-              <a:rPr lang="en-US" sz="1200">
-                <a:solidFill>
-                  <a:srgbClr val="00B0F0"/>
-                </a:solidFill>
-                <a:latin typeface="Menlo" panose="020B0609030804020204" pitchFamily="49" charset="0"/>
-                <a:ea typeface="Menlo" panose="020B0609030804020204" pitchFamily="49" charset="0"/>
-                <a:cs typeface="Menlo" panose="020B0609030804020204" pitchFamily="49" charset="0"/>
-              </a:rPr>
-              <a:t>import bitstamp.client</a:t>
-            </a:r>
-          </a:p>
-          <a:p>
-            <a:endParaRPr lang="en-US" sz="1200">
-              <a:solidFill>
-                <a:srgbClr val="00B0F0"/>
-              </a:solidFill>
-              <a:latin typeface="Menlo" panose="020B0609030804020204" pitchFamily="49" charset="0"/>
-              <a:ea typeface="Menlo" panose="020B0609030804020204" pitchFamily="49" charset="0"/>
-              <a:cs typeface="Menlo" panose="020B0609030804020204" pitchFamily="49" charset="0"/>
-            </a:endParaRPr>
-          </a:p>
-          <a:p>
-            <a:r>
-              <a:rPr lang="en-US" sz="1200">
-                <a:solidFill>
-                  <a:srgbClr val="00B0F0"/>
-                </a:solidFill>
-                <a:latin typeface="Menlo" panose="020B0609030804020204" pitchFamily="49" charset="0"/>
-                <a:ea typeface="Menlo" panose="020B0609030804020204" pitchFamily="49" charset="0"/>
-                <a:cs typeface="Menlo" panose="020B0609030804020204" pitchFamily="49" charset="0"/>
-              </a:rPr>
-              <a:t>public_client = bitstamp.client.Public()</a:t>
-            </a:r>
-          </a:p>
-          <a:p>
-            <a:r>
-              <a:rPr lang="en-US" sz="1200">
-                <a:solidFill>
-                  <a:srgbClr val="00B0F0"/>
-                </a:solidFill>
-                <a:latin typeface="Menlo" panose="020B0609030804020204" pitchFamily="49" charset="0"/>
-                <a:ea typeface="Menlo" panose="020B0609030804020204" pitchFamily="49" charset="0"/>
-                <a:cs typeface="Menlo" panose="020B0609030804020204" pitchFamily="49" charset="0"/>
-              </a:rPr>
-              <a:t>print(public_client.ticker()['volume'])</a:t>
-            </a:r>
-          </a:p>
-          <a:p>
-            <a:endParaRPr lang="en-US" sz="1200">
-              <a:solidFill>
-                <a:srgbClr val="00B0F0"/>
-              </a:solidFill>
-              <a:latin typeface="Menlo" panose="020B0609030804020204" pitchFamily="49" charset="0"/>
-              <a:ea typeface="Menlo" panose="020B0609030804020204" pitchFamily="49" charset="0"/>
-              <a:cs typeface="Menlo" panose="020B0609030804020204" pitchFamily="49" charset="0"/>
-            </a:endParaRPr>
-          </a:p>
-          <a:p>
-            <a:r>
-              <a:rPr lang="en-US" sz="1200">
-                <a:solidFill>
-                  <a:srgbClr val="00B0F0"/>
-                </a:solidFill>
-                <a:latin typeface="Menlo" panose="020B0609030804020204" pitchFamily="49" charset="0"/>
-                <a:ea typeface="Menlo" panose="020B0609030804020204" pitchFamily="49" charset="0"/>
-                <a:cs typeface="Menlo" panose="020B0609030804020204" pitchFamily="49" charset="0"/>
-              </a:rPr>
-              <a:t>trading_client = bitstamp.client.Trading(</a:t>
-            </a:r>
-          </a:p>
-          <a:p>
-            <a:r>
-              <a:rPr lang="en-US" sz="1200">
-                <a:solidFill>
-                  <a:srgbClr val="00B0F0"/>
-                </a:solidFill>
-                <a:latin typeface="Menlo" panose="020B0609030804020204" pitchFamily="49" charset="0"/>
-                <a:ea typeface="Menlo" panose="020B0609030804020204" pitchFamily="49" charset="0"/>
-                <a:cs typeface="Menlo" panose="020B0609030804020204" pitchFamily="49" charset="0"/>
-              </a:rPr>
-              <a:t>    username='999999', key='xxx', secret='xxx')</a:t>
-            </a:r>
-          </a:p>
-          <a:p>
-            <a:endParaRPr lang="en-US" sz="1200">
-              <a:solidFill>
-                <a:srgbClr val="00B0F0"/>
-              </a:solidFill>
-              <a:latin typeface="Menlo" panose="020B0609030804020204" pitchFamily="49" charset="0"/>
-              <a:ea typeface="Menlo" panose="020B0609030804020204" pitchFamily="49" charset="0"/>
-              <a:cs typeface="Menlo" panose="020B0609030804020204" pitchFamily="49" charset="0"/>
-            </a:endParaRPr>
-          </a:p>
-          <a:p>
-            <a:r>
-              <a:rPr lang="en-US" sz="1200">
-                <a:solidFill>
-                  <a:srgbClr val="00B0F0"/>
-                </a:solidFill>
-                <a:latin typeface="Menlo" panose="020B0609030804020204" pitchFamily="49" charset="0"/>
-                <a:ea typeface="Menlo" panose="020B0609030804020204" pitchFamily="49" charset="0"/>
-                <a:cs typeface="Menlo" panose="020B0609030804020204" pitchFamily="49" charset="0"/>
-              </a:rPr>
-              <a:t>print(trading_client.account_balance()['fee'])</a:t>
-            </a:r>
-          </a:p>
-          <a:p>
-            <a:r>
-              <a:rPr lang="en-US" sz="1200">
-                <a:solidFill>
-                  <a:srgbClr val="00B0F0"/>
-                </a:solidFill>
-                <a:latin typeface="Menlo" panose="020B0609030804020204" pitchFamily="49" charset="0"/>
-                <a:ea typeface="Menlo" panose="020B0609030804020204" pitchFamily="49" charset="0"/>
-                <a:cs typeface="Menlo" panose="020B0609030804020204" pitchFamily="49" charset="0"/>
-              </a:rPr>
-              <a:t>print(trading_client.ticker()['volume'])</a:t>
-            </a:r>
-          </a:p>
-        </p:txBody>
-      </p:sp>
-    </p:spTree>
-    <p:extLst>
-      <p:ext uri="{BB962C8B-B14F-4D97-AF65-F5344CB8AC3E}">
-        <p14:creationId xmlns:p14="http://schemas.microsoft.com/office/powerpoint/2010/main" val="1816705376"/>
-      </p:ext>
-    </p:extLst>
-  </p:cSld>
-  <p:clrMapOvr>
-    <a:masterClrMapping/>
-  </p:clrMapOvr>
-</p:sld>
-</file>
-
 <file path=ppt/slides/slide9.xml><?xml version="1.0" encoding="utf-8"?>
 <p:sld xmlns:a="http://schemas.openxmlformats.org/drawingml/2006/main" xmlns:r="http://schemas.openxmlformats.org/officeDocument/2006/relationships" xmlns:p="http://schemas.openxmlformats.org/presentationml/2006/main">
   <p:cSld>
@@ -10823,7 +14269,7 @@
           <p:cNvPr id="2" name="TextBox 1">
             <a:extLst>
               <a:ext uri="{FF2B5EF4-FFF2-40B4-BE49-F238E27FC236}">
-                <a16:creationId xmlns:a16="http://schemas.microsoft.com/office/drawing/2014/main" id="{E7110EDD-1316-6D4C-4930-BCFF121273CA}"/>
+                <a16:creationId xmlns:a16="http://schemas.microsoft.com/office/drawing/2014/main" id="{36EEA35F-96D2-F99D-549D-C27A8EB7F596}"/>
               </a:ext>
             </a:extLst>
           </p:cNvPr>
@@ -10833,7 +14279,7 @@
         <p:spPr>
           <a:xfrm>
             <a:off x="-1" y="0"/>
-            <a:ext cx="2072641" cy="523220"/>
+            <a:ext cx="3404104" cy="523220"/>
           </a:xfrm>
           <a:prstGeom prst="rect">
             <a:avLst/>
@@ -10848,17 +14294,23 @@
           <a:p>
             <a:r>
               <a:rPr lang="en-US" sz="2800" b="1"/>
-              <a:t>Kraken</a:t>
-            </a:r>
+              <a:t>Mandala Exchange</a:t>
+            </a:r>
+            <a:endParaRPr lang="en-US" sz="2800" b="1">
+              <a:solidFill>
+                <a:srgbClr val="000000"/>
+              </a:solidFill>
+              <a:latin typeface="Calibri" panose="020F0502020204030204" pitchFamily="34" charset="0"/>
+            </a:endParaRPr>
           </a:p>
         </p:txBody>
       </p:sp>
       <p:sp>
         <p:nvSpPr>
-          <p:cNvPr id="4" name="TextBox 3">
+          <p:cNvPr id="3" name="TextBox 2">
             <a:extLst>
               <a:ext uri="{FF2B5EF4-FFF2-40B4-BE49-F238E27FC236}">
-                <a16:creationId xmlns:a16="http://schemas.microsoft.com/office/drawing/2014/main" id="{D450E834-9C35-33AB-8443-28E59C3504FF}"/>
+                <a16:creationId xmlns:a16="http://schemas.microsoft.com/office/drawing/2014/main" id="{8324B52B-FBD6-96EA-45DA-CD7156CC4245}"/>
               </a:ext>
             </a:extLst>
           </p:cNvPr>
@@ -10867,8 +14319,8 @@
         </p:nvSpPr>
         <p:spPr>
           <a:xfrm>
-            <a:off x="0" y="509286"/>
-            <a:ext cx="6690049" cy="954107"/>
+            <a:off x="172016" y="606582"/>
+            <a:ext cx="4916032" cy="523220"/>
           </a:xfrm>
           <a:prstGeom prst="rect">
             <a:avLst/>
@@ -10881,71 +14333,22 @@
           </a:bodyPr>
           <a:lstStyle/>
           <a:p>
-            <a:pPr marL="285750" indent="-285750">
-              <a:buFont typeface="Arial" panose="020B0604020202020204" pitchFamily="34" charset="0"/>
-              <a:buChar char="•"/>
-            </a:pPr>
-            <a:r>
-              <a:rPr lang="en-US" sz="1400">
-                <a:hlinkClick r:id="rId2"/>
-              </a:rPr>
-              <a:t>https://www.kraken.com</a:t>
-            </a:r>
-            <a:r>
-              <a:rPr lang="en-US" sz="1400"/>
-              <a:t> </a:t>
-            </a:r>
-          </a:p>
-          <a:p>
-            <a:pPr marL="285750" indent="-285750">
-              <a:buFont typeface="Arial" panose="020B0604020202020204" pitchFamily="34" charset="0"/>
-              <a:buChar char="•"/>
-            </a:pPr>
-            <a:r>
-              <a:rPr lang="en-US" sz="1400">
-                <a:hlinkClick r:id="rId3"/>
-              </a:rPr>
-              <a:t>https://en.wikipedia.org/wiki/Kraken_(company)</a:t>
-            </a:r>
-            <a:r>
-              <a:rPr lang="en-US" sz="1400"/>
-              <a:t> </a:t>
-            </a:r>
-          </a:p>
-          <a:p>
-            <a:pPr marL="285750" indent="-285750">
-              <a:buFont typeface="Arial" panose="020B0604020202020204" pitchFamily="34" charset="0"/>
-              <a:buChar char="•"/>
-            </a:pPr>
-            <a:r>
-              <a:rPr lang="en-US" sz="1400">
-                <a:hlinkClick r:id="rId4"/>
-              </a:rPr>
-              <a:t>https://docs.kraken.com/rest/</a:t>
-            </a:r>
-            <a:endParaRPr lang="en-US" sz="1400"/>
-          </a:p>
-          <a:p>
-            <a:pPr marL="285750" indent="-285750">
-              <a:buFont typeface="Arial" panose="020B0604020202020204" pitchFamily="34" charset="0"/>
-              <a:buChar char="•"/>
-            </a:pPr>
-            <a:r>
-              <a:rPr lang="en-US" sz="1400">
-                <a:hlinkClick r:id="rId5"/>
-              </a:rPr>
-              <a:t>https://support.kraken.com/hc/en-us/sections/360003946512-Example-API-Code</a:t>
-            </a:r>
+            <a:r>
+              <a:rPr lang="en-US" sz="1400"/>
+              <a:t>https://mandala.exchange/</a:t>
+            </a:r>
+          </a:p>
+          <a:p>
             <a:endParaRPr lang="en-US" sz="1400"/>
           </a:p>
         </p:txBody>
       </p:sp>
       <p:sp>
         <p:nvSpPr>
-          <p:cNvPr id="5" name="TextBox 4">
+          <p:cNvPr id="4" name="TextBox 3">
             <a:extLst>
               <a:ext uri="{FF2B5EF4-FFF2-40B4-BE49-F238E27FC236}">
-                <a16:creationId xmlns:a16="http://schemas.microsoft.com/office/drawing/2014/main" id="{98ACFF17-6F73-7014-B5A1-972FD9DD09A1}"/>
+                <a16:creationId xmlns:a16="http://schemas.microsoft.com/office/drawing/2014/main" id="{9AA1F166-9534-DF2F-2BE2-FB61DA6AD0A8}"/>
               </a:ext>
             </a:extLst>
           </p:cNvPr>
@@ -10954,8 +14357,8 @@
         </p:nvSpPr>
         <p:spPr>
           <a:xfrm>
-            <a:off x="0" y="1776684"/>
-            <a:ext cx="6096000" cy="1815882"/>
+            <a:off x="172016" y="1213164"/>
+            <a:ext cx="4916032" cy="523220"/>
           </a:xfrm>
           <a:prstGeom prst="rect">
             <a:avLst/>
@@ -10968,79 +14371,73 @@
           </a:bodyPr>
           <a:lstStyle/>
           <a:p>
-            <a:pPr marL="285750" indent="-285750">
-              <a:buFont typeface="Arial" panose="020B0604020202020204" pitchFamily="34" charset="0"/>
-              <a:buChar char="•"/>
-            </a:pPr>
-            <a:r>
-              <a:rPr lang="en-US" sz="1400" b="1">
+            <a:r>
+              <a:rPr lang="en-US" sz="1400"/>
+              <a:t>Mandala Exchange Token – MDX</a:t>
+            </a:r>
+          </a:p>
+          <a:p>
+            <a:r>
+              <a:rPr lang="en-US" sz="1400">
                 <a:solidFill>
-                  <a:srgbClr val="00B050"/>
+                  <a:srgbClr val="000000"/>
                 </a:solidFill>
-              </a:rPr>
-              <a:t>Kraken</a:t>
-            </a:r>
-            <a:r>
-              <a:rPr lang="en-US" sz="1400"/>
-              <a:t> is a cryptocurrency exchange in San Francisco, CA since </a:t>
-            </a:r>
-          </a:p>
-          <a:p>
-            <a:pPr marL="285750" indent="-285750">
-              <a:buFont typeface="Arial" panose="020B0604020202020204" pitchFamily="34" charset="0"/>
-              <a:buChar char="•"/>
-            </a:pPr>
-            <a:r>
-              <a:rPr lang="en-US" sz="1400"/>
-              <a:t>Founded in 2011 by </a:t>
-            </a:r>
-            <a:r>
-              <a:rPr lang="en-US" sz="1400" b="1">
-                <a:solidFill>
-                  <a:srgbClr val="00B050"/>
-                </a:solidFill>
-              </a:rPr>
-              <a:t>Jesse Powell</a:t>
-            </a:r>
-          </a:p>
-          <a:p>
-            <a:pPr marL="285750" indent="-285750">
-              <a:buFont typeface="Arial" panose="020B0604020202020204" pitchFamily="34" charset="0"/>
-              <a:buChar char="•"/>
-            </a:pPr>
-            <a:r>
-              <a:rPr lang="en-US" sz="1400"/>
-              <a:t>14+ Mln users, 1000+ employees, </a:t>
-            </a:r>
-          </a:p>
-          <a:p>
-            <a:pPr marL="285750" indent="-285750">
-              <a:buFont typeface="Arial" panose="020B0604020202020204" pitchFamily="34" charset="0"/>
-              <a:buChar char="•"/>
-            </a:pPr>
-            <a:r>
-              <a:rPr lang="en-US" sz="1400"/>
-              <a:t>Support for 120+ different crypto currencies including Bitcoin, Ethereum (ether), Litecoin, Namecoin, Dogecoin, Ripple, Stellar, Cardano, Polkadot, Polygon, Solana, Sushi, Uniswap</a:t>
-            </a:r>
-          </a:p>
-          <a:p>
-            <a:pPr marL="285750" indent="-285750">
-              <a:buFont typeface="Arial" panose="020B0604020202020204" pitchFamily="34" charset="0"/>
-              <a:buChar char="•"/>
-            </a:pPr>
-            <a:r>
-              <a:rPr lang="en-US" sz="1400"/>
-              <a:t>Trading can be executed between digital assets, and between digital assets and national currencies like USD, EUR, GBP, CAD and JPY</a:t>
+                <a:latin typeface="Calibri" panose="020F0502020204030204" pitchFamily="34" charset="0"/>
+              </a:rPr>
+              <a:t>Daily volume</a:t>
+            </a:r>
+          </a:p>
+        </p:txBody>
+      </p:sp>
+      <p:sp>
+        <p:nvSpPr>
+          <p:cNvPr id="5" name="TextBox 4">
+            <a:extLst>
+              <a:ext uri="{FF2B5EF4-FFF2-40B4-BE49-F238E27FC236}">
+                <a16:creationId xmlns:a16="http://schemas.microsoft.com/office/drawing/2014/main" id="{A438B624-49DC-414F-F1DE-C43643F7C392}"/>
+              </a:ext>
+            </a:extLst>
+          </p:cNvPr>
+          <p:cNvSpPr txBox="1"/>
+          <p:nvPr/>
+        </p:nvSpPr>
+        <p:spPr>
+          <a:xfrm>
+            <a:off x="4176665" y="2788064"/>
+            <a:ext cx="4816444" cy="738664"/>
+          </a:xfrm>
+          <a:prstGeom prst="rect">
+            <a:avLst/>
+          </a:prstGeom>
+          <a:noFill/>
+        </p:spPr>
+        <p:txBody>
+          <a:bodyPr wrap="square" rtlCol="0">
+            <a:spAutoFit/>
+          </a:bodyPr>
+          <a:lstStyle/>
+          <a:p>
+            <a:r>
+              <a:rPr lang="en-US" sz="1400"/>
+              <a:t>The latest </a:t>
+            </a:r>
+            <a:r>
+              <a:rPr lang="en-US" sz="1400" b="1"/>
+              <a:t>crypto Mandala Exchange Token review</a:t>
+            </a:r>
+            <a:r>
+              <a:rPr lang="en-US" sz="1400"/>
+              <a:t> suggests that the company operates illegally and without a proper financial regulatory license</a:t>
             </a:r>
           </a:p>
         </p:txBody>
       </p:sp>
       <p:pic>
         <p:nvPicPr>
-          <p:cNvPr id="3" name="Picture 2">
+          <p:cNvPr id="6" name="Picture 5">
             <a:extLst>
               <a:ext uri="{FF2B5EF4-FFF2-40B4-BE49-F238E27FC236}">
-                <a16:creationId xmlns:a16="http://schemas.microsoft.com/office/drawing/2014/main" id="{03544CE4-260E-F661-89C0-88B4D5D39902}"/>
+                <a16:creationId xmlns:a16="http://schemas.microsoft.com/office/drawing/2014/main" id="{F78AF677-B73D-F3A9-7127-2505AA097D9E}"/>
               </a:ext>
             </a:extLst>
           </p:cNvPr>
@@ -11050,7 +14447,7 @@
           <p:nvPr/>
         </p:nvPicPr>
         <p:blipFill>
-          <a:blip r:embed="rId6" cstate="email">
+          <a:blip r:embed="rId2" cstate="email">
             <a:extLst>
               <a:ext uri="{28A0092B-C50C-407E-A947-70E740481C1C}">
                 <a14:useLocalDpi xmlns:a14="http://schemas.microsoft.com/office/drawing/2010/main"/>
@@ -11063,359 +14460,18 @@
         </p:blipFill>
         <p:spPr>
           <a:xfrm>
-            <a:off x="10046127" y="2440589"/>
-            <a:ext cx="2058695" cy="3166618"/>
+            <a:off x="10786901" y="161981"/>
+            <a:ext cx="1233083" cy="1358960"/>
           </a:xfrm>
           <a:prstGeom prst="rect">
             <a:avLst/>
           </a:prstGeom>
         </p:spPr>
       </p:pic>
-      <p:pic>
-        <p:nvPicPr>
-          <p:cNvPr id="6" name="Picture 5">
-            <a:extLst>
-              <a:ext uri="{FF2B5EF4-FFF2-40B4-BE49-F238E27FC236}">
-                <a16:creationId xmlns:a16="http://schemas.microsoft.com/office/drawing/2014/main" id="{FC57052F-3339-C4A3-57E2-4C2DCCC75B0F}"/>
-              </a:ext>
-            </a:extLst>
-          </p:cNvPr>
-          <p:cNvPicPr>
-            <a:picLocks noChangeAspect="1"/>
-          </p:cNvPicPr>
-          <p:nvPr/>
-        </p:nvPicPr>
-        <p:blipFill>
-          <a:blip r:embed="rId7" cstate="email">
-            <a:extLst>
-              <a:ext uri="{28A0092B-C50C-407E-A947-70E740481C1C}">
-                <a14:useLocalDpi xmlns:a14="http://schemas.microsoft.com/office/drawing/2010/main"/>
-              </a:ext>
-            </a:extLst>
-          </a:blip>
-          <a:stretch>
-            <a:fillRect/>
-          </a:stretch>
-        </p:blipFill>
-        <p:spPr>
-          <a:xfrm>
-            <a:off x="10544102" y="102637"/>
-            <a:ext cx="1560720" cy="1591934"/>
-          </a:xfrm>
-          <a:prstGeom prst="rect">
-            <a:avLst/>
-          </a:prstGeom>
-        </p:spPr>
-      </p:pic>
-      <p:sp>
-        <p:nvSpPr>
-          <p:cNvPr id="7" name="TextBox 6">
-            <a:extLst>
-              <a:ext uri="{FF2B5EF4-FFF2-40B4-BE49-F238E27FC236}">
-                <a16:creationId xmlns:a16="http://schemas.microsoft.com/office/drawing/2014/main" id="{D39FF3C4-289F-8C82-5F1A-2597B69EF113}"/>
-              </a:ext>
-            </a:extLst>
-          </p:cNvPr>
-          <p:cNvSpPr txBox="1"/>
-          <p:nvPr/>
-        </p:nvSpPr>
-        <p:spPr>
-          <a:xfrm>
-            <a:off x="10019080" y="5611872"/>
-            <a:ext cx="2058695" cy="954107"/>
-          </a:xfrm>
-          <a:prstGeom prst="rect">
-            <a:avLst/>
-          </a:prstGeom>
-          <a:noFill/>
-        </p:spPr>
-        <p:txBody>
-          <a:bodyPr wrap="square" rtlCol="0">
-            <a:spAutoFit/>
-          </a:bodyPr>
-          <a:lstStyle/>
-          <a:p>
-            <a:r>
-              <a:rPr lang="en-US" sz="1400"/>
-              <a:t>The kraken is a legendary sea monster of enormous size said to appear off the coasts of Norway.</a:t>
-            </a:r>
-          </a:p>
-        </p:txBody>
-      </p:sp>
-      <p:pic>
-        <p:nvPicPr>
-          <p:cNvPr id="8" name="Picture 7">
-            <a:extLst>
-              <a:ext uri="{FF2B5EF4-FFF2-40B4-BE49-F238E27FC236}">
-                <a16:creationId xmlns:a16="http://schemas.microsoft.com/office/drawing/2014/main" id="{90BB8598-50E9-6F94-D070-727FAD0D212D}"/>
-              </a:ext>
-            </a:extLst>
-          </p:cNvPr>
-          <p:cNvPicPr>
-            <a:picLocks noChangeAspect="1"/>
-          </p:cNvPicPr>
-          <p:nvPr/>
-        </p:nvPicPr>
-        <p:blipFill>
-          <a:blip r:embed="rId8" cstate="email">
-            <a:extLst>
-              <a:ext uri="{28A0092B-C50C-407E-A947-70E740481C1C}">
-                <a14:useLocalDpi xmlns:a14="http://schemas.microsoft.com/office/drawing/2010/main"/>
-              </a:ext>
-            </a:extLst>
-          </a:blip>
-          <a:stretch>
-            <a:fillRect/>
-          </a:stretch>
-        </p:blipFill>
-        <p:spPr>
-          <a:xfrm>
-            <a:off x="7679852" y="102637"/>
-            <a:ext cx="1690410" cy="2039517"/>
-          </a:xfrm>
-          <a:prstGeom prst="rect">
-            <a:avLst/>
-          </a:prstGeom>
-        </p:spPr>
-      </p:pic>
-      <p:sp>
-        <p:nvSpPr>
-          <p:cNvPr id="9" name="TextBox 8">
-            <a:extLst>
-              <a:ext uri="{FF2B5EF4-FFF2-40B4-BE49-F238E27FC236}">
-                <a16:creationId xmlns:a16="http://schemas.microsoft.com/office/drawing/2014/main" id="{D9EE38EE-1A99-433D-4D12-D2DCB3E26CD6}"/>
-              </a:ext>
-            </a:extLst>
-          </p:cNvPr>
-          <p:cNvSpPr txBox="1"/>
-          <p:nvPr/>
-        </p:nvSpPr>
-        <p:spPr>
-          <a:xfrm>
-            <a:off x="7679852" y="2136706"/>
-            <a:ext cx="1690410" cy="369332"/>
-          </a:xfrm>
-          <a:prstGeom prst="rect">
-            <a:avLst/>
-          </a:prstGeom>
-          <a:noFill/>
-        </p:spPr>
-        <p:txBody>
-          <a:bodyPr wrap="square" rtlCol="0">
-            <a:spAutoFit/>
-          </a:bodyPr>
-          <a:lstStyle/>
-          <a:p>
-            <a:pPr algn="ctr"/>
-            <a:r>
-              <a:rPr lang="en-US"/>
-              <a:t> Jesse Powell</a:t>
-            </a:r>
-          </a:p>
-        </p:txBody>
-      </p:sp>
-      <p:pic>
-        <p:nvPicPr>
-          <p:cNvPr id="10" name="Picture 9">
-            <a:extLst>
-              <a:ext uri="{FF2B5EF4-FFF2-40B4-BE49-F238E27FC236}">
-                <a16:creationId xmlns:a16="http://schemas.microsoft.com/office/drawing/2014/main" id="{BDCF295C-9364-9856-BF30-79F02D5E9901}"/>
-              </a:ext>
-            </a:extLst>
-          </p:cNvPr>
-          <p:cNvPicPr>
-            <a:picLocks noChangeAspect="1"/>
-          </p:cNvPicPr>
-          <p:nvPr/>
-        </p:nvPicPr>
-        <p:blipFill>
-          <a:blip r:embed="rId9" cstate="email">
-            <a:extLst>
-              <a:ext uri="{28A0092B-C50C-407E-A947-70E740481C1C}">
-                <a14:useLocalDpi xmlns:a14="http://schemas.microsoft.com/office/drawing/2010/main"/>
-              </a:ext>
-            </a:extLst>
-          </a:blip>
-          <a:stretch>
-            <a:fillRect/>
-          </a:stretch>
-        </p:blipFill>
-        <p:spPr>
-          <a:xfrm>
-            <a:off x="5499650" y="3571612"/>
-            <a:ext cx="4492383" cy="3183751"/>
-          </a:xfrm>
-          <a:prstGeom prst="rect">
-            <a:avLst/>
-          </a:prstGeom>
-        </p:spPr>
-      </p:pic>
-      <p:sp>
-        <p:nvSpPr>
-          <p:cNvPr id="11" name="TextBox 10">
-            <a:extLst>
-              <a:ext uri="{FF2B5EF4-FFF2-40B4-BE49-F238E27FC236}">
-                <a16:creationId xmlns:a16="http://schemas.microsoft.com/office/drawing/2014/main" id="{66D1B042-CBFA-C060-A90E-BCF559314667}"/>
-              </a:ext>
-            </a:extLst>
-          </p:cNvPr>
-          <p:cNvSpPr txBox="1"/>
-          <p:nvPr/>
-        </p:nvSpPr>
-        <p:spPr>
-          <a:xfrm>
-            <a:off x="102637" y="4099022"/>
-            <a:ext cx="5342919" cy="1785104"/>
-          </a:xfrm>
-          <a:prstGeom prst="rect">
-            <a:avLst/>
-          </a:prstGeom>
-          <a:noFill/>
-        </p:spPr>
-        <p:txBody>
-          <a:bodyPr wrap="square" rtlCol="0">
-            <a:spAutoFit/>
-          </a:bodyPr>
-          <a:lstStyle/>
-          <a:p>
-            <a:r>
-              <a:rPr lang="en-US" sz="1000">
-                <a:solidFill>
-                  <a:srgbClr val="00B0F0"/>
-                </a:solidFill>
-                <a:latin typeface="Menlo" panose="020B0609030804020204" pitchFamily="49" charset="0"/>
-                <a:ea typeface="Menlo" panose="020B0609030804020204" pitchFamily="49" charset="0"/>
-                <a:cs typeface="Menlo" panose="020B0609030804020204" pitchFamily="49" charset="0"/>
-              </a:rPr>
-              <a:t>import sys, time, json, urllib.request</a:t>
-            </a:r>
-          </a:p>
-          <a:p>
-            <a:endParaRPr lang="en-US" sz="1000">
-              <a:solidFill>
-                <a:srgbClr val="00B0F0"/>
-              </a:solidFill>
-              <a:latin typeface="Menlo" panose="020B0609030804020204" pitchFamily="49" charset="0"/>
-              <a:ea typeface="Menlo" panose="020B0609030804020204" pitchFamily="49" charset="0"/>
-              <a:cs typeface="Menlo" panose="020B0609030804020204" pitchFamily="49" charset="0"/>
-            </a:endParaRPr>
-          </a:p>
-          <a:p>
-            <a:r>
-              <a:rPr lang="en-US" sz="1000">
-                <a:solidFill>
-                  <a:srgbClr val="00B0F0"/>
-                </a:solidFill>
-                <a:latin typeface="Menlo" panose="020B0609030804020204" pitchFamily="49" charset="0"/>
-                <a:ea typeface="Menlo" panose="020B0609030804020204" pitchFamily="49" charset="0"/>
-                <a:cs typeface="Menlo" panose="020B0609030804020204" pitchFamily="49" charset="0"/>
-              </a:rPr>
-              <a:t>api_domain = "</a:t>
-            </a:r>
-            <a:r>
-              <a:rPr lang="en-US" sz="1000">
-                <a:solidFill>
-                  <a:srgbClr val="00B050"/>
-                </a:solidFill>
-                <a:latin typeface="Menlo" panose="020B0609030804020204" pitchFamily="49" charset="0"/>
-                <a:ea typeface="Menlo" panose="020B0609030804020204" pitchFamily="49" charset="0"/>
-                <a:cs typeface="Menlo" panose="020B0609030804020204" pitchFamily="49" charset="0"/>
-              </a:rPr>
-              <a:t>https://api.kraken.com</a:t>
-            </a:r>
-            <a:r>
-              <a:rPr lang="en-US" sz="1000">
-                <a:solidFill>
-                  <a:srgbClr val="00B0F0"/>
-                </a:solidFill>
-                <a:latin typeface="Menlo" panose="020B0609030804020204" pitchFamily="49" charset="0"/>
-                <a:ea typeface="Menlo" panose="020B0609030804020204" pitchFamily="49" charset="0"/>
-                <a:cs typeface="Menlo" panose="020B0609030804020204" pitchFamily="49" charset="0"/>
-              </a:rPr>
-              <a:t>"</a:t>
-            </a:r>
-          </a:p>
-          <a:p>
-            <a:r>
-              <a:rPr lang="en-US" sz="1000">
-                <a:solidFill>
-                  <a:srgbClr val="00B050"/>
-                </a:solidFill>
-                <a:latin typeface="Menlo" panose="020B0609030804020204" pitchFamily="49" charset="0"/>
-                <a:ea typeface="Menlo" panose="020B0609030804020204" pitchFamily="49" charset="0"/>
-                <a:cs typeface="Menlo" panose="020B0609030804020204" pitchFamily="49" charset="0"/>
-              </a:rPr>
-              <a:t># ...</a:t>
-            </a:r>
-          </a:p>
-          <a:p>
-            <a:endParaRPr lang="en-US" sz="1000">
-              <a:solidFill>
-                <a:srgbClr val="00B0F0"/>
-              </a:solidFill>
-              <a:latin typeface="Menlo" panose="020B0609030804020204" pitchFamily="49" charset="0"/>
-              <a:ea typeface="Menlo" panose="020B0609030804020204" pitchFamily="49" charset="0"/>
-              <a:cs typeface="Menlo" panose="020B0609030804020204" pitchFamily="49" charset="0"/>
-            </a:endParaRPr>
-          </a:p>
-          <a:p>
-            <a:r>
-              <a:rPr lang="en-US" sz="1000">
-                <a:solidFill>
-                  <a:srgbClr val="00B0F0"/>
-                </a:solidFill>
-                <a:latin typeface="Menlo" panose="020B0609030804020204" pitchFamily="49" charset="0"/>
-                <a:ea typeface="Menlo" panose="020B0609030804020204" pitchFamily="49" charset="0"/>
-                <a:cs typeface="Menlo" panose="020B0609030804020204" pitchFamily="49" charset="0"/>
-              </a:rPr>
-              <a:t>api_data = "?pair=%(pair)s&amp;since=%(since)s" % {"pair":api_symbol, "since":api_start}</a:t>
-            </a:r>
-          </a:p>
-          <a:p>
-            <a:r>
-              <a:rPr lang="en-US" sz="1000">
-                <a:solidFill>
-                  <a:srgbClr val="00B0F0"/>
-                </a:solidFill>
-                <a:latin typeface="Menlo" panose="020B0609030804020204" pitchFamily="49" charset="0"/>
-                <a:ea typeface="Menlo" panose="020B0609030804020204" pitchFamily="49" charset="0"/>
-                <a:cs typeface="Menlo" panose="020B0609030804020204" pitchFamily="49" charset="0"/>
-              </a:rPr>
-              <a:t>api_request = urllib.request.Request(api_domain + api_path + api_method + api_data)</a:t>
-            </a:r>
-          </a:p>
-          <a:p>
-            <a:r>
-              <a:rPr lang="en-US" sz="1000">
-                <a:solidFill>
-                  <a:srgbClr val="00B0F0"/>
-                </a:solidFill>
-                <a:latin typeface="Menlo" panose="020B0609030804020204" pitchFamily="49" charset="0"/>
-                <a:ea typeface="Menlo" panose="020B0609030804020204" pitchFamily="49" charset="0"/>
-                <a:cs typeface="Menlo" panose="020B0609030804020204" pitchFamily="49" charset="0"/>
-              </a:rPr>
-              <a:t>api_data = urllib.request.urlopen(api_request).read()</a:t>
-            </a:r>
-          </a:p>
-          <a:p>
-            <a:r>
-              <a:rPr lang="en-US" sz="1000">
-                <a:solidFill>
-                  <a:srgbClr val="00B050"/>
-                </a:solidFill>
-                <a:latin typeface="Menlo" panose="020B0609030804020204" pitchFamily="49" charset="0"/>
-                <a:ea typeface="Menlo" panose="020B0609030804020204" pitchFamily="49" charset="0"/>
-                <a:cs typeface="Menlo" panose="020B0609030804020204" pitchFamily="49" charset="0"/>
-              </a:rPr>
-              <a:t># ...</a:t>
-            </a:r>
-          </a:p>
-        </p:txBody>
-      </p:sp>
     </p:spTree>
     <p:extLst>
       <p:ext uri="{BB962C8B-B14F-4D97-AF65-F5344CB8AC3E}">
-        <p14:creationId xmlns:p14="http://schemas.microsoft.com/office/powerpoint/2010/main" val="1823628582"/>
+        <p14:creationId xmlns:p14="http://schemas.microsoft.com/office/powerpoint/2010/main" val="3505726241"/>
       </p:ext>
     </p:extLst>
   </p:cSld>

--- a/crypto_05_exchanges.pptx
+++ b/crypto_05_exchanges.pptx
@@ -823,7 +823,7 @@
           <a:p>
             <a:fld id="{EB1FAE4C-5332-014D-8E1B-BB8DA73EF81D}" type="datetimeFigureOut">
               <a:rPr lang="en-US"/>
-              <a:t>5/4/22</a:t>
+              <a:t>5/5/22</a:t>
             </a:fld>
             <a:endParaRPr lang="en-US"/>
           </a:p>
@@ -993,7 +993,7 @@
           <a:p>
             <a:fld id="{EB1FAE4C-5332-014D-8E1B-BB8DA73EF81D}" type="datetimeFigureOut">
               <a:rPr lang="en-US"/>
-              <a:t>5/4/22</a:t>
+              <a:t>5/5/22</a:t>
             </a:fld>
             <a:endParaRPr lang="en-US"/>
           </a:p>
@@ -1173,7 +1173,7 @@
           <a:p>
             <a:fld id="{EB1FAE4C-5332-014D-8E1B-BB8DA73EF81D}" type="datetimeFigureOut">
               <a:rPr lang="en-US"/>
-              <a:t>5/4/22</a:t>
+              <a:t>5/5/22</a:t>
             </a:fld>
             <a:endParaRPr lang="en-US"/>
           </a:p>
@@ -1343,7 +1343,7 @@
           <a:p>
             <a:fld id="{EB1FAE4C-5332-014D-8E1B-BB8DA73EF81D}" type="datetimeFigureOut">
               <a:rPr lang="en-US"/>
-              <a:t>5/4/22</a:t>
+              <a:t>5/5/22</a:t>
             </a:fld>
             <a:endParaRPr lang="en-US"/>
           </a:p>
@@ -1590,7 +1590,7 @@
           <a:p>
             <a:fld id="{EB1FAE4C-5332-014D-8E1B-BB8DA73EF81D}" type="datetimeFigureOut">
               <a:rPr lang="en-US"/>
-              <a:t>5/4/22</a:t>
+              <a:t>5/5/22</a:t>
             </a:fld>
             <a:endParaRPr lang="en-US"/>
           </a:p>
@@ -1821,7 +1821,7 @@
           <a:p>
             <a:fld id="{EB1FAE4C-5332-014D-8E1B-BB8DA73EF81D}" type="datetimeFigureOut">
               <a:rPr lang="en-US"/>
-              <a:t>5/4/22</a:t>
+              <a:t>5/5/22</a:t>
             </a:fld>
             <a:endParaRPr lang="en-US"/>
           </a:p>
@@ -2187,7 +2187,7 @@
           <a:p>
             <a:fld id="{EB1FAE4C-5332-014D-8E1B-BB8DA73EF81D}" type="datetimeFigureOut">
               <a:rPr lang="en-US"/>
-              <a:t>5/4/22</a:t>
+              <a:t>5/5/22</a:t>
             </a:fld>
             <a:endParaRPr lang="en-US"/>
           </a:p>
@@ -2306,7 +2306,7 @@
           <a:p>
             <a:fld id="{EB1FAE4C-5332-014D-8E1B-BB8DA73EF81D}" type="datetimeFigureOut">
               <a:rPr lang="en-US"/>
-              <a:t>5/4/22</a:t>
+              <a:t>5/5/22</a:t>
             </a:fld>
             <a:endParaRPr lang="en-US"/>
           </a:p>
@@ -2403,7 +2403,7 @@
           <a:p>
             <a:fld id="{EB1FAE4C-5332-014D-8E1B-BB8DA73EF81D}" type="datetimeFigureOut">
               <a:rPr lang="en-US"/>
-              <a:t>5/4/22</a:t>
+              <a:t>5/5/22</a:t>
             </a:fld>
             <a:endParaRPr lang="en-US"/>
           </a:p>
@@ -2679,7 +2679,7 @@
           <a:p>
             <a:fld id="{EB1FAE4C-5332-014D-8E1B-BB8DA73EF81D}" type="datetimeFigureOut">
               <a:rPr lang="en-US"/>
-              <a:t>5/4/22</a:t>
+              <a:t>5/5/22</a:t>
             </a:fld>
             <a:endParaRPr lang="en-US"/>
           </a:p>
@@ -2936,7 +2936,7 @@
           <a:p>
             <a:fld id="{EB1FAE4C-5332-014D-8E1B-BB8DA73EF81D}" type="datetimeFigureOut">
               <a:rPr lang="en-US"/>
-              <a:t>5/4/22</a:t>
+              <a:t>5/5/22</a:t>
             </a:fld>
             <a:endParaRPr lang="en-US"/>
           </a:p>
@@ -3149,7 +3149,7 @@
           <a:p>
             <a:fld id="{EB1FAE4C-5332-014D-8E1B-BB8DA73EF81D}" type="datetimeFigureOut">
               <a:rPr lang="en-US"/>
-              <a:t>5/4/22</a:t>
+              <a:t>5/5/22</a:t>
             </a:fld>
             <a:endParaRPr lang="en-US"/>
           </a:p>

--- a/crypto_05_exchanges.pptx
+++ b/crypto_05_exchanges.pptx
@@ -3575,8 +3575,8 @@
         </p:nvSpPr>
         <p:spPr>
           <a:xfrm>
-            <a:off x="1" y="1"/>
-            <a:ext cx="5130800" cy="523220"/>
+            <a:off x="0" y="1"/>
+            <a:ext cx="6095999" cy="523220"/>
           </a:xfrm>
           <a:prstGeom prst="rect">
             <a:avLst/>
@@ -3591,7 +3591,7 @@
           <a:p>
             <a:r>
               <a:rPr lang="en-US" sz="2800" b="1"/>
-              <a:t>Crypto: buy, sell, keep, convert</a:t>
+              <a:t>Crypto: buy, sell, keep, swap, convert</a:t>
             </a:r>
           </a:p>
         </p:txBody>
